--- a/Docs/Trimestre I/01-Entregable presentación/DLYTime.pptx
+++ b/Docs/Trimestre I/01-Entregable presentación/DLYTime.pptx
@@ -5,16 +5,16 @@
     <p:sldMasterId id="2147483648" r:id="rId1"/>
   </p:sldMasterIdLst>
   <p:notesMasterIdLst>
-    <p:notesMasterId r:id="rId9"/>
+    <p:notesMasterId r:id="rId10"/>
   </p:notesMasterIdLst>
   <p:sldIdLst>
-    <p:sldId id="256" r:id="rId2"/>
-    <p:sldId id="285" r:id="rId3"/>
-    <p:sldId id="311" r:id="rId4"/>
-    <p:sldId id="312" r:id="rId5"/>
-    <p:sldId id="331" r:id="rId6"/>
-    <p:sldId id="332" r:id="rId7"/>
-    <p:sldId id="333" r:id="rId8"/>
+    <p:sldId id="256" r:id="rId3"/>
+    <p:sldId id="285" r:id="rId4"/>
+    <p:sldId id="311" r:id="rId5"/>
+    <p:sldId id="312" r:id="rId6"/>
+    <p:sldId id="331" r:id="rId7"/>
+    <p:sldId id="332" r:id="rId8"/>
+    <p:sldId id="333" r:id="rId9"/>
   </p:sldIdLst>
   <p:sldSz cx="12192000" cy="6858000"/>
   <p:notesSz cx="6858000" cy="9144000"/>
@@ -113,11 +113,6 @@
       </a:defRPr>
     </a:lvl9pPr>
   </p:defaultTextStyle>
-  <p:extLst>
-    <p:ext uri="{EFAFB233-063F-42B5-8137-9DF3F51BA10A}">
-      <p15:sldGuideLst xmlns:p15="http://schemas.microsoft.com/office/powerpoint/2012/main"/>
-    </p:ext>
-  </p:extLst>
 </p:presentation>
 </file>
 
@@ -128,35 +123,11 @@
   <dgm:catLst>
     <dgm:cat type="colorful" pri="10200"/>
   </dgm:catLst>
-  <dgm:styleLbl name="node0">
+  <dgm:styleLbl name="alignAcc1">
     <dgm:fillClrLst meth="repeat">
-      <a:schemeClr val="accent1"/>
-    </dgm:fillClrLst>
-    <dgm:linClrLst meth="repeat">
-      <a:schemeClr val="lt1"/>
-    </dgm:linClrLst>
-    <dgm:effectClrLst/>
-    <dgm:txLinClrLst/>
-    <dgm:txFillClrLst/>
-    <dgm:txEffectClrLst/>
-  </dgm:styleLbl>
-  <dgm:styleLbl name="node1">
-    <dgm:fillClrLst>
-      <a:schemeClr val="accent2"/>
-      <a:schemeClr val="accent3"/>
-    </dgm:fillClrLst>
-    <dgm:linClrLst meth="repeat">
-      <a:schemeClr val="lt1"/>
-    </dgm:linClrLst>
-    <dgm:effectClrLst/>
-    <dgm:txLinClrLst/>
-    <dgm:txFillClrLst/>
-    <dgm:txEffectClrLst/>
-  </dgm:styleLbl>
-  <dgm:styleLbl name="alignNode1">
-    <dgm:fillClrLst>
-      <a:schemeClr val="accent2"/>
-      <a:schemeClr val="accent3"/>
+      <a:schemeClr val="lt1">
+        <a:alpha val="90000"/>
+      </a:schemeClr>
     </dgm:fillClrLst>
     <dgm:linClrLst>
       <a:schemeClr val="accent2"/>
@@ -164,91 +135,36 @@
     </dgm:linClrLst>
     <dgm:effectClrLst/>
     <dgm:txLinClrLst/>
-    <dgm:txFillClrLst/>
+    <dgm:txFillClrLst meth="repeat">
+      <a:schemeClr val="dk1"/>
+    </dgm:txFillClrLst>
     <dgm:txEffectClrLst/>
   </dgm:styleLbl>
-  <dgm:styleLbl name="lnNode1">
-    <dgm:fillClrLst>
-      <a:schemeClr val="accent2"/>
-      <a:schemeClr val="accent3"/>
-    </dgm:fillClrLst>
-    <dgm:linClrLst meth="repeat">
-      <a:schemeClr val="lt1"/>
-    </dgm:linClrLst>
-    <dgm:effectClrLst/>
-    <dgm:txLinClrLst/>
-    <dgm:txFillClrLst/>
-    <dgm:txEffectClrLst/>
-  </dgm:styleLbl>
-  <dgm:styleLbl name="vennNode1">
+  <dgm:styleLbl name="alignAccFollowNode1">
     <dgm:fillClrLst>
       <a:schemeClr val="accent2">
-        <a:alpha val="50000"/>
+        <a:tint val="40000"/>
+        <a:alpha val="90000"/>
       </a:schemeClr>
       <a:schemeClr val="accent3">
-        <a:alpha val="50000"/>
+        <a:tint val="40000"/>
+        <a:alpha val="90000"/>
       </a:schemeClr>
     </dgm:fillClrLst>
-    <dgm:linClrLst meth="repeat">
-      <a:schemeClr val="lt1"/>
-    </dgm:linClrLst>
-    <dgm:effectClrLst/>
-    <dgm:txLinClrLst/>
-    <dgm:txFillClrLst/>
-    <dgm:txEffectClrLst/>
-  </dgm:styleLbl>
-  <dgm:styleLbl name="node2">
-    <dgm:fillClrLst>
-      <a:schemeClr val="accent3"/>
-    </dgm:fillClrLst>
-    <dgm:linClrLst meth="repeat">
-      <a:schemeClr val="lt1"/>
-    </dgm:linClrLst>
-    <dgm:effectClrLst/>
-    <dgm:txLinClrLst/>
-    <dgm:txFillClrLst/>
-    <dgm:txEffectClrLst/>
-  </dgm:styleLbl>
-  <dgm:styleLbl name="node3">
-    <dgm:fillClrLst>
-      <a:schemeClr val="accent4"/>
-    </dgm:fillClrLst>
-    <dgm:linClrLst meth="repeat">
-      <a:schemeClr val="lt1"/>
-    </dgm:linClrLst>
-    <dgm:effectClrLst/>
-    <dgm:txLinClrLst/>
-    <dgm:txFillClrLst/>
-    <dgm:txEffectClrLst/>
-  </dgm:styleLbl>
-  <dgm:styleLbl name="node4">
-    <dgm:fillClrLst>
-      <a:schemeClr val="accent5"/>
-    </dgm:fillClrLst>
-    <dgm:linClrLst meth="repeat">
-      <a:schemeClr val="lt1"/>
-    </dgm:linClrLst>
-    <dgm:effectClrLst/>
-    <dgm:txLinClrLst/>
-    <dgm:txFillClrLst/>
-    <dgm:txEffectClrLst/>
-  </dgm:styleLbl>
-  <dgm:styleLbl name="fgImgPlace1">
-    <dgm:fillClrLst>
+    <dgm:linClrLst>
       <a:schemeClr val="accent2">
-        <a:tint val="50000"/>
+        <a:tint val="40000"/>
+        <a:alpha val="90000"/>
       </a:schemeClr>
       <a:schemeClr val="accent3">
-        <a:tint val="50000"/>
+        <a:tint val="40000"/>
+        <a:alpha val="90000"/>
       </a:schemeClr>
-    </dgm:fillClrLst>
-    <dgm:linClrLst meth="repeat">
-      <a:schemeClr val="lt1"/>
     </dgm:linClrLst>
     <dgm:effectClrLst/>
     <dgm:txLinClrLst/>
     <dgm:txFillClrLst meth="repeat">
-      <a:schemeClr val="lt1"/>
+      <a:schemeClr val="dk1"/>
     </dgm:txFillClrLst>
     <dgm:txEffectClrLst/>
   </dgm:styleLbl>
@@ -271,6 +187,129 @@
     </dgm:txFillClrLst>
     <dgm:txEffectClrLst/>
   </dgm:styleLbl>
+  <dgm:styleLbl name="alignNode1">
+    <dgm:fillClrLst>
+      <a:schemeClr val="accent2"/>
+      <a:schemeClr val="accent3"/>
+    </dgm:fillClrLst>
+    <dgm:linClrLst>
+      <a:schemeClr val="accent2"/>
+      <a:schemeClr val="accent3"/>
+    </dgm:linClrLst>
+    <dgm:effectClrLst/>
+    <dgm:txLinClrLst/>
+    <dgm:txFillClrLst/>
+    <dgm:txEffectClrLst/>
+  </dgm:styleLbl>
+  <dgm:styleLbl name="asst0">
+    <dgm:fillClrLst meth="repeat">
+      <a:schemeClr val="accent2"/>
+    </dgm:fillClrLst>
+    <dgm:linClrLst meth="repeat">
+      <a:schemeClr val="lt1">
+        <a:shade val="80000"/>
+      </a:schemeClr>
+    </dgm:linClrLst>
+    <dgm:effectClrLst/>
+    <dgm:txLinClrLst/>
+    <dgm:txFillClrLst/>
+    <dgm:txEffectClrLst/>
+  </dgm:styleLbl>
+  <dgm:styleLbl name="asst1">
+    <dgm:fillClrLst meth="repeat">
+      <a:schemeClr val="accent3"/>
+    </dgm:fillClrLst>
+    <dgm:linClrLst meth="repeat">
+      <a:schemeClr val="lt1">
+        <a:shade val="80000"/>
+      </a:schemeClr>
+    </dgm:linClrLst>
+    <dgm:effectClrLst/>
+    <dgm:txLinClrLst/>
+    <dgm:txFillClrLst/>
+    <dgm:txEffectClrLst/>
+  </dgm:styleLbl>
+  <dgm:styleLbl name="asst2">
+    <dgm:fillClrLst>
+      <a:schemeClr val="accent4"/>
+    </dgm:fillClrLst>
+    <dgm:linClrLst meth="repeat">
+      <a:schemeClr val="lt1"/>
+    </dgm:linClrLst>
+    <dgm:effectClrLst/>
+    <dgm:txLinClrLst/>
+    <dgm:txFillClrLst/>
+    <dgm:txEffectClrLst/>
+  </dgm:styleLbl>
+  <dgm:styleLbl name="asst3">
+    <dgm:fillClrLst>
+      <a:schemeClr val="accent5"/>
+    </dgm:fillClrLst>
+    <dgm:linClrLst meth="repeat">
+      <a:schemeClr val="lt1"/>
+    </dgm:linClrLst>
+    <dgm:effectClrLst/>
+    <dgm:txLinClrLst/>
+    <dgm:txFillClrLst/>
+    <dgm:txEffectClrLst/>
+  </dgm:styleLbl>
+  <dgm:styleLbl name="asst4">
+    <dgm:fillClrLst>
+      <a:schemeClr val="accent6"/>
+    </dgm:fillClrLst>
+    <dgm:linClrLst meth="repeat">
+      <a:schemeClr val="lt1"/>
+    </dgm:linClrLst>
+    <dgm:effectClrLst/>
+    <dgm:txLinClrLst/>
+    <dgm:txFillClrLst/>
+    <dgm:txEffectClrLst/>
+  </dgm:styleLbl>
+  <dgm:styleLbl name="bgAcc1">
+    <dgm:fillClrLst meth="repeat">
+      <a:schemeClr val="lt1">
+        <a:alpha val="90000"/>
+      </a:schemeClr>
+    </dgm:fillClrLst>
+    <dgm:linClrLst>
+      <a:schemeClr val="accent2"/>
+      <a:schemeClr val="accent3"/>
+    </dgm:linClrLst>
+    <dgm:effectClrLst/>
+    <dgm:txLinClrLst/>
+    <dgm:txFillClrLst meth="repeat">
+      <a:schemeClr val="dk1"/>
+    </dgm:txFillClrLst>
+    <dgm:txEffectClrLst/>
+  </dgm:styleLbl>
+  <dgm:styleLbl name="bgAccFollowNode1">
+    <dgm:fillClrLst>
+      <a:schemeClr val="accent2">
+        <a:tint val="40000"/>
+        <a:alpha val="90000"/>
+      </a:schemeClr>
+      <a:schemeClr val="accent3">
+        <a:tint val="40000"/>
+        <a:alpha val="90000"/>
+      </a:schemeClr>
+    </dgm:fillClrLst>
+    <dgm:linClrLst>
+      <a:schemeClr val="accent2">
+        <a:tint val="40000"/>
+        <a:alpha val="90000"/>
+      </a:schemeClr>
+      <a:schemeClr val="accent3">
+        <a:tint val="40000"/>
+        <a:alpha val="90000"/>
+      </a:schemeClr>
+    </dgm:linClrLst>
+    <dgm:effectClrLst/>
+    <dgm:txLinClrLst/>
+    <dgm:txFillClrLst meth="repeat">
+      <a:schemeClr val="dk1"/>
+    </dgm:txFillClrLst>
+    <dgm:txEffectClrLst/>
+  </dgm:styleLbl>
   <dgm:styleLbl name="bgImgPlace1">
     <dgm:fillClrLst>
       <a:schemeClr val="accent2">
@@ -290,31 +329,19 @@
     </dgm:txFillClrLst>
     <dgm:txEffectClrLst/>
   </dgm:styleLbl>
-  <dgm:styleLbl name="sibTrans2D1">
-    <dgm:fillClrLst>
-      <a:schemeClr val="accent2"/>
-      <a:schemeClr val="accent3"/>
+  <dgm:styleLbl name="bgShp">
+    <dgm:fillClrLst meth="repeat">
+      <a:schemeClr val="accent2">
+        <a:tint val="40000"/>
+      </a:schemeClr>
     </dgm:fillClrLst>
     <dgm:linClrLst meth="repeat">
-      <a:schemeClr val="lt1"/>
-    </dgm:linClrLst>
-    <dgm:effectClrLst/>
-    <dgm:txLinClrLst/>
-    <dgm:txFillClrLst/>
-    <dgm:txEffectClrLst/>
-  </dgm:styleLbl>
-  <dgm:styleLbl name="fgSibTrans2D1">
-    <dgm:fillClrLst>
-      <a:schemeClr val="accent2"/>
-      <a:schemeClr val="accent3"/>
-    </dgm:fillClrLst>
-    <dgm:linClrLst meth="repeat">
-      <a:schemeClr val="lt1"/>
+      <a:schemeClr val="dk1"/>
     </dgm:linClrLst>
     <dgm:effectClrLst/>
     <dgm:txLinClrLst/>
     <dgm:txFillClrLst meth="repeat">
-      <a:schemeClr val="lt1"/>
+      <a:schemeClr val="dk1"/>
     </dgm:txFillClrLst>
     <dgm:txEffectClrLst/>
   </dgm:styleLbl>
@@ -330,19 +357,6 @@
     <dgm:txLinClrLst/>
     <dgm:txFillClrLst meth="repeat">
       <a:schemeClr val="lt1"/>
-    </dgm:txFillClrLst>
-    <dgm:txEffectClrLst/>
-  </dgm:styleLbl>
-  <dgm:styleLbl name="sibTrans1D1">
-    <dgm:fillClrLst/>
-    <dgm:linClrLst>
-      <a:schemeClr val="accent2"/>
-      <a:schemeClr val="accent3"/>
-    </dgm:linClrLst>
-    <dgm:effectClrLst/>
-    <dgm:txLinClrLst/>
-    <dgm:txFillClrLst meth="repeat">
-      <a:schemeClr val="tx1"/>
     </dgm:txFillClrLst>
     <dgm:txEffectClrLst/>
   </dgm:styleLbl>
@@ -362,76 +376,31 @@
     </dgm:txFillClrLst>
     <dgm:txEffectClrLst/>
   </dgm:styleLbl>
-  <dgm:styleLbl name="asst0">
+  <dgm:styleLbl name="conFgAcc1">
     <dgm:fillClrLst meth="repeat">
+      <a:schemeClr val="lt1">
+        <a:alpha val="90000"/>
+      </a:schemeClr>
+    </dgm:fillClrLst>
+    <dgm:linClrLst>
       <a:schemeClr val="accent2"/>
-    </dgm:fillClrLst>
-    <dgm:linClrLst meth="repeat">
-      <a:schemeClr val="lt1">
-        <a:shade val="80000"/>
-      </a:schemeClr>
+      <a:schemeClr val="accent3"/>
     </dgm:linClrLst>
     <dgm:effectClrLst/>
     <dgm:txLinClrLst/>
-    <dgm:txFillClrLst/>
+    <dgm:txFillClrLst meth="repeat">
+      <a:schemeClr val="dk1"/>
+    </dgm:txFillClrLst>
     <dgm:txEffectClrLst/>
   </dgm:styleLbl>
-  <dgm:styleLbl name="asst1">
+  <dgm:styleLbl name="dkBgShp">
     <dgm:fillClrLst meth="repeat">
-      <a:schemeClr val="accent3"/>
+      <a:schemeClr val="accent2">
+        <a:shade val="90000"/>
+      </a:schemeClr>
     </dgm:fillClrLst>
     <dgm:linClrLst meth="repeat">
-      <a:schemeClr val="lt1">
-        <a:shade val="80000"/>
-      </a:schemeClr>
-    </dgm:linClrLst>
-    <dgm:effectClrLst/>
-    <dgm:txLinClrLst/>
-    <dgm:txFillClrLst/>
-    <dgm:txEffectClrLst/>
-  </dgm:styleLbl>
-  <dgm:styleLbl name="asst2">
-    <dgm:fillClrLst>
-      <a:schemeClr val="accent4"/>
-    </dgm:fillClrLst>
-    <dgm:linClrLst meth="repeat">
-      <a:schemeClr val="lt1"/>
-    </dgm:linClrLst>
-    <dgm:effectClrLst/>
-    <dgm:txLinClrLst/>
-    <dgm:txFillClrLst/>
-    <dgm:txEffectClrLst/>
-  </dgm:styleLbl>
-  <dgm:styleLbl name="asst3">
-    <dgm:fillClrLst>
-      <a:schemeClr val="accent5"/>
-    </dgm:fillClrLst>
-    <dgm:linClrLst meth="repeat">
-      <a:schemeClr val="lt1"/>
-    </dgm:linClrLst>
-    <dgm:effectClrLst/>
-    <dgm:txLinClrLst/>
-    <dgm:txFillClrLst/>
-    <dgm:txEffectClrLst/>
-  </dgm:styleLbl>
-  <dgm:styleLbl name="asst4">
-    <dgm:fillClrLst>
-      <a:schemeClr val="accent6"/>
-    </dgm:fillClrLst>
-    <dgm:linClrLst meth="repeat">
-      <a:schemeClr val="lt1"/>
-    </dgm:linClrLst>
-    <dgm:effectClrLst/>
-    <dgm:txLinClrLst/>
-    <dgm:txFillClrLst/>
-    <dgm:txEffectClrLst/>
-  </dgm:styleLbl>
-  <dgm:styleLbl name="parChTrans2D1">
-    <dgm:fillClrLst meth="repeat">
-      <a:schemeClr val="accent2"/>
-    </dgm:fillClrLst>
-    <dgm:linClrLst meth="repeat">
-      <a:schemeClr val="lt1"/>
+      <a:schemeClr val="dk1"/>
     </dgm:linClrLst>
     <dgm:effectClrLst/>
     <dgm:txLinClrLst/>
@@ -440,103 +409,19 @@
     </dgm:txFillClrLst>
     <dgm:txEffectClrLst/>
   </dgm:styleLbl>
-  <dgm:styleLbl name="parChTrans2D2">
+  <dgm:styleLbl name="fgAcc0">
     <dgm:fillClrLst meth="repeat">
-      <a:schemeClr val="accent3"/>
+      <a:schemeClr val="lt1">
+        <a:alpha val="90000"/>
+      </a:schemeClr>
     </dgm:fillClrLst>
-    <dgm:linClrLst meth="repeat">
-      <a:schemeClr val="lt1"/>
-    </dgm:linClrLst>
-    <dgm:effectClrLst/>
-    <dgm:txLinClrLst/>
-    <dgm:txFillClrLst/>
-    <dgm:txEffectClrLst/>
-  </dgm:styleLbl>
-  <dgm:styleLbl name="parChTrans2D3">
-    <dgm:fillClrLst meth="repeat">
-      <a:schemeClr val="accent4"/>
-    </dgm:fillClrLst>
-    <dgm:linClrLst meth="repeat">
-      <a:schemeClr val="lt1"/>
-    </dgm:linClrLst>
-    <dgm:effectClrLst/>
-    <dgm:txLinClrLst/>
-    <dgm:txFillClrLst/>
-    <dgm:txEffectClrLst/>
-  </dgm:styleLbl>
-  <dgm:styleLbl name="parChTrans2D4">
-    <dgm:fillClrLst meth="repeat">
-      <a:schemeClr val="accent5"/>
-    </dgm:fillClrLst>
-    <dgm:linClrLst meth="repeat">
-      <a:schemeClr val="lt1"/>
+    <dgm:linClrLst>
+      <a:schemeClr val="accent1"/>
     </dgm:linClrLst>
     <dgm:effectClrLst/>
     <dgm:txLinClrLst/>
     <dgm:txFillClrLst meth="repeat">
-      <a:schemeClr val="lt1"/>
-    </dgm:txFillClrLst>
-    <dgm:txEffectClrLst/>
-  </dgm:styleLbl>
-  <dgm:styleLbl name="parChTrans1D1">
-    <dgm:fillClrLst meth="repeat">
-      <a:schemeClr val="accent2"/>
-    </dgm:fillClrLst>
-    <dgm:linClrLst meth="repeat">
-      <a:schemeClr val="accent2"/>
-    </dgm:linClrLst>
-    <dgm:effectClrLst/>
-    <dgm:txLinClrLst/>
-    <dgm:txFillClrLst meth="repeat">
-      <a:schemeClr val="tx1"/>
-    </dgm:txFillClrLst>
-    <dgm:txEffectClrLst/>
-  </dgm:styleLbl>
-  <dgm:styleLbl name="parChTrans1D2">
-    <dgm:fillClrLst meth="repeat">
-      <a:schemeClr val="accent2">
-        <a:tint val="90000"/>
-      </a:schemeClr>
-    </dgm:fillClrLst>
-    <dgm:linClrLst meth="repeat">
-      <a:schemeClr val="accent3"/>
-    </dgm:linClrLst>
-    <dgm:effectClrLst/>
-    <dgm:txLinClrLst/>
-    <dgm:txFillClrLst meth="repeat">
-      <a:schemeClr val="tx1"/>
-    </dgm:txFillClrLst>
-    <dgm:txEffectClrLst/>
-  </dgm:styleLbl>
-  <dgm:styleLbl name="parChTrans1D3">
-    <dgm:fillClrLst meth="repeat">
-      <a:schemeClr val="accent2">
-        <a:tint val="70000"/>
-      </a:schemeClr>
-    </dgm:fillClrLst>
-    <dgm:linClrLst meth="repeat">
-      <a:schemeClr val="accent4"/>
-    </dgm:linClrLst>
-    <dgm:effectClrLst/>
-    <dgm:txLinClrLst/>
-    <dgm:txFillClrLst meth="repeat">
-      <a:schemeClr val="tx1"/>
-    </dgm:txFillClrLst>
-    <dgm:txEffectClrLst/>
-  </dgm:styleLbl>
-  <dgm:styleLbl name="parChTrans1D4">
-    <dgm:fillClrLst meth="repeat">
-      <a:schemeClr val="accent2">
-        <a:tint val="50000"/>
-      </a:schemeClr>
-    </dgm:fillClrLst>
-    <dgm:linClrLst meth="repeat">
-      <a:schemeClr val="accent5"/>
-    </dgm:linClrLst>
-    <dgm:effectClrLst/>
-    <dgm:txLinClrLst/>
-    <dgm:txFillClrLst meth="repeat">
-      <a:schemeClr val="tx1"/>
+      <a:schemeClr val="dk1"/>
     </dgm:txFillClrLst>
     <dgm:txEffectClrLst/>
   </dgm:styleLbl>
@@ -557,14 +442,13 @@
     </dgm:txFillClrLst>
     <dgm:txEffectClrLst/>
   </dgm:styleLbl>
-  <dgm:styleLbl name="conFgAcc1">
+  <dgm:styleLbl name="fgAcc2">
     <dgm:fillClrLst meth="repeat">
       <a:schemeClr val="lt1">
         <a:alpha val="90000"/>
       </a:schemeClr>
     </dgm:fillClrLst>
     <dgm:linClrLst>
-      <a:schemeClr val="accent2"/>
       <a:schemeClr val="accent3"/>
     </dgm:linClrLst>
     <dgm:effectClrLst/>
@@ -574,15 +458,14 @@
     </dgm:txFillClrLst>
     <dgm:txEffectClrLst/>
   </dgm:styleLbl>
-  <dgm:styleLbl name="alignAcc1">
+  <dgm:styleLbl name="fgAcc3">
     <dgm:fillClrLst meth="repeat">
       <a:schemeClr val="lt1">
         <a:alpha val="90000"/>
       </a:schemeClr>
     </dgm:fillClrLst>
     <dgm:linClrLst>
-      <a:schemeClr val="accent2"/>
-      <a:schemeClr val="accent3"/>
+      <a:schemeClr val="accent4"/>
     </dgm:linClrLst>
     <dgm:effectClrLst/>
     <dgm:txLinClrLst/>
@@ -591,76 +474,14 @@
     </dgm:txFillClrLst>
     <dgm:txEffectClrLst/>
   </dgm:styleLbl>
-  <dgm:styleLbl name="trAlignAcc1">
-    <dgm:fillClrLst meth="repeat">
-      <a:schemeClr val="lt1">
-        <a:alpha val="40000"/>
-      </a:schemeClr>
-    </dgm:fillClrLst>
-    <dgm:linClrLst meth="repeat">
-      <a:schemeClr val="accent2"/>
-    </dgm:linClrLst>
-    <dgm:effectClrLst/>
-    <dgm:txLinClrLst/>
-    <dgm:txFillClrLst meth="repeat">
-      <a:schemeClr val="dk1"/>
-    </dgm:txFillClrLst>
-    <dgm:txEffectClrLst/>
-  </dgm:styleLbl>
-  <dgm:styleLbl name="bgAcc1">
+  <dgm:styleLbl name="fgAcc4">
     <dgm:fillClrLst meth="repeat">
       <a:schemeClr val="lt1">
         <a:alpha val="90000"/>
       </a:schemeClr>
     </dgm:fillClrLst>
     <dgm:linClrLst>
-      <a:schemeClr val="accent2"/>
-      <a:schemeClr val="accent3"/>
-    </dgm:linClrLst>
-    <dgm:effectClrLst/>
-    <dgm:txLinClrLst/>
-    <dgm:txFillClrLst meth="repeat">
-      <a:schemeClr val="dk1"/>
-    </dgm:txFillClrLst>
-    <dgm:txEffectClrLst/>
-  </dgm:styleLbl>
-  <dgm:styleLbl name="solidFgAcc1">
-    <dgm:fillClrLst meth="repeat">
-      <a:schemeClr val="lt1"/>
-    </dgm:fillClrLst>
-    <dgm:linClrLst>
-      <a:schemeClr val="accent2"/>
-      <a:schemeClr val="accent3"/>
-    </dgm:linClrLst>
-    <dgm:effectClrLst/>
-    <dgm:txLinClrLst/>
-    <dgm:txFillClrLst meth="repeat">
-      <a:schemeClr val="dk1"/>
-    </dgm:txFillClrLst>
-    <dgm:txEffectClrLst/>
-  </dgm:styleLbl>
-  <dgm:styleLbl name="solidAlignAcc1">
-    <dgm:fillClrLst meth="repeat">
-      <a:schemeClr val="lt1"/>
-    </dgm:fillClrLst>
-    <dgm:linClrLst>
-      <a:schemeClr val="accent2"/>
-      <a:schemeClr val="accent3"/>
-    </dgm:linClrLst>
-    <dgm:effectClrLst/>
-    <dgm:txLinClrLst/>
-    <dgm:txFillClrLst meth="repeat">
-      <a:schemeClr val="dk1"/>
-    </dgm:txFillClrLst>
-    <dgm:txEffectClrLst/>
-  </dgm:styleLbl>
-  <dgm:styleLbl name="solidBgAcc1">
-    <dgm:fillClrLst meth="repeat">
-      <a:schemeClr val="lt1"/>
-    </dgm:fillClrLst>
-    <dgm:linClrLst>
-      <a:schemeClr val="accent2"/>
-      <a:schemeClr val="accent3"/>
+      <a:schemeClr val="accent5"/>
     </dgm:linClrLst>
     <dgm:effectClrLst/>
     <dgm:txLinClrLst/>
@@ -697,26 +518,33 @@
     </dgm:txFillClrLst>
     <dgm:txEffectClrLst/>
   </dgm:styleLbl>
-  <dgm:styleLbl name="alignAccFollowNode1">
+  <dgm:styleLbl name="fgImgPlace1">
     <dgm:fillClrLst>
       <a:schemeClr val="accent2">
-        <a:tint val="40000"/>
-        <a:alpha val="90000"/>
+        <a:tint val="50000"/>
       </a:schemeClr>
       <a:schemeClr val="accent3">
-        <a:tint val="40000"/>
-        <a:alpha val="90000"/>
+        <a:tint val="50000"/>
       </a:schemeClr>
     </dgm:fillClrLst>
-    <dgm:linClrLst>
+    <dgm:linClrLst meth="repeat">
+      <a:schemeClr val="lt1"/>
+    </dgm:linClrLst>
+    <dgm:effectClrLst/>
+    <dgm:txLinClrLst/>
+    <dgm:txFillClrLst meth="repeat">
+      <a:schemeClr val="lt1"/>
+    </dgm:txFillClrLst>
+    <dgm:txEffectClrLst/>
+  </dgm:styleLbl>
+  <dgm:styleLbl name="fgShp">
+    <dgm:fillClrLst meth="repeat">
       <a:schemeClr val="accent2">
         <a:tint val="40000"/>
-        <a:alpha val="90000"/>
       </a:schemeClr>
-      <a:schemeClr val="accent3">
-        <a:tint val="40000"/>
-        <a:alpha val="90000"/>
-      </a:schemeClr>
+    </dgm:fillClrLst>
+    <dgm:linClrLst meth="repeat">
+      <a:schemeClr val="lt1"/>
     </dgm:linClrLst>
     <dgm:effectClrLst/>
     <dgm:txLinClrLst/>
@@ -725,57 +553,259 @@
     </dgm:txFillClrLst>
     <dgm:txEffectClrLst/>
   </dgm:styleLbl>
-  <dgm:styleLbl name="bgAccFollowNode1">
+  <dgm:styleLbl name="fgSibTrans2D1">
     <dgm:fillClrLst>
+      <a:schemeClr val="accent2"/>
+      <a:schemeClr val="accent3"/>
+    </dgm:fillClrLst>
+    <dgm:linClrLst meth="repeat">
+      <a:schemeClr val="lt1"/>
+    </dgm:linClrLst>
+    <dgm:effectClrLst/>
+    <dgm:txLinClrLst/>
+    <dgm:txFillClrLst meth="repeat">
+      <a:schemeClr val="lt1"/>
+    </dgm:txFillClrLst>
+    <dgm:txEffectClrLst/>
+  </dgm:styleLbl>
+  <dgm:styleLbl name="lnNode1">
+    <dgm:fillClrLst>
+      <a:schemeClr val="accent2"/>
+      <a:schemeClr val="accent3"/>
+    </dgm:fillClrLst>
+    <dgm:linClrLst meth="repeat">
+      <a:schemeClr val="lt1"/>
+    </dgm:linClrLst>
+    <dgm:effectClrLst/>
+    <dgm:txLinClrLst/>
+    <dgm:txFillClrLst/>
+    <dgm:txEffectClrLst/>
+  </dgm:styleLbl>
+  <dgm:styleLbl name="node0">
+    <dgm:fillClrLst meth="repeat">
+      <a:schemeClr val="accent1"/>
+    </dgm:fillClrLst>
+    <dgm:linClrLst meth="repeat">
+      <a:schemeClr val="lt1"/>
+    </dgm:linClrLst>
+    <dgm:effectClrLst/>
+    <dgm:txLinClrLst/>
+    <dgm:txFillClrLst/>
+    <dgm:txEffectClrLst/>
+  </dgm:styleLbl>
+  <dgm:styleLbl name="node1">
+    <dgm:fillClrLst>
+      <a:schemeClr val="accent2"/>
+      <a:schemeClr val="accent3"/>
+    </dgm:fillClrLst>
+    <dgm:linClrLst meth="repeat">
+      <a:schemeClr val="lt1"/>
+    </dgm:linClrLst>
+    <dgm:effectClrLst/>
+    <dgm:txLinClrLst/>
+    <dgm:txFillClrLst/>
+    <dgm:txEffectClrLst/>
+  </dgm:styleLbl>
+  <dgm:styleLbl name="node2">
+    <dgm:fillClrLst>
+      <a:schemeClr val="accent3"/>
+    </dgm:fillClrLst>
+    <dgm:linClrLst meth="repeat">
+      <a:schemeClr val="lt1"/>
+    </dgm:linClrLst>
+    <dgm:effectClrLst/>
+    <dgm:txLinClrLst/>
+    <dgm:txFillClrLst/>
+    <dgm:txEffectClrLst/>
+  </dgm:styleLbl>
+  <dgm:styleLbl name="node3">
+    <dgm:fillClrLst>
+      <a:schemeClr val="accent4"/>
+    </dgm:fillClrLst>
+    <dgm:linClrLst meth="repeat">
+      <a:schemeClr val="lt1"/>
+    </dgm:linClrLst>
+    <dgm:effectClrLst/>
+    <dgm:txLinClrLst/>
+    <dgm:txFillClrLst/>
+    <dgm:txEffectClrLst/>
+  </dgm:styleLbl>
+  <dgm:styleLbl name="node4">
+    <dgm:fillClrLst>
+      <a:schemeClr val="accent5"/>
+    </dgm:fillClrLst>
+    <dgm:linClrLst meth="repeat">
+      <a:schemeClr val="lt1"/>
+    </dgm:linClrLst>
+    <dgm:effectClrLst/>
+    <dgm:txLinClrLst/>
+    <dgm:txFillClrLst/>
+    <dgm:txEffectClrLst/>
+  </dgm:styleLbl>
+  <dgm:styleLbl name="parChTrans1D1">
+    <dgm:fillClrLst meth="repeat">
+      <a:schemeClr val="accent2"/>
+    </dgm:fillClrLst>
+    <dgm:linClrLst meth="repeat">
+      <a:schemeClr val="accent2"/>
+    </dgm:linClrLst>
+    <dgm:effectClrLst/>
+    <dgm:txLinClrLst/>
+    <dgm:txFillClrLst meth="repeat">
+      <a:schemeClr val="tx1"/>
+    </dgm:txFillClrLst>
+    <dgm:txEffectClrLst/>
+  </dgm:styleLbl>
+  <dgm:styleLbl name="parChTrans1D2">
+    <dgm:fillClrLst meth="repeat">
       <a:schemeClr val="accent2">
-        <a:tint val="40000"/>
-        <a:alpha val="90000"/>
-      </a:schemeClr>
-      <a:schemeClr val="accent3">
-        <a:tint val="40000"/>
-        <a:alpha val="90000"/>
+        <a:tint val="90000"/>
       </a:schemeClr>
     </dgm:fillClrLst>
-    <dgm:linClrLst>
+    <dgm:linClrLst meth="repeat">
+      <a:schemeClr val="accent3"/>
+    </dgm:linClrLst>
+    <dgm:effectClrLst/>
+    <dgm:txLinClrLst/>
+    <dgm:txFillClrLst meth="repeat">
+      <a:schemeClr val="tx1"/>
+    </dgm:txFillClrLst>
+    <dgm:txEffectClrLst/>
+  </dgm:styleLbl>
+  <dgm:styleLbl name="parChTrans1D3">
+    <dgm:fillClrLst meth="repeat">
       <a:schemeClr val="accent2">
-        <a:tint val="40000"/>
-        <a:alpha val="90000"/>
+        <a:tint val="70000"/>
       </a:schemeClr>
-      <a:schemeClr val="accent3">
-        <a:tint val="40000"/>
-        <a:alpha val="90000"/>
+    </dgm:fillClrLst>
+    <dgm:linClrLst meth="repeat">
+      <a:schemeClr val="accent4"/>
+    </dgm:linClrLst>
+    <dgm:effectClrLst/>
+    <dgm:txLinClrLst/>
+    <dgm:txFillClrLst meth="repeat">
+      <a:schemeClr val="tx1"/>
+    </dgm:txFillClrLst>
+    <dgm:txEffectClrLst/>
+  </dgm:styleLbl>
+  <dgm:styleLbl name="parChTrans1D4">
+    <dgm:fillClrLst meth="repeat">
+      <a:schemeClr val="accent2">
+        <a:tint val="50000"/>
+      </a:schemeClr>
+    </dgm:fillClrLst>
+    <dgm:linClrLst meth="repeat">
+      <a:schemeClr val="accent5"/>
+    </dgm:linClrLst>
+    <dgm:effectClrLst/>
+    <dgm:txLinClrLst/>
+    <dgm:txFillClrLst meth="repeat">
+      <a:schemeClr val="tx1"/>
+    </dgm:txFillClrLst>
+    <dgm:txEffectClrLst/>
+  </dgm:styleLbl>
+  <dgm:styleLbl name="parChTrans2D1">
+    <dgm:fillClrLst meth="repeat">
+      <a:schemeClr val="accent2"/>
+    </dgm:fillClrLst>
+    <dgm:linClrLst meth="repeat">
+      <a:schemeClr val="lt1"/>
+    </dgm:linClrLst>
+    <dgm:effectClrLst/>
+    <dgm:txLinClrLst/>
+    <dgm:txFillClrLst meth="repeat">
+      <a:schemeClr val="lt1"/>
+    </dgm:txFillClrLst>
+    <dgm:txEffectClrLst/>
+  </dgm:styleLbl>
+  <dgm:styleLbl name="parChTrans2D2">
+    <dgm:fillClrLst meth="repeat">
+      <a:schemeClr val="accent3"/>
+    </dgm:fillClrLst>
+    <dgm:linClrLst meth="repeat">
+      <a:schemeClr val="lt1"/>
+    </dgm:linClrLst>
+    <dgm:effectClrLst/>
+    <dgm:txLinClrLst/>
+    <dgm:txFillClrLst/>
+    <dgm:txEffectClrLst/>
+  </dgm:styleLbl>
+  <dgm:styleLbl name="parChTrans2D3">
+    <dgm:fillClrLst meth="repeat">
+      <a:schemeClr val="accent4"/>
+    </dgm:fillClrLst>
+    <dgm:linClrLst meth="repeat">
+      <a:schemeClr val="lt1"/>
+    </dgm:linClrLst>
+    <dgm:effectClrLst/>
+    <dgm:txLinClrLst/>
+    <dgm:txFillClrLst/>
+    <dgm:txEffectClrLst/>
+  </dgm:styleLbl>
+  <dgm:styleLbl name="parChTrans2D4">
+    <dgm:fillClrLst meth="repeat">
+      <a:schemeClr val="accent5"/>
+    </dgm:fillClrLst>
+    <dgm:linClrLst meth="repeat">
+      <a:schemeClr val="lt1"/>
+    </dgm:linClrLst>
+    <dgm:effectClrLst/>
+    <dgm:txLinClrLst/>
+    <dgm:txFillClrLst meth="repeat">
+      <a:schemeClr val="lt1"/>
+    </dgm:txFillClrLst>
+    <dgm:txEffectClrLst/>
+  </dgm:styleLbl>
+  <dgm:styleLbl name="revTx">
+    <dgm:fillClrLst meth="repeat">
+      <a:schemeClr val="lt1">
+        <a:alpha val="0"/>
+      </a:schemeClr>
+    </dgm:fillClrLst>
+    <dgm:linClrLst meth="repeat">
+      <a:schemeClr val="dk1">
+        <a:alpha val="0"/>
       </a:schemeClr>
     </dgm:linClrLst>
     <dgm:effectClrLst/>
     <dgm:txLinClrLst/>
     <dgm:txFillClrLst meth="repeat">
-      <a:schemeClr val="dk1"/>
+      <a:schemeClr val="tx1"/>
     </dgm:txFillClrLst>
     <dgm:txEffectClrLst/>
   </dgm:styleLbl>
-  <dgm:styleLbl name="fgAcc0">
-    <dgm:fillClrLst meth="repeat">
-      <a:schemeClr val="lt1">
-        <a:alpha val="90000"/>
-      </a:schemeClr>
-    </dgm:fillClrLst>
+  <dgm:styleLbl name="sibTrans1D1">
+    <dgm:fillClrLst/>
     <dgm:linClrLst>
-      <a:schemeClr val="accent1"/>
+      <a:schemeClr val="accent2"/>
+      <a:schemeClr val="accent3"/>
     </dgm:linClrLst>
     <dgm:effectClrLst/>
     <dgm:txLinClrLst/>
     <dgm:txFillClrLst meth="repeat">
-      <a:schemeClr val="dk1"/>
+      <a:schemeClr val="tx1"/>
     </dgm:txFillClrLst>
     <dgm:txEffectClrLst/>
   </dgm:styleLbl>
-  <dgm:styleLbl name="fgAcc2">
+  <dgm:styleLbl name="sibTrans2D1">
+    <dgm:fillClrLst>
+      <a:schemeClr val="accent2"/>
+      <a:schemeClr val="accent3"/>
+    </dgm:fillClrLst>
+    <dgm:linClrLst meth="repeat">
+      <a:schemeClr val="lt1"/>
+    </dgm:linClrLst>
+    <dgm:effectClrLst/>
+    <dgm:txLinClrLst/>
+    <dgm:txFillClrLst/>
+    <dgm:txEffectClrLst/>
+  </dgm:styleLbl>
+  <dgm:styleLbl name="solidAlignAcc1">
     <dgm:fillClrLst meth="repeat">
-      <a:schemeClr val="lt1">
-        <a:alpha val="90000"/>
-      </a:schemeClr>
+      <a:schemeClr val="lt1"/>
     </dgm:fillClrLst>
     <dgm:linClrLst>
+      <a:schemeClr val="accent2"/>
       <a:schemeClr val="accent3"/>
     </dgm:linClrLst>
     <dgm:effectClrLst/>
@@ -785,14 +815,13 @@
     </dgm:txFillClrLst>
     <dgm:txEffectClrLst/>
   </dgm:styleLbl>
-  <dgm:styleLbl name="fgAcc3">
+  <dgm:styleLbl name="solidBgAcc1">
     <dgm:fillClrLst meth="repeat">
-      <a:schemeClr val="lt1">
-        <a:alpha val="90000"/>
-      </a:schemeClr>
+      <a:schemeClr val="lt1"/>
     </dgm:fillClrLst>
     <dgm:linClrLst>
-      <a:schemeClr val="accent4"/>
+      <a:schemeClr val="accent2"/>
+      <a:schemeClr val="accent3"/>
     </dgm:linClrLst>
     <dgm:effectClrLst/>
     <dgm:txLinClrLst/>
@@ -801,14 +830,13 @@
     </dgm:txFillClrLst>
     <dgm:txEffectClrLst/>
   </dgm:styleLbl>
-  <dgm:styleLbl name="fgAcc4">
+  <dgm:styleLbl name="solidFgAcc1">
     <dgm:fillClrLst meth="repeat">
-      <a:schemeClr val="lt1">
-        <a:alpha val="90000"/>
-      </a:schemeClr>
+      <a:schemeClr val="lt1"/>
     </dgm:fillClrLst>
     <dgm:linClrLst>
-      <a:schemeClr val="accent5"/>
+      <a:schemeClr val="accent2"/>
+      <a:schemeClr val="accent3"/>
     </dgm:linClrLst>
     <dgm:effectClrLst/>
     <dgm:txLinClrLst/>
@@ -817,35 +845,19 @@
     </dgm:txFillClrLst>
     <dgm:txEffectClrLst/>
   </dgm:styleLbl>
-  <dgm:styleLbl name="bgShp">
+  <dgm:styleLbl name="trAlignAcc1">
     <dgm:fillClrLst meth="repeat">
-      <a:schemeClr val="accent2">
-        <a:tint val="40000"/>
+      <a:schemeClr val="lt1">
+        <a:alpha val="40000"/>
       </a:schemeClr>
     </dgm:fillClrLst>
     <dgm:linClrLst meth="repeat">
-      <a:schemeClr val="dk1"/>
+      <a:schemeClr val="accent2"/>
     </dgm:linClrLst>
     <dgm:effectClrLst/>
     <dgm:txLinClrLst/>
     <dgm:txFillClrLst meth="repeat">
       <a:schemeClr val="dk1"/>
-    </dgm:txFillClrLst>
-    <dgm:txEffectClrLst/>
-  </dgm:styleLbl>
-  <dgm:styleLbl name="dkBgShp">
-    <dgm:fillClrLst meth="repeat">
-      <a:schemeClr val="accent2">
-        <a:shade val="90000"/>
-      </a:schemeClr>
-    </dgm:fillClrLst>
-    <dgm:linClrLst meth="repeat">
-      <a:schemeClr val="dk1"/>
-    </dgm:linClrLst>
-    <dgm:effectClrLst/>
-    <dgm:txLinClrLst/>
-    <dgm:txFillClrLst meth="repeat">
-      <a:schemeClr val="lt1"/>
     </dgm:txFillClrLst>
     <dgm:txEffectClrLst/>
   </dgm:styleLbl>
@@ -866,10 +878,13 @@
     </dgm:txFillClrLst>
     <dgm:txEffectClrLst/>
   </dgm:styleLbl>
-  <dgm:styleLbl name="fgShp">
-    <dgm:fillClrLst meth="repeat">
+  <dgm:styleLbl name="vennNode1">
+    <dgm:fillClrLst>
       <a:schemeClr val="accent2">
-        <a:tint val="40000"/>
+        <a:alpha val="50000"/>
+      </a:schemeClr>
+      <a:schemeClr val="accent3">
+        <a:alpha val="50000"/>
       </a:schemeClr>
     </dgm:fillClrLst>
     <dgm:linClrLst meth="repeat">
@@ -877,27 +892,7 @@
     </dgm:linClrLst>
     <dgm:effectClrLst/>
     <dgm:txLinClrLst/>
-    <dgm:txFillClrLst meth="repeat">
-      <a:schemeClr val="dk1"/>
-    </dgm:txFillClrLst>
-    <dgm:txEffectClrLst/>
-  </dgm:styleLbl>
-  <dgm:styleLbl name="revTx">
-    <dgm:fillClrLst meth="repeat">
-      <a:schemeClr val="lt1">
-        <a:alpha val="0"/>
-      </a:schemeClr>
-    </dgm:fillClrLst>
-    <dgm:linClrLst meth="repeat">
-      <a:schemeClr val="dk1">
-        <a:alpha val="0"/>
-      </a:schemeClr>
-    </dgm:linClrLst>
-    <dgm:effectClrLst/>
-    <dgm:txLinClrLst/>
-    <dgm:txFillClrLst meth="repeat">
-      <a:schemeClr val="tx1"/>
-    </dgm:txFillClrLst>
+    <dgm:txFillClrLst/>
     <dgm:txEffectClrLst/>
   </dgm:styleLbl>
 </dgm:colorsDef>
@@ -932,7 +927,7 @@
         </a:p>
       </dgm:t>
     </dgm:pt>
-    <dgm:pt modelId="{5D9F6F83-C9CF-4479-B680-06197B8D2FA5}" type="parTrans" cxnId="{73748D77-1AEF-448F-A326-6940D2525367}">
+    <dgm:pt modelId="{5D9F6F83-C9CF-4479-B680-06197B8D2FA5}" cxnId="{73748D77-1AEF-448F-A326-6940D2525367}" type="parTrans">
       <dgm:prSet/>
       <dgm:spPr/>
       <dgm:t>
@@ -943,7 +938,7 @@
         </a:p>
       </dgm:t>
     </dgm:pt>
-    <dgm:pt modelId="{4CB7A7F8-096E-4A6E-9EC9-8137D490AA52}" type="sibTrans" cxnId="{73748D77-1AEF-448F-A326-6940D2525367}">
+    <dgm:pt modelId="{4CB7A7F8-096E-4A6E-9EC9-8137D490AA52}" cxnId="{73748D77-1AEF-448F-A326-6940D2525367}" type="sibTrans">
       <dgm:prSet/>
       <dgm:spPr/>
       <dgm:t>
@@ -972,7 +967,7 @@
         </a:p>
       </dgm:t>
     </dgm:pt>
-    <dgm:pt modelId="{F97D70E2-CA61-456D-A3DD-70E8F9F19205}" type="parTrans" cxnId="{3657AB2E-DEA7-4A16-841B-7C7A2E5931F1}">
+    <dgm:pt modelId="{F97D70E2-CA61-456D-A3DD-70E8F9F19205}" cxnId="{3657AB2E-DEA7-4A16-841B-7C7A2E5931F1}" type="parTrans">
       <dgm:prSet/>
       <dgm:spPr/>
       <dgm:t>
@@ -983,7 +978,7 @@
         </a:p>
       </dgm:t>
     </dgm:pt>
-    <dgm:pt modelId="{3FD7622E-30F4-4EDB-A205-CE6235CE54ED}" type="sibTrans" cxnId="{3657AB2E-DEA7-4A16-841B-7C7A2E5931F1}">
+    <dgm:pt modelId="{3FD7622E-30F4-4EDB-A205-CE6235CE54ED}" cxnId="{3657AB2E-DEA7-4A16-841B-7C7A2E5931F1}" type="sibTrans">
       <dgm:prSet/>
       <dgm:spPr/>
       <dgm:t>
@@ -1017,7 +1012,7 @@
         </a:p>
       </dgm:t>
     </dgm:pt>
-    <dgm:pt modelId="{2264C9AB-69F3-4D5B-9A3D-D330C9B23F08}" type="sibTrans" cxnId="{08C16837-9A88-4257-AE06-FAB4B9406A27}">
+    <dgm:pt modelId="{2264C9AB-69F3-4D5B-9A3D-D330C9B23F08}" cxnId="{08C16837-9A88-4257-AE06-FAB4B9406A27}" type="sibTrans">
       <dgm:prSet/>
       <dgm:spPr/>
       <dgm:t>
@@ -1028,7 +1023,7 @@
         </a:p>
       </dgm:t>
     </dgm:pt>
-    <dgm:pt modelId="{C7665D0E-9CDB-4D05-A0D0-8CD2ABF9016D}" type="parTrans" cxnId="{08C16837-9A88-4257-AE06-FAB4B9406A27}">
+    <dgm:pt modelId="{C7665D0E-9CDB-4D05-A0D0-8CD2ABF9016D}" cxnId="{08C16837-9A88-4257-AE06-FAB4B9406A27}" type="parTrans">
       <dgm:prSet/>
       <dgm:spPr/>
       <dgm:t>
@@ -1054,7 +1049,7 @@
         </a:p>
       </dgm:t>
     </dgm:pt>
-    <dgm:pt modelId="{D010EA0E-990C-4505-BBAD-34CFD5025F26}" type="sibTrans" cxnId="{6B9DD162-416D-42C6-ABF1-265D243069C7}">
+    <dgm:pt modelId="{D010EA0E-990C-4505-BBAD-34CFD5025F26}" cxnId="{6B9DD162-416D-42C6-ABF1-265D243069C7}" type="sibTrans">
       <dgm:prSet/>
       <dgm:spPr/>
       <dgm:t>
@@ -1065,7 +1060,7 @@
         </a:p>
       </dgm:t>
     </dgm:pt>
-    <dgm:pt modelId="{04EB328F-67E1-4EEF-9FA6-EFE6B4975BD6}" type="parTrans" cxnId="{6B9DD162-416D-42C6-ABF1-265D243069C7}">
+    <dgm:pt modelId="{04EB328F-67E1-4EEF-9FA6-EFE6B4975BD6}" cxnId="{6B9DD162-416D-42C6-ABF1-265D243069C7}" type="parTrans">
       <dgm:prSet/>
       <dgm:spPr/>
       <dgm:t>
@@ -1099,7 +1094,7 @@
         </a:p>
       </dgm:t>
     </dgm:pt>
-    <dgm:pt modelId="{AF2612CD-6C4F-4E16-BF83-8A87947586A5}" type="sibTrans" cxnId="{C2792066-3BF8-4374-A397-E9FF3E977A01}">
+    <dgm:pt modelId="{AF2612CD-6C4F-4E16-BF83-8A87947586A5}" cxnId="{C2792066-3BF8-4374-A397-E9FF3E977A01}" type="sibTrans">
       <dgm:prSet/>
       <dgm:spPr/>
       <dgm:t>
@@ -1110,7 +1105,7 @@
         </a:p>
       </dgm:t>
     </dgm:pt>
-    <dgm:pt modelId="{2B1AC413-1055-4960-8B52-EACDCB476321}" type="parTrans" cxnId="{C2792066-3BF8-4374-A397-E9FF3E977A01}">
+    <dgm:pt modelId="{2B1AC413-1055-4960-8B52-EACDCB476321}" cxnId="{C2792066-3BF8-4374-A397-E9FF3E977A01}" type="parTrans">
       <dgm:prSet/>
       <dgm:spPr/>
       <dgm:t>
@@ -1213,60 +1208,52 @@
   <dgm:whole/>
   <dgm:extLst>
     <a:ext uri="http://schemas.microsoft.com/office/drawing/2008/diagram">
-      <dsp:dataModelExt xmlns:dsp="http://schemas.microsoft.com/office/drawing/2008/diagram" relId="rId6" minVer="http://schemas.openxmlformats.org/drawingml/2006/diagram"/>
+      <dsp:dataModelExt xmlns:dsp="http://schemas.microsoft.com/office/drawing/2008/diagram" relId="rId5" minVer="http://schemas.openxmlformats.org/drawingml/2006/diagram"/>
     </a:ext>
   </dgm:extLst>
 </dgm:dataModel>
 </file>
 
 <file path=ppt/diagrams/drawing1.xml><?xml version="1.0" encoding="utf-8"?>
-<dsp:drawing xmlns:dgm="http://schemas.openxmlformats.org/drawingml/2006/diagram" xmlns:dsp="http://schemas.microsoft.com/office/drawing/2008/diagram" xmlns:a="http://schemas.openxmlformats.org/drawingml/2006/main">
+<dsp:drawing xmlns:dgm="http://schemas.openxmlformats.org/drawingml/2006/diagram" xmlns:dsp="http://schemas.microsoft.com/office/drawing/2008/diagram" xmlns:a="http://schemas.openxmlformats.org/drawingml/2006/main" xmlns:r="http://schemas.openxmlformats.org/officeDocument/2006/relationships">
   <dsp:spTree>
     <dsp:nvGrpSpPr>
-      <dsp:cNvPr id="0" name=""/>
+      <dsp:cNvPr id="2" name="Grupo 1"/>
       <dsp:cNvGrpSpPr/>
     </dsp:nvGrpSpPr>
-    <dsp:grpSpPr/>
+    <dsp:grpSpPr>
+      <a:xfrm>
+        <a:off x="0" y="0"/>
+        <a:ext cx="9601200" cy="3581400"/>
+        <a:chOff x="0" y="0"/>
+        <a:chExt cx="9601200" cy="3581400"/>
+      </a:xfrm>
+    </dsp:grpSpPr>
     <dsp:sp modelId="{CB1E82FA-25C6-4D0A-A912-BEE408F6759C}">
       <dsp:nvSpPr>
-        <dsp:cNvPr id="0" name=""/>
+        <dsp:cNvPr id="3" name="Rectángulo 2"/>
         <dsp:cNvSpPr/>
       </dsp:nvSpPr>
-      <dsp:spPr>
+      <dsp:spPr bwMode="white">
         <a:xfrm>
-          <a:off x="397549" y="1960"/>
-          <a:ext cx="2751906" cy="1651143"/>
+          <a:off x="405051" y="3367"/>
+          <a:ext cx="2751906" cy="1651144"/>
         </a:xfrm>
         <a:prstGeom prst="rect">
           <a:avLst/>
         </a:prstGeom>
-        <a:solidFill>
+      </dsp:spPr>
+      <dsp:style>
+        <a:lnRef idx="2">
+          <a:schemeClr val="lt1"/>
+        </a:lnRef>
+        <a:fillRef idx="1">
           <a:schemeClr val="accent2">
             <a:hueOff val="0"/>
             <a:satOff val="0"/>
             <a:lumOff val="0"/>
-            <a:alphaOff val="0"/>
+            <a:alpha val="100000"/>
           </a:schemeClr>
-        </a:solidFill>
-        <a:ln w="34925" cap="flat" cmpd="sng" algn="in">
-          <a:solidFill>
-            <a:schemeClr val="lt1">
-              <a:hueOff val="0"/>
-              <a:satOff val="0"/>
-              <a:lumOff val="0"/>
-              <a:alphaOff val="0"/>
-            </a:schemeClr>
-          </a:solidFill>
-          <a:prstDash val="solid"/>
-        </a:ln>
-        <a:effectLst/>
-      </dsp:spPr>
-      <dsp:style>
-        <a:lnRef idx="2">
-          <a:scrgbClr r="0" g="0" b="0"/>
-        </a:lnRef>
-        <a:fillRef idx="1">
-          <a:scrgbClr r="0" g="0" b="0"/>
         </a:fillRef>
         <a:effectRef idx="0">
           <a:scrgbClr r="0" g="0" b="0"/>
@@ -1276,14 +1263,40 @@
         </a:fontRef>
       </dsp:style>
       <dsp:txBody>
-        <a:bodyPr spcFirstLastPara="0" vert="horz" wrap="square" lIns="175260" tIns="175260" rIns="175260" bIns="175260" numCol="1" spcCol="1270" anchor="ctr" anchorCtr="0">
-          <a:noAutofit/>
-        </a:bodyPr>
-        <a:lstStyle/>
+        <a:bodyPr lIns="163830" tIns="163830" rIns="163830" bIns="163830" anchor="ctr"/>
+        <a:lstStyle>
+          <a:lvl1pPr algn="ctr">
+            <a:defRPr sz="4300"/>
+          </a:lvl1pPr>
+          <a:lvl2pPr marL="285750" indent="-285750" algn="ctr">
+            <a:defRPr sz="3300"/>
+          </a:lvl2pPr>
+          <a:lvl3pPr marL="571500" indent="-285750" algn="ctr">
+            <a:defRPr sz="3300"/>
+          </a:lvl3pPr>
+          <a:lvl4pPr marL="857250" indent="-285750" algn="ctr">
+            <a:defRPr sz="3300"/>
+          </a:lvl4pPr>
+          <a:lvl5pPr marL="1143000" indent="-285750" algn="ctr">
+            <a:defRPr sz="3300"/>
+          </a:lvl5pPr>
+          <a:lvl6pPr marL="1428750" indent="-285750" algn="ctr">
+            <a:defRPr sz="3300"/>
+          </a:lvl6pPr>
+          <a:lvl7pPr marL="1714500" indent="-285750" algn="ctr">
+            <a:defRPr sz="3300"/>
+          </a:lvl7pPr>
+          <a:lvl8pPr marL="2000250" indent="-285750" algn="ctr">
+            <a:defRPr sz="3300"/>
+          </a:lvl8pPr>
+          <a:lvl9pPr marL="2286000" indent="-285750" algn="ctr">
+            <a:defRPr sz="3300"/>
+          </a:lvl9pPr>
+        </a:lstStyle>
         <a:p>
-          <a:pPr marL="0" lvl="0" indent="0" algn="ctr" defTabSz="2044700">
+          <a:pPr lvl="0">
             <a:lnSpc>
-              <a:spcPct val="90000"/>
+              <a:spcPct val="100000"/>
             </a:lnSpc>
             <a:spcBef>
               <a:spcPct val="0"/>
@@ -1291,60 +1304,44 @@
             <a:spcAft>
               <a:spcPct val="35000"/>
             </a:spcAft>
-            <a:buNone/>
           </a:pPr>
           <a:r>
-            <a:rPr lang="en-US" sz="4600" kern="1200" dirty="0" err="1"/>
+            <a:rPr lang="en-US" dirty="0" err="1"/>
             <a:t>Problema</a:t>
           </a:r>
-          <a:endParaRPr lang="en-US" sz="4600" kern="1200" dirty="0"/>
+          <a:endParaRPr lang="en-US" dirty="0"/>
         </a:p>
       </dsp:txBody>
       <dsp:txXfrm>
-        <a:off x="397549" y="1960"/>
-        <a:ext cx="2751906" cy="1651143"/>
+        <a:off x="405051" y="3367"/>
+        <a:ext cx="2751906" cy="1651144"/>
       </dsp:txXfrm>
     </dsp:sp>
     <dsp:sp modelId="{A02F2693-921F-424D-8EC7-8A3BF23FD12A}">
       <dsp:nvSpPr>
-        <dsp:cNvPr id="0" name=""/>
+        <dsp:cNvPr id="4" name="Rectángulo 3"/>
         <dsp:cNvSpPr/>
       </dsp:nvSpPr>
-      <dsp:spPr>
+      <dsp:spPr bwMode="white">
         <a:xfrm>
-          <a:off x="3424646" y="1960"/>
-          <a:ext cx="2751906" cy="1651143"/>
+          <a:off x="3432148" y="3367"/>
+          <a:ext cx="2751906" cy="1651144"/>
         </a:xfrm>
         <a:prstGeom prst="rect">
           <a:avLst/>
         </a:prstGeom>
-        <a:solidFill>
-          <a:schemeClr val="accent2">
-            <a:hueOff val="-41413"/>
-            <a:satOff val="-13584"/>
-            <a:lumOff val="-4951"/>
-            <a:alphaOff val="0"/>
-          </a:schemeClr>
-        </a:solidFill>
-        <a:ln w="34925" cap="flat" cmpd="sng" algn="in">
-          <a:solidFill>
-            <a:schemeClr val="lt1">
-              <a:hueOff val="0"/>
-              <a:satOff val="0"/>
-              <a:lumOff val="0"/>
-              <a:alphaOff val="0"/>
-            </a:schemeClr>
-          </a:solidFill>
-          <a:prstDash val="solid"/>
-        </a:ln>
-        <a:effectLst/>
       </dsp:spPr>
       <dsp:style>
         <a:lnRef idx="2">
-          <a:scrgbClr r="0" g="0" b="0"/>
+          <a:schemeClr val="lt1"/>
         </a:lnRef>
         <a:fillRef idx="1">
-          <a:scrgbClr r="0" g="0" b="0"/>
+          <a:schemeClr val="accent2">
+            <a:hueOff val="-30000"/>
+            <a:satOff val="-13626"/>
+            <a:lumOff val="-4999"/>
+            <a:alpha val="100000"/>
+          </a:schemeClr>
         </a:fillRef>
         <a:effectRef idx="0">
           <a:scrgbClr r="0" g="0" b="0"/>
@@ -1354,14 +1351,40 @@
         </a:fontRef>
       </dsp:style>
       <dsp:txBody>
-        <a:bodyPr spcFirstLastPara="0" vert="horz" wrap="square" lIns="175260" tIns="175260" rIns="175260" bIns="175260" numCol="1" spcCol="1270" anchor="ctr" anchorCtr="0">
-          <a:noAutofit/>
-        </a:bodyPr>
-        <a:lstStyle/>
+        <a:bodyPr lIns="163830" tIns="163830" rIns="163830" bIns="163830" anchor="ctr"/>
+        <a:lstStyle>
+          <a:lvl1pPr algn="ctr">
+            <a:defRPr sz="4300"/>
+          </a:lvl1pPr>
+          <a:lvl2pPr marL="285750" indent="-285750" algn="ctr">
+            <a:defRPr sz="3300"/>
+          </a:lvl2pPr>
+          <a:lvl3pPr marL="571500" indent="-285750" algn="ctr">
+            <a:defRPr sz="3300"/>
+          </a:lvl3pPr>
+          <a:lvl4pPr marL="857250" indent="-285750" algn="ctr">
+            <a:defRPr sz="3300"/>
+          </a:lvl4pPr>
+          <a:lvl5pPr marL="1143000" indent="-285750" algn="ctr">
+            <a:defRPr sz="3300"/>
+          </a:lvl5pPr>
+          <a:lvl6pPr marL="1428750" indent="-285750" algn="ctr">
+            <a:defRPr sz="3300"/>
+          </a:lvl6pPr>
+          <a:lvl7pPr marL="1714500" indent="-285750" algn="ctr">
+            <a:defRPr sz="3300"/>
+          </a:lvl7pPr>
+          <a:lvl8pPr marL="2000250" indent="-285750" algn="ctr">
+            <a:defRPr sz="3300"/>
+          </a:lvl8pPr>
+          <a:lvl9pPr marL="2286000" indent="-285750" algn="ctr">
+            <a:defRPr sz="3300"/>
+          </a:lvl9pPr>
+        </a:lstStyle>
         <a:p>
-          <a:pPr marL="0" lvl="0" indent="0" algn="ctr" defTabSz="2044700">
+          <a:pPr lvl="0">
             <a:lnSpc>
-              <a:spcPct val="90000"/>
+              <a:spcPct val="100000"/>
             </a:lnSpc>
             <a:spcBef>
               <a:spcPct val="0"/>
@@ -1369,63 +1392,47 @@
             <a:spcAft>
               <a:spcPct val="35000"/>
             </a:spcAft>
-            <a:buNone/>
           </a:pPr>
           <a:r>
-            <a:rPr lang="en-US" sz="4600" kern="1200" dirty="0" err="1"/>
+            <a:rPr lang="en-US" dirty="0" err="1"/>
             <a:t>Objetivo</a:t>
           </a:r>
           <a:r>
-            <a:rPr lang="en-US" sz="4600" kern="1200" dirty="0"/>
+            <a:rPr lang="en-US" dirty="0"/>
             <a:t> General</a:t>
           </a:r>
         </a:p>
       </dsp:txBody>
       <dsp:txXfrm>
-        <a:off x="3424646" y="1960"/>
-        <a:ext cx="2751906" cy="1651143"/>
+        <a:off x="3432148" y="3367"/>
+        <a:ext cx="2751906" cy="1651144"/>
       </dsp:txXfrm>
     </dsp:sp>
     <dsp:sp modelId="{88DE7088-B1C3-4A84-A0C0-61A0AE678C1B}">
       <dsp:nvSpPr>
-        <dsp:cNvPr id="0" name=""/>
+        <dsp:cNvPr id="5" name="Rectángulo 4"/>
         <dsp:cNvSpPr/>
       </dsp:nvSpPr>
-      <dsp:spPr>
+      <dsp:spPr bwMode="white">
         <a:xfrm>
-          <a:off x="6451743" y="1960"/>
-          <a:ext cx="2751906" cy="1651143"/>
+          <a:off x="6459245" y="3367"/>
+          <a:ext cx="2751906" cy="1651144"/>
         </a:xfrm>
         <a:prstGeom prst="rect">
           <a:avLst/>
         </a:prstGeom>
-        <a:solidFill>
-          <a:schemeClr val="accent2">
-            <a:hueOff val="-82827"/>
-            <a:satOff val="-27168"/>
-            <a:lumOff val="-9901"/>
-            <a:alphaOff val="0"/>
-          </a:schemeClr>
-        </a:solidFill>
-        <a:ln w="34925" cap="flat" cmpd="sng" algn="in">
-          <a:solidFill>
-            <a:schemeClr val="lt1">
-              <a:hueOff val="0"/>
-              <a:satOff val="0"/>
-              <a:lumOff val="0"/>
-              <a:alphaOff val="0"/>
-            </a:schemeClr>
-          </a:solidFill>
-          <a:prstDash val="solid"/>
-        </a:ln>
-        <a:effectLst/>
       </dsp:spPr>
       <dsp:style>
         <a:lnRef idx="2">
-          <a:scrgbClr r="0" g="0" b="0"/>
+          <a:schemeClr val="lt1"/>
         </a:lnRef>
         <a:fillRef idx="1">
-          <a:scrgbClr r="0" g="0" b="0"/>
+          <a:schemeClr val="accent2">
+            <a:hueOff val="-60000"/>
+            <a:satOff val="-27254"/>
+            <a:lumOff val="-9999"/>
+            <a:alpha val="100000"/>
+          </a:schemeClr>
         </a:fillRef>
         <a:effectRef idx="0">
           <a:scrgbClr r="0" g="0" b="0"/>
@@ -1435,14 +1442,40 @@
         </a:fontRef>
       </dsp:style>
       <dsp:txBody>
-        <a:bodyPr spcFirstLastPara="0" vert="horz" wrap="square" lIns="152400" tIns="152400" rIns="152400" bIns="152400" numCol="1" spcCol="1270" anchor="ctr" anchorCtr="0">
-          <a:noAutofit/>
-        </a:bodyPr>
-        <a:lstStyle/>
+        <a:bodyPr lIns="152400" tIns="152400" rIns="152400" bIns="152400" anchor="ctr"/>
+        <a:lstStyle>
+          <a:lvl1pPr algn="ctr">
+            <a:defRPr sz="4300"/>
+          </a:lvl1pPr>
+          <a:lvl2pPr marL="285750" indent="-285750" algn="ctr">
+            <a:defRPr sz="3300"/>
+          </a:lvl2pPr>
+          <a:lvl3pPr marL="571500" indent="-285750" algn="ctr">
+            <a:defRPr sz="3300"/>
+          </a:lvl3pPr>
+          <a:lvl4pPr marL="857250" indent="-285750" algn="ctr">
+            <a:defRPr sz="3300"/>
+          </a:lvl4pPr>
+          <a:lvl5pPr marL="1143000" indent="-285750" algn="ctr">
+            <a:defRPr sz="3300"/>
+          </a:lvl5pPr>
+          <a:lvl6pPr marL="1428750" indent="-285750" algn="ctr">
+            <a:defRPr sz="3300"/>
+          </a:lvl6pPr>
+          <a:lvl7pPr marL="1714500" indent="-285750" algn="ctr">
+            <a:defRPr sz="3300"/>
+          </a:lvl7pPr>
+          <a:lvl8pPr marL="2000250" indent="-285750" algn="ctr">
+            <a:defRPr sz="3300"/>
+          </a:lvl8pPr>
+          <a:lvl9pPr marL="2286000" indent="-285750" algn="ctr">
+            <a:defRPr sz="3300"/>
+          </a:lvl9pPr>
+        </a:lstStyle>
         <a:p>
-          <a:pPr marL="0" lvl="0" indent="0" algn="ctr" defTabSz="1778000">
+          <a:pPr lvl="0">
             <a:lnSpc>
-              <a:spcPct val="90000"/>
+              <a:spcPct val="100000"/>
             </a:lnSpc>
             <a:spcBef>
               <a:spcPct val="0"/>
@@ -1450,68 +1483,52 @@
             <a:spcAft>
               <a:spcPct val="35000"/>
             </a:spcAft>
-            <a:buNone/>
           </a:pPr>
           <a:r>
-            <a:rPr lang="en-US" sz="4000" kern="1200" dirty="0" err="1"/>
+            <a:rPr lang="en-US" sz="4000" dirty="0" err="1"/>
             <a:t>Objetivos</a:t>
           </a:r>
           <a:r>
-            <a:rPr lang="en-US" sz="4000" kern="1200" dirty="0"/>
+            <a:rPr lang="en-US" sz="4000" dirty="0"/>
             <a:t> </a:t>
           </a:r>
           <a:r>
-            <a:rPr lang="en-US" sz="4000" kern="1200" dirty="0" err="1"/>
+            <a:rPr lang="en-US" sz="4000" dirty="0" err="1"/>
             <a:t>Específicos</a:t>
           </a:r>
-          <a:endParaRPr lang="en-US" sz="4000" kern="1200" dirty="0"/>
+          <a:endParaRPr lang="en-US" sz="4000" dirty="0"/>
         </a:p>
       </dsp:txBody>
       <dsp:txXfrm>
-        <a:off x="6451743" y="1960"/>
-        <a:ext cx="2751906" cy="1651143"/>
+        <a:off x="6459245" y="3367"/>
+        <a:ext cx="2751906" cy="1651144"/>
       </dsp:txXfrm>
     </dsp:sp>
     <dsp:sp modelId="{DCEE0A2D-1DC7-46F2-B476-E12FC17B783B}">
       <dsp:nvSpPr>
-        <dsp:cNvPr id="0" name=""/>
+        <dsp:cNvPr id="6" name="Rectángulo 5"/>
         <dsp:cNvSpPr/>
       </dsp:nvSpPr>
-      <dsp:spPr>
+      <dsp:spPr bwMode="white">
         <a:xfrm>
-          <a:off x="1192190" y="1928295"/>
-          <a:ext cx="3437351" cy="1651143"/>
+          <a:off x="1198337" y="1926889"/>
+          <a:ext cx="3437351" cy="1651144"/>
         </a:xfrm>
         <a:prstGeom prst="rect">
           <a:avLst/>
         </a:prstGeom>
-        <a:solidFill>
-          <a:schemeClr val="accent2">
-            <a:hueOff val="-124240"/>
-            <a:satOff val="-40751"/>
-            <a:lumOff val="-14852"/>
-            <a:alphaOff val="0"/>
-          </a:schemeClr>
-        </a:solidFill>
-        <a:ln w="34925" cap="flat" cmpd="sng" algn="in">
-          <a:solidFill>
-            <a:schemeClr val="lt1">
-              <a:hueOff val="0"/>
-              <a:satOff val="0"/>
-              <a:lumOff val="0"/>
-              <a:alphaOff val="0"/>
-            </a:schemeClr>
-          </a:solidFill>
-          <a:prstDash val="solid"/>
-        </a:ln>
-        <a:effectLst/>
       </dsp:spPr>
       <dsp:style>
         <a:lnRef idx="2">
-          <a:scrgbClr r="0" g="0" b="0"/>
+          <a:schemeClr val="lt1"/>
         </a:lnRef>
         <a:fillRef idx="1">
-          <a:scrgbClr r="0" g="0" b="0"/>
+          <a:schemeClr val="accent2">
+            <a:hueOff val="-90000"/>
+            <a:satOff val="-40881"/>
+            <a:lumOff val="-14999"/>
+            <a:alpha val="100000"/>
+          </a:schemeClr>
         </a:fillRef>
         <a:effectRef idx="0">
           <a:scrgbClr r="0" g="0" b="0"/>
@@ -1521,14 +1538,40 @@
         </a:fontRef>
       </dsp:style>
       <dsp:txBody>
-        <a:bodyPr spcFirstLastPara="0" vert="horz" wrap="square" lIns="167640" tIns="167640" rIns="167640" bIns="167640" numCol="1" spcCol="1270" anchor="ctr" anchorCtr="0">
-          <a:noAutofit/>
-        </a:bodyPr>
-        <a:lstStyle/>
+        <a:bodyPr lIns="167640" tIns="167640" rIns="167640" bIns="167640" anchor="ctr"/>
+        <a:lstStyle>
+          <a:lvl1pPr algn="ctr">
+            <a:defRPr sz="4300"/>
+          </a:lvl1pPr>
+          <a:lvl2pPr marL="285750" indent="-285750" algn="ctr">
+            <a:defRPr sz="3300"/>
+          </a:lvl2pPr>
+          <a:lvl3pPr marL="571500" indent="-285750" algn="ctr">
+            <a:defRPr sz="3300"/>
+          </a:lvl3pPr>
+          <a:lvl4pPr marL="857250" indent="-285750" algn="ctr">
+            <a:defRPr sz="3300"/>
+          </a:lvl4pPr>
+          <a:lvl5pPr marL="1143000" indent="-285750" algn="ctr">
+            <a:defRPr sz="3300"/>
+          </a:lvl5pPr>
+          <a:lvl6pPr marL="1428750" indent="-285750" algn="ctr">
+            <a:defRPr sz="3300"/>
+          </a:lvl6pPr>
+          <a:lvl7pPr marL="1714500" indent="-285750" algn="ctr">
+            <a:defRPr sz="3300"/>
+          </a:lvl7pPr>
+          <a:lvl8pPr marL="2000250" indent="-285750" algn="ctr">
+            <a:defRPr sz="3300"/>
+          </a:lvl8pPr>
+          <a:lvl9pPr marL="2286000" indent="-285750" algn="ctr">
+            <a:defRPr sz="3300"/>
+          </a:lvl9pPr>
+        </a:lstStyle>
         <a:p>
-          <a:pPr marL="0" lvl="0" indent="0" algn="ctr" defTabSz="1955800">
+          <a:pPr lvl="0">
             <a:lnSpc>
-              <a:spcPct val="90000"/>
+              <a:spcPct val="100000"/>
             </a:lnSpc>
             <a:spcBef>
               <a:spcPct val="0"/>
@@ -1536,68 +1579,52 @@
             <a:spcAft>
               <a:spcPct val="35000"/>
             </a:spcAft>
-            <a:buNone/>
           </a:pPr>
           <a:r>
-            <a:rPr lang="en-US" sz="4400" kern="1200" dirty="0" err="1"/>
+            <a:rPr lang="en-US" sz="4400" dirty="0" err="1"/>
             <a:t>Alcance</a:t>
           </a:r>
           <a:r>
-            <a:rPr lang="en-US" sz="4400" kern="1200" dirty="0"/>
+            <a:rPr lang="en-US" sz="4400" dirty="0"/>
             <a:t> y </a:t>
           </a:r>
           <a:r>
-            <a:rPr lang="en-US" sz="4400" kern="1200" dirty="0" err="1"/>
+            <a:rPr lang="en-US" sz="4400" dirty="0" err="1"/>
             <a:t>Delimitación</a:t>
           </a:r>
-          <a:endParaRPr lang="en-US" sz="4400" kern="1200" dirty="0"/>
+          <a:endParaRPr lang="en-US" sz="4400" dirty="0"/>
         </a:p>
       </dsp:txBody>
       <dsp:txXfrm>
-        <a:off x="1192190" y="1928295"/>
-        <a:ext cx="3437351" cy="1651143"/>
+        <a:off x="1198337" y="1926889"/>
+        <a:ext cx="3437351" cy="1651144"/>
       </dsp:txXfrm>
     </dsp:sp>
     <dsp:sp modelId="{9452AD3B-DF48-4B65-8B3A-F78F98BB33B0}">
       <dsp:nvSpPr>
-        <dsp:cNvPr id="0" name=""/>
+        <dsp:cNvPr id="7" name="Rectángulo 6"/>
         <dsp:cNvSpPr/>
       </dsp:nvSpPr>
-      <dsp:spPr>
+      <dsp:spPr bwMode="white">
         <a:xfrm>
-          <a:off x="4904732" y="1928295"/>
-          <a:ext cx="3504277" cy="1651143"/>
+          <a:off x="4910879" y="1926889"/>
+          <a:ext cx="3504278" cy="1651144"/>
         </a:xfrm>
         <a:prstGeom prst="rect">
           <a:avLst/>
         </a:prstGeom>
-        <a:solidFill>
-          <a:schemeClr val="accent2">
-            <a:hueOff val="-165654"/>
-            <a:satOff val="-54335"/>
-            <a:lumOff val="-19803"/>
-            <a:alphaOff val="0"/>
-          </a:schemeClr>
-        </a:solidFill>
-        <a:ln w="34925" cap="flat" cmpd="sng" algn="in">
-          <a:solidFill>
-            <a:schemeClr val="lt1">
-              <a:hueOff val="0"/>
-              <a:satOff val="0"/>
-              <a:lumOff val="0"/>
-              <a:alphaOff val="0"/>
-            </a:schemeClr>
-          </a:solidFill>
-          <a:prstDash val="solid"/>
-        </a:ln>
-        <a:effectLst/>
       </dsp:spPr>
       <dsp:style>
         <a:lnRef idx="2">
-          <a:scrgbClr r="0" g="0" b="0"/>
+          <a:schemeClr val="lt1"/>
         </a:lnRef>
         <a:fillRef idx="1">
-          <a:scrgbClr r="0" g="0" b="0"/>
+          <a:schemeClr val="accent2">
+            <a:hueOff val="-120000"/>
+            <a:satOff val="-54509"/>
+            <a:lumOff val="-19999"/>
+            <a:alpha val="100000"/>
+          </a:schemeClr>
         </a:fillRef>
         <a:effectRef idx="0">
           <a:scrgbClr r="0" g="0" b="0"/>
@@ -1607,14 +1634,40 @@
         </a:fontRef>
       </dsp:style>
       <dsp:txBody>
-        <a:bodyPr spcFirstLastPara="0" vert="horz" wrap="square" lIns="175260" tIns="175260" rIns="175260" bIns="175260" numCol="1" spcCol="1270" anchor="ctr" anchorCtr="0">
-          <a:noAutofit/>
-        </a:bodyPr>
-        <a:lstStyle/>
+        <a:bodyPr lIns="163830" tIns="163830" rIns="163830" bIns="163830" anchor="ctr"/>
+        <a:lstStyle>
+          <a:lvl1pPr algn="ctr">
+            <a:defRPr sz="4300"/>
+          </a:lvl1pPr>
+          <a:lvl2pPr marL="285750" indent="-285750" algn="ctr">
+            <a:defRPr sz="3300"/>
+          </a:lvl2pPr>
+          <a:lvl3pPr marL="571500" indent="-285750" algn="ctr">
+            <a:defRPr sz="3300"/>
+          </a:lvl3pPr>
+          <a:lvl4pPr marL="857250" indent="-285750" algn="ctr">
+            <a:defRPr sz="3300"/>
+          </a:lvl4pPr>
+          <a:lvl5pPr marL="1143000" indent="-285750" algn="ctr">
+            <a:defRPr sz="3300"/>
+          </a:lvl5pPr>
+          <a:lvl6pPr marL="1428750" indent="-285750" algn="ctr">
+            <a:defRPr sz="3300"/>
+          </a:lvl6pPr>
+          <a:lvl7pPr marL="1714500" indent="-285750" algn="ctr">
+            <a:defRPr sz="3300"/>
+          </a:lvl7pPr>
+          <a:lvl8pPr marL="2000250" indent="-285750" algn="ctr">
+            <a:defRPr sz="3300"/>
+          </a:lvl8pPr>
+          <a:lvl9pPr marL="2286000" indent="-285750" algn="ctr">
+            <a:defRPr sz="3300"/>
+          </a:lvl9pPr>
+        </a:lstStyle>
         <a:p>
-          <a:pPr marL="0" lvl="0" indent="0" algn="ctr" defTabSz="2044700">
+          <a:pPr lvl="0">
             <a:lnSpc>
-              <a:spcPct val="90000"/>
+              <a:spcPct val="100000"/>
             </a:lnSpc>
             <a:spcBef>
               <a:spcPct val="0"/>
@@ -1622,18 +1675,17 @@
             <a:spcAft>
               <a:spcPct val="35000"/>
             </a:spcAft>
-            <a:buNone/>
           </a:pPr>
           <a:r>
-            <a:rPr lang="en-US" sz="4600" kern="1200" dirty="0" err="1"/>
+            <a:rPr lang="en-US" dirty="0" err="1"/>
             <a:t>Jutificación</a:t>
           </a:r>
-          <a:endParaRPr lang="en-US" sz="4600" kern="1200" dirty="0"/>
+          <a:endParaRPr lang="en-US" dirty="0"/>
         </a:p>
       </dsp:txBody>
       <dsp:txXfrm>
-        <a:off x="4904732" y="1928295"/>
-        <a:ext cx="3504277" cy="1651143"/>
+        <a:off x="4910879" y="1926889"/>
+        <a:ext cx="3504278" cy="1651144"/>
       </dsp:txXfrm>
     </dsp:sp>
   </dsp:spTree>
@@ -1724,18 +1776,18 @@
     <dgm:choose name="Name0">
       <dgm:if name="Name1" func="var" arg="dir" op="equ" val="norm">
         <dgm:alg type="snake">
+          <dgm:param type="off" val="ctr"/>
+          <dgm:param type="contDir" val="sameDir"/>
           <dgm:param type="grDir" val="tL"/>
           <dgm:param type="flowDir" val="row"/>
-          <dgm:param type="contDir" val="sameDir"/>
-          <dgm:param type="off" val="ctr"/>
         </dgm:alg>
       </dgm:if>
       <dgm:else name="Name2">
         <dgm:alg type="snake">
+          <dgm:param type="off" val="ctr"/>
+          <dgm:param type="contDir" val="sameDir"/>
           <dgm:param type="grDir" val="tR"/>
           <dgm:param type="flowDir" val="row"/>
-          <dgm:param type="contDir" val="sameDir"/>
-          <dgm:param type="off" val="ctr"/>
         </dgm:alg>
       </dgm:else>
     </dgm:choose>
@@ -1798,12 +1850,542 @@
     <a:camera prst="orthographicFront"/>
     <a:lightRig rig="threePt" dir="t"/>
   </dgm:scene3d>
+  <dgm:styleLbl name="alignAcc1">
+    <dgm:scene3d>
+      <a:camera prst="orthographicFront"/>
+      <a:lightRig rig="threePt" dir="t"/>
+    </dgm:scene3d>
+    <dgm:txPr/>
+    <dgm:style>
+      <a:lnRef idx="2">
+        <a:scrgbClr r="0" g="0" b="0"/>
+      </a:lnRef>
+      <a:fillRef idx="1">
+        <a:scrgbClr r="0" g="0" b="0"/>
+      </a:fillRef>
+      <a:effectRef idx="0">
+        <a:scrgbClr r="0" g="0" b="0"/>
+      </a:effectRef>
+      <a:fontRef idx="minor"/>
+    </dgm:style>
+  </dgm:styleLbl>
+  <dgm:styleLbl name="alignAccFollowNode1">
+    <dgm:scene3d>
+      <a:camera prst="orthographicFront"/>
+      <a:lightRig rig="threePt" dir="t"/>
+    </dgm:scene3d>
+    <dgm:txPr/>
+    <dgm:style>
+      <a:lnRef idx="2">
+        <a:scrgbClr r="0" g="0" b="0"/>
+      </a:lnRef>
+      <a:fillRef idx="1">
+        <a:scrgbClr r="0" g="0" b="0"/>
+      </a:fillRef>
+      <a:effectRef idx="0">
+        <a:scrgbClr r="0" g="0" b="0"/>
+      </a:effectRef>
+      <a:fontRef idx="minor"/>
+    </dgm:style>
+  </dgm:styleLbl>
+  <dgm:styleLbl name="alignImgPlace1">
+    <dgm:scene3d>
+      <a:camera prst="orthographicFront"/>
+      <a:lightRig rig="threePt" dir="t"/>
+    </dgm:scene3d>
+    <dgm:txPr/>
+    <dgm:style>
+      <a:lnRef idx="2">
+        <a:scrgbClr r="0" g="0" b="0"/>
+      </a:lnRef>
+      <a:fillRef idx="1">
+        <a:scrgbClr r="0" g="0" b="0"/>
+      </a:fillRef>
+      <a:effectRef idx="0">
+        <a:scrgbClr r="0" g="0" b="0"/>
+      </a:effectRef>
+      <a:fontRef idx="minor"/>
+    </dgm:style>
+  </dgm:styleLbl>
+  <dgm:styleLbl name="alignNode1">
+    <dgm:scene3d>
+      <a:camera prst="orthographicFront"/>
+      <a:lightRig rig="threePt" dir="t"/>
+    </dgm:scene3d>
+    <dgm:txPr/>
+    <dgm:style>
+      <a:lnRef idx="2">
+        <a:scrgbClr r="0" g="0" b="0"/>
+      </a:lnRef>
+      <a:fillRef idx="1">
+        <a:scrgbClr r="0" g="0" b="0"/>
+      </a:fillRef>
+      <a:effectRef idx="0">
+        <a:scrgbClr r="0" g="0" b="0"/>
+      </a:effectRef>
+      <a:fontRef idx="minor">
+        <a:schemeClr val="lt1"/>
+      </a:fontRef>
+    </dgm:style>
+  </dgm:styleLbl>
+  <dgm:styleLbl name="asst0">
+    <dgm:scene3d>
+      <a:camera prst="orthographicFront"/>
+      <a:lightRig rig="threePt" dir="t"/>
+    </dgm:scene3d>
+    <dgm:txPr/>
+    <dgm:style>
+      <a:lnRef idx="2">
+        <a:scrgbClr r="0" g="0" b="0"/>
+      </a:lnRef>
+      <a:fillRef idx="1">
+        <a:scrgbClr r="0" g="0" b="0"/>
+      </a:fillRef>
+      <a:effectRef idx="0">
+        <a:scrgbClr r="0" g="0" b="0"/>
+      </a:effectRef>
+      <a:fontRef idx="minor">
+        <a:schemeClr val="lt1"/>
+      </a:fontRef>
+    </dgm:style>
+  </dgm:styleLbl>
+  <dgm:styleLbl name="asst1">
+    <dgm:scene3d>
+      <a:camera prst="orthographicFront"/>
+      <a:lightRig rig="threePt" dir="t"/>
+    </dgm:scene3d>
+    <dgm:txPr/>
+    <dgm:style>
+      <a:lnRef idx="2">
+        <a:scrgbClr r="0" g="0" b="0"/>
+      </a:lnRef>
+      <a:fillRef idx="1">
+        <a:scrgbClr r="0" g="0" b="0"/>
+      </a:fillRef>
+      <a:effectRef idx="0">
+        <a:scrgbClr r="0" g="0" b="0"/>
+      </a:effectRef>
+      <a:fontRef idx="minor">
+        <a:schemeClr val="lt1"/>
+      </a:fontRef>
+    </dgm:style>
+  </dgm:styleLbl>
+  <dgm:styleLbl name="asst2">
+    <dgm:scene3d>
+      <a:camera prst="orthographicFront"/>
+      <a:lightRig rig="threePt" dir="t"/>
+    </dgm:scene3d>
+    <dgm:txPr/>
+    <dgm:style>
+      <a:lnRef idx="2">
+        <a:scrgbClr r="0" g="0" b="0"/>
+      </a:lnRef>
+      <a:fillRef idx="1">
+        <a:scrgbClr r="0" g="0" b="0"/>
+      </a:fillRef>
+      <a:effectRef idx="0">
+        <a:scrgbClr r="0" g="0" b="0"/>
+      </a:effectRef>
+      <a:fontRef idx="minor">
+        <a:schemeClr val="lt1"/>
+      </a:fontRef>
+    </dgm:style>
+  </dgm:styleLbl>
+  <dgm:styleLbl name="asst3">
+    <dgm:scene3d>
+      <a:camera prst="orthographicFront"/>
+      <a:lightRig rig="threePt" dir="t"/>
+    </dgm:scene3d>
+    <dgm:txPr/>
+    <dgm:style>
+      <a:lnRef idx="2">
+        <a:scrgbClr r="0" g="0" b="0"/>
+      </a:lnRef>
+      <a:fillRef idx="1">
+        <a:scrgbClr r="0" g="0" b="0"/>
+      </a:fillRef>
+      <a:effectRef idx="0">
+        <a:scrgbClr r="0" g="0" b="0"/>
+      </a:effectRef>
+      <a:fontRef idx="minor">
+        <a:schemeClr val="lt1"/>
+      </a:fontRef>
+    </dgm:style>
+  </dgm:styleLbl>
+  <dgm:styleLbl name="asst4">
+    <dgm:scene3d>
+      <a:camera prst="orthographicFront"/>
+      <a:lightRig rig="threePt" dir="t"/>
+    </dgm:scene3d>
+    <dgm:txPr/>
+    <dgm:style>
+      <a:lnRef idx="2">
+        <a:scrgbClr r="0" g="0" b="0"/>
+      </a:lnRef>
+      <a:fillRef idx="1">
+        <a:scrgbClr r="0" g="0" b="0"/>
+      </a:fillRef>
+      <a:effectRef idx="0">
+        <a:scrgbClr r="0" g="0" b="0"/>
+      </a:effectRef>
+      <a:fontRef idx="minor">
+        <a:schemeClr val="lt1"/>
+      </a:fontRef>
+    </dgm:style>
+  </dgm:styleLbl>
+  <dgm:styleLbl name="bgAcc1">
+    <dgm:scene3d>
+      <a:camera prst="orthographicFront"/>
+      <a:lightRig rig="threePt" dir="t"/>
+    </dgm:scene3d>
+    <dgm:txPr/>
+    <dgm:style>
+      <a:lnRef idx="2">
+        <a:scrgbClr r="0" g="0" b="0"/>
+      </a:lnRef>
+      <a:fillRef idx="1">
+        <a:scrgbClr r="0" g="0" b="0"/>
+      </a:fillRef>
+      <a:effectRef idx="0">
+        <a:scrgbClr r="0" g="0" b="0"/>
+      </a:effectRef>
+      <a:fontRef idx="minor"/>
+    </dgm:style>
+  </dgm:styleLbl>
+  <dgm:styleLbl name="bgAccFollowNode1">
+    <dgm:scene3d>
+      <a:camera prst="orthographicFront"/>
+      <a:lightRig rig="threePt" dir="t"/>
+    </dgm:scene3d>
+    <dgm:txPr/>
+    <dgm:style>
+      <a:lnRef idx="2">
+        <a:scrgbClr r="0" g="0" b="0"/>
+      </a:lnRef>
+      <a:fillRef idx="1">
+        <a:scrgbClr r="0" g="0" b="0"/>
+      </a:fillRef>
+      <a:effectRef idx="0">
+        <a:scrgbClr r="0" g="0" b="0"/>
+      </a:effectRef>
+      <a:fontRef idx="minor"/>
+    </dgm:style>
+  </dgm:styleLbl>
+  <dgm:styleLbl name="bgImgPlace1">
+    <dgm:scene3d>
+      <a:camera prst="orthographicFront"/>
+      <a:lightRig rig="threePt" dir="t"/>
+    </dgm:scene3d>
+    <dgm:txPr/>
+    <dgm:style>
+      <a:lnRef idx="2">
+        <a:scrgbClr r="0" g="0" b="0"/>
+      </a:lnRef>
+      <a:fillRef idx="1">
+        <a:scrgbClr r="0" g="0" b="0"/>
+      </a:fillRef>
+      <a:effectRef idx="0">
+        <a:scrgbClr r="0" g="0" b="0"/>
+      </a:effectRef>
+      <a:fontRef idx="minor"/>
+    </dgm:style>
+  </dgm:styleLbl>
+  <dgm:styleLbl name="bgShp">
+    <dgm:scene3d>
+      <a:camera prst="orthographicFront"/>
+      <a:lightRig rig="threePt" dir="t"/>
+    </dgm:scene3d>
+    <dgm:txPr/>
+    <dgm:style>
+      <a:lnRef idx="0">
+        <a:scrgbClr r="0" g="0" b="0"/>
+      </a:lnRef>
+      <a:fillRef idx="1">
+        <a:scrgbClr r="0" g="0" b="0"/>
+      </a:fillRef>
+      <a:effectRef idx="0">
+        <a:scrgbClr r="0" g="0" b="0"/>
+      </a:effectRef>
+      <a:fontRef idx="minor"/>
+    </dgm:style>
+  </dgm:styleLbl>
+  <dgm:styleLbl name="bgSibTrans2D1">
+    <dgm:scene3d>
+      <a:camera prst="orthographicFront"/>
+      <a:lightRig rig="threePt" dir="t"/>
+    </dgm:scene3d>
+    <dgm:txPr/>
+    <dgm:style>
+      <a:lnRef idx="0">
+        <a:scrgbClr r="0" g="0" b="0"/>
+      </a:lnRef>
+      <a:fillRef idx="1">
+        <a:scrgbClr r="0" g="0" b="0"/>
+      </a:fillRef>
+      <a:effectRef idx="0">
+        <a:scrgbClr r="0" g="0" b="0"/>
+      </a:effectRef>
+      <a:fontRef idx="minor">
+        <a:schemeClr val="lt1"/>
+      </a:fontRef>
+    </dgm:style>
+  </dgm:styleLbl>
+  <dgm:styleLbl name="callout">
+    <dgm:scene3d>
+      <a:camera prst="orthographicFront"/>
+      <a:lightRig rig="threePt" dir="t"/>
+    </dgm:scene3d>
+    <dgm:txPr/>
+    <dgm:style>
+      <a:lnRef idx="2">
+        <a:scrgbClr r="0" g="0" b="0"/>
+      </a:lnRef>
+      <a:fillRef idx="1">
+        <a:scrgbClr r="0" g="0" b="0"/>
+      </a:fillRef>
+      <a:effectRef idx="0">
+        <a:scrgbClr r="0" g="0" b="0"/>
+      </a:effectRef>
+      <a:fontRef idx="minor"/>
+    </dgm:style>
+  </dgm:styleLbl>
+  <dgm:styleLbl name="conFgAcc1">
+    <dgm:scene3d>
+      <a:camera prst="orthographicFront"/>
+      <a:lightRig rig="threePt" dir="t"/>
+    </dgm:scene3d>
+    <dgm:txPr/>
+    <dgm:style>
+      <a:lnRef idx="2">
+        <a:scrgbClr r="0" g="0" b="0"/>
+      </a:lnRef>
+      <a:fillRef idx="1">
+        <a:scrgbClr r="0" g="0" b="0"/>
+      </a:fillRef>
+      <a:effectRef idx="0">
+        <a:scrgbClr r="0" g="0" b="0"/>
+      </a:effectRef>
+      <a:fontRef idx="minor"/>
+    </dgm:style>
+  </dgm:styleLbl>
+  <dgm:styleLbl name="dkBgShp">
+    <dgm:scene3d>
+      <a:camera prst="orthographicFront"/>
+      <a:lightRig rig="threePt" dir="t"/>
+    </dgm:scene3d>
+    <dgm:txPr/>
+    <dgm:style>
+      <a:lnRef idx="0">
+        <a:scrgbClr r="0" g="0" b="0"/>
+      </a:lnRef>
+      <a:fillRef idx="1">
+        <a:scrgbClr r="0" g="0" b="0"/>
+      </a:fillRef>
+      <a:effectRef idx="0">
+        <a:scrgbClr r="0" g="0" b="0"/>
+      </a:effectRef>
+      <a:fontRef idx="minor"/>
+    </dgm:style>
+  </dgm:styleLbl>
+  <dgm:styleLbl name="fgAcc0">
+    <dgm:scene3d>
+      <a:camera prst="orthographicFront"/>
+      <a:lightRig rig="threePt" dir="t"/>
+    </dgm:scene3d>
+    <dgm:txPr/>
+    <dgm:style>
+      <a:lnRef idx="2">
+        <a:scrgbClr r="0" g="0" b="0"/>
+      </a:lnRef>
+      <a:fillRef idx="1">
+        <a:scrgbClr r="0" g="0" b="0"/>
+      </a:fillRef>
+      <a:effectRef idx="0">
+        <a:scrgbClr r="0" g="0" b="0"/>
+      </a:effectRef>
+      <a:fontRef idx="minor"/>
+    </dgm:style>
+  </dgm:styleLbl>
+  <dgm:styleLbl name="fgAcc1">
+    <dgm:scene3d>
+      <a:camera prst="orthographicFront"/>
+      <a:lightRig rig="threePt" dir="t"/>
+    </dgm:scene3d>
+    <dgm:txPr/>
+    <dgm:style>
+      <a:lnRef idx="2">
+        <a:scrgbClr r="0" g="0" b="0"/>
+      </a:lnRef>
+      <a:fillRef idx="1">
+        <a:scrgbClr r="0" g="0" b="0"/>
+      </a:fillRef>
+      <a:effectRef idx="0">
+        <a:scrgbClr r="0" g="0" b="0"/>
+      </a:effectRef>
+      <a:fontRef idx="minor"/>
+    </dgm:style>
+  </dgm:styleLbl>
+  <dgm:styleLbl name="fgAcc2">
+    <dgm:scene3d>
+      <a:camera prst="orthographicFront"/>
+      <a:lightRig rig="threePt" dir="t"/>
+    </dgm:scene3d>
+    <dgm:txPr/>
+    <dgm:style>
+      <a:lnRef idx="2">
+        <a:scrgbClr r="0" g="0" b="0"/>
+      </a:lnRef>
+      <a:fillRef idx="1">
+        <a:scrgbClr r="0" g="0" b="0"/>
+      </a:fillRef>
+      <a:effectRef idx="0">
+        <a:scrgbClr r="0" g="0" b="0"/>
+      </a:effectRef>
+      <a:fontRef idx="minor"/>
+    </dgm:style>
+  </dgm:styleLbl>
+  <dgm:styleLbl name="fgAcc3">
+    <dgm:scene3d>
+      <a:camera prst="orthographicFront"/>
+      <a:lightRig rig="threePt" dir="t"/>
+    </dgm:scene3d>
+    <dgm:txPr/>
+    <dgm:style>
+      <a:lnRef idx="2">
+        <a:scrgbClr r="0" g="0" b="0"/>
+      </a:lnRef>
+      <a:fillRef idx="1">
+        <a:scrgbClr r="0" g="0" b="0"/>
+      </a:fillRef>
+      <a:effectRef idx="0">
+        <a:scrgbClr r="0" g="0" b="0"/>
+      </a:effectRef>
+      <a:fontRef idx="minor"/>
+    </dgm:style>
+  </dgm:styleLbl>
+  <dgm:styleLbl name="fgAcc4">
+    <dgm:scene3d>
+      <a:camera prst="orthographicFront"/>
+      <a:lightRig rig="threePt" dir="t"/>
+    </dgm:scene3d>
+    <dgm:txPr/>
+    <dgm:style>
+      <a:lnRef idx="2">
+        <a:scrgbClr r="0" g="0" b="0"/>
+      </a:lnRef>
+      <a:fillRef idx="1">
+        <a:scrgbClr r="0" g="0" b="0"/>
+      </a:fillRef>
+      <a:effectRef idx="0">
+        <a:scrgbClr r="0" g="0" b="0"/>
+      </a:effectRef>
+      <a:fontRef idx="minor"/>
+    </dgm:style>
+  </dgm:styleLbl>
+  <dgm:styleLbl name="fgAccFollowNode1">
+    <dgm:scene3d>
+      <a:camera prst="orthographicFront"/>
+      <a:lightRig rig="threePt" dir="t"/>
+    </dgm:scene3d>
+    <dgm:txPr/>
+    <dgm:style>
+      <a:lnRef idx="2">
+        <a:scrgbClr r="0" g="0" b="0"/>
+      </a:lnRef>
+      <a:fillRef idx="1">
+        <a:scrgbClr r="0" g="0" b="0"/>
+      </a:fillRef>
+      <a:effectRef idx="0">
+        <a:scrgbClr r="0" g="0" b="0"/>
+      </a:effectRef>
+      <a:fontRef idx="minor"/>
+    </dgm:style>
+  </dgm:styleLbl>
+  <dgm:styleLbl name="fgImgPlace1">
+    <dgm:scene3d>
+      <a:camera prst="orthographicFront"/>
+      <a:lightRig rig="threePt" dir="t"/>
+    </dgm:scene3d>
+    <dgm:txPr/>
+    <dgm:style>
+      <a:lnRef idx="2">
+        <a:scrgbClr r="0" g="0" b="0"/>
+      </a:lnRef>
+      <a:fillRef idx="1">
+        <a:scrgbClr r="0" g="0" b="0"/>
+      </a:fillRef>
+      <a:effectRef idx="0">
+        <a:scrgbClr r="0" g="0" b="0"/>
+      </a:effectRef>
+      <a:fontRef idx="minor"/>
+    </dgm:style>
+  </dgm:styleLbl>
+  <dgm:styleLbl name="fgShp">
+    <dgm:scene3d>
+      <a:camera prst="orthographicFront"/>
+      <a:lightRig rig="threePt" dir="t"/>
+    </dgm:scene3d>
+    <dgm:txPr/>
+    <dgm:style>
+      <a:lnRef idx="2">
+        <a:scrgbClr r="0" g="0" b="0"/>
+      </a:lnRef>
+      <a:fillRef idx="1">
+        <a:scrgbClr r="0" g="0" b="0"/>
+      </a:fillRef>
+      <a:effectRef idx="0">
+        <a:scrgbClr r="0" g="0" b="0"/>
+      </a:effectRef>
+      <a:fontRef idx="minor"/>
+    </dgm:style>
+  </dgm:styleLbl>
+  <dgm:styleLbl name="fgSibTrans2D1">
+    <dgm:scene3d>
+      <a:camera prst="orthographicFront"/>
+      <a:lightRig rig="threePt" dir="t"/>
+    </dgm:scene3d>
+    <dgm:txPr/>
+    <dgm:style>
+      <a:lnRef idx="0">
+        <a:scrgbClr r="0" g="0" b="0"/>
+      </a:lnRef>
+      <a:fillRef idx="1">
+        <a:scrgbClr r="0" g="0" b="0"/>
+      </a:fillRef>
+      <a:effectRef idx="0">
+        <a:scrgbClr r="0" g="0" b="0"/>
+      </a:effectRef>
+      <a:fontRef idx="minor">
+        <a:schemeClr val="lt1"/>
+      </a:fontRef>
+    </dgm:style>
+  </dgm:styleLbl>
+  <dgm:styleLbl name="lnNode1">
+    <dgm:scene3d>
+      <a:camera prst="orthographicFront"/>
+      <a:lightRig rig="threePt" dir="t"/>
+    </dgm:scene3d>
+    <dgm:txPr/>
+    <dgm:style>
+      <a:lnRef idx="2">
+        <a:scrgbClr r="0" g="0" b="0"/>
+      </a:lnRef>
+      <a:fillRef idx="1">
+        <a:scrgbClr r="0" g="0" b="0"/>
+      </a:fillRef>
+      <a:effectRef idx="0">
+        <a:scrgbClr r="0" g="0" b="0"/>
+      </a:effectRef>
+      <a:fontRef idx="minor">
+        <a:schemeClr val="lt1"/>
+      </a:fontRef>
+    </dgm:style>
+  </dgm:styleLbl>
   <dgm:styleLbl name="node0">
     <dgm:scene3d>
       <a:camera prst="orthographicFront"/>
       <a:lightRig rig="threePt" dir="t"/>
     </dgm:scene3d>
-    <dgm:sp3d/>
     <dgm:txPr/>
     <dgm:style>
       <a:lnRef idx="2">
@@ -1820,12 +2402,11 @@
       </a:fontRef>
     </dgm:style>
   </dgm:styleLbl>
-  <dgm:styleLbl name="lnNode1">
+  <dgm:styleLbl name="node1">
     <dgm:scene3d>
       <a:camera prst="orthographicFront"/>
       <a:lightRig rig="threePt" dir="t"/>
     </dgm:scene3d>
-    <dgm:sp3d/>
     <dgm:txPr/>
     <dgm:style>
       <a:lnRef idx="2">
@@ -1842,12 +2423,388 @@
       </a:fontRef>
     </dgm:style>
   </dgm:styleLbl>
+  <dgm:styleLbl name="node2">
+    <dgm:scene3d>
+      <a:camera prst="orthographicFront"/>
+      <a:lightRig rig="threePt" dir="t"/>
+    </dgm:scene3d>
+    <dgm:txPr/>
+    <dgm:style>
+      <a:lnRef idx="2">
+        <a:scrgbClr r="0" g="0" b="0"/>
+      </a:lnRef>
+      <a:fillRef idx="1">
+        <a:scrgbClr r="0" g="0" b="0"/>
+      </a:fillRef>
+      <a:effectRef idx="0">
+        <a:scrgbClr r="0" g="0" b="0"/>
+      </a:effectRef>
+      <a:fontRef idx="minor">
+        <a:schemeClr val="lt1"/>
+      </a:fontRef>
+    </dgm:style>
+  </dgm:styleLbl>
+  <dgm:styleLbl name="node3">
+    <dgm:scene3d>
+      <a:camera prst="orthographicFront"/>
+      <a:lightRig rig="threePt" dir="t"/>
+    </dgm:scene3d>
+    <dgm:txPr/>
+    <dgm:style>
+      <a:lnRef idx="2">
+        <a:scrgbClr r="0" g="0" b="0"/>
+      </a:lnRef>
+      <a:fillRef idx="1">
+        <a:scrgbClr r="0" g="0" b="0"/>
+      </a:fillRef>
+      <a:effectRef idx="0">
+        <a:scrgbClr r="0" g="0" b="0"/>
+      </a:effectRef>
+      <a:fontRef idx="minor">
+        <a:schemeClr val="lt1"/>
+      </a:fontRef>
+    </dgm:style>
+  </dgm:styleLbl>
+  <dgm:styleLbl name="node4">
+    <dgm:scene3d>
+      <a:camera prst="orthographicFront"/>
+      <a:lightRig rig="threePt" dir="t"/>
+    </dgm:scene3d>
+    <dgm:txPr/>
+    <dgm:style>
+      <a:lnRef idx="2">
+        <a:scrgbClr r="0" g="0" b="0"/>
+      </a:lnRef>
+      <a:fillRef idx="1">
+        <a:scrgbClr r="0" g="0" b="0"/>
+      </a:fillRef>
+      <a:effectRef idx="0">
+        <a:scrgbClr r="0" g="0" b="0"/>
+      </a:effectRef>
+      <a:fontRef idx="minor">
+        <a:schemeClr val="lt1"/>
+      </a:fontRef>
+    </dgm:style>
+  </dgm:styleLbl>
+  <dgm:styleLbl name="parChTrans1D1">
+    <dgm:scene3d>
+      <a:camera prst="orthographicFront"/>
+      <a:lightRig rig="threePt" dir="t"/>
+    </dgm:scene3d>
+    <dgm:txPr/>
+    <dgm:style>
+      <a:lnRef idx="2">
+        <a:scrgbClr r="0" g="0" b="0"/>
+      </a:lnRef>
+      <a:fillRef idx="0">
+        <a:scrgbClr r="0" g="0" b="0"/>
+      </a:fillRef>
+      <a:effectRef idx="0">
+        <a:scrgbClr r="0" g="0" b="0"/>
+      </a:effectRef>
+      <a:fontRef idx="minor"/>
+    </dgm:style>
+  </dgm:styleLbl>
+  <dgm:styleLbl name="parChTrans1D2">
+    <dgm:scene3d>
+      <a:camera prst="orthographicFront"/>
+      <a:lightRig rig="threePt" dir="t"/>
+    </dgm:scene3d>
+    <dgm:txPr/>
+    <dgm:style>
+      <a:lnRef idx="2">
+        <a:scrgbClr r="0" g="0" b="0"/>
+      </a:lnRef>
+      <a:fillRef idx="0">
+        <a:scrgbClr r="0" g="0" b="0"/>
+      </a:fillRef>
+      <a:effectRef idx="0">
+        <a:scrgbClr r="0" g="0" b="0"/>
+      </a:effectRef>
+      <a:fontRef idx="minor"/>
+    </dgm:style>
+  </dgm:styleLbl>
+  <dgm:styleLbl name="parChTrans1D3">
+    <dgm:scene3d>
+      <a:camera prst="orthographicFront"/>
+      <a:lightRig rig="threePt" dir="t"/>
+    </dgm:scene3d>
+    <dgm:txPr/>
+    <dgm:style>
+      <a:lnRef idx="2">
+        <a:scrgbClr r="0" g="0" b="0"/>
+      </a:lnRef>
+      <a:fillRef idx="0">
+        <a:scrgbClr r="0" g="0" b="0"/>
+      </a:fillRef>
+      <a:effectRef idx="0">
+        <a:scrgbClr r="0" g="0" b="0"/>
+      </a:effectRef>
+      <a:fontRef idx="minor"/>
+    </dgm:style>
+  </dgm:styleLbl>
+  <dgm:styleLbl name="parChTrans1D4">
+    <dgm:scene3d>
+      <a:camera prst="orthographicFront"/>
+      <a:lightRig rig="threePt" dir="t"/>
+    </dgm:scene3d>
+    <dgm:txPr/>
+    <dgm:style>
+      <a:lnRef idx="2">
+        <a:scrgbClr r="0" g="0" b="0"/>
+      </a:lnRef>
+      <a:fillRef idx="0">
+        <a:scrgbClr r="0" g="0" b="0"/>
+      </a:fillRef>
+      <a:effectRef idx="0">
+        <a:scrgbClr r="0" g="0" b="0"/>
+      </a:effectRef>
+      <a:fontRef idx="minor"/>
+    </dgm:style>
+  </dgm:styleLbl>
+  <dgm:styleLbl name="parChTrans2D1">
+    <dgm:scene3d>
+      <a:camera prst="orthographicFront"/>
+      <a:lightRig rig="threePt" dir="t"/>
+    </dgm:scene3d>
+    <dgm:txPr/>
+    <dgm:style>
+      <a:lnRef idx="2">
+        <a:scrgbClr r="0" g="0" b="0"/>
+      </a:lnRef>
+      <a:fillRef idx="1">
+        <a:scrgbClr r="0" g="0" b="0"/>
+      </a:fillRef>
+      <a:effectRef idx="0">
+        <a:scrgbClr r="0" g="0" b="0"/>
+      </a:effectRef>
+      <a:fontRef idx="minor">
+        <a:schemeClr val="lt1"/>
+      </a:fontRef>
+    </dgm:style>
+  </dgm:styleLbl>
+  <dgm:styleLbl name="parChTrans2D2">
+    <dgm:scene3d>
+      <a:camera prst="orthographicFront"/>
+      <a:lightRig rig="threePt" dir="t"/>
+    </dgm:scene3d>
+    <dgm:txPr/>
+    <dgm:style>
+      <a:lnRef idx="2">
+        <a:scrgbClr r="0" g="0" b="0"/>
+      </a:lnRef>
+      <a:fillRef idx="1">
+        <a:scrgbClr r="0" g="0" b="0"/>
+      </a:fillRef>
+      <a:effectRef idx="0">
+        <a:scrgbClr r="0" g="0" b="0"/>
+      </a:effectRef>
+      <a:fontRef idx="minor">
+        <a:schemeClr val="lt1"/>
+      </a:fontRef>
+    </dgm:style>
+  </dgm:styleLbl>
+  <dgm:styleLbl name="parChTrans2D3">
+    <dgm:scene3d>
+      <a:camera prst="orthographicFront"/>
+      <a:lightRig rig="threePt" dir="t"/>
+    </dgm:scene3d>
+    <dgm:txPr/>
+    <dgm:style>
+      <a:lnRef idx="2">
+        <a:scrgbClr r="0" g="0" b="0"/>
+      </a:lnRef>
+      <a:fillRef idx="1">
+        <a:scrgbClr r="0" g="0" b="0"/>
+      </a:fillRef>
+      <a:effectRef idx="0">
+        <a:scrgbClr r="0" g="0" b="0"/>
+      </a:effectRef>
+      <a:fontRef idx="minor">
+        <a:schemeClr val="lt1"/>
+      </a:fontRef>
+    </dgm:style>
+  </dgm:styleLbl>
+  <dgm:styleLbl name="parChTrans2D4">
+    <dgm:scene3d>
+      <a:camera prst="orthographicFront"/>
+      <a:lightRig rig="threePt" dir="t"/>
+    </dgm:scene3d>
+    <dgm:txPr/>
+    <dgm:style>
+      <a:lnRef idx="2">
+        <a:scrgbClr r="0" g="0" b="0"/>
+      </a:lnRef>
+      <a:fillRef idx="1">
+        <a:scrgbClr r="0" g="0" b="0"/>
+      </a:fillRef>
+      <a:effectRef idx="0">
+        <a:scrgbClr r="0" g="0" b="0"/>
+      </a:effectRef>
+      <a:fontRef idx="minor">
+        <a:schemeClr val="lt1"/>
+      </a:fontRef>
+    </dgm:style>
+  </dgm:styleLbl>
+  <dgm:styleLbl name="revTx">
+    <dgm:scene3d>
+      <a:camera prst="orthographicFront"/>
+      <a:lightRig rig="threePt" dir="t"/>
+    </dgm:scene3d>
+    <dgm:txPr/>
+    <dgm:style>
+      <a:lnRef idx="0">
+        <a:scrgbClr r="0" g="0" b="0"/>
+      </a:lnRef>
+      <a:fillRef idx="0">
+        <a:scrgbClr r="0" g="0" b="0"/>
+      </a:fillRef>
+      <a:effectRef idx="0">
+        <a:scrgbClr r="0" g="0" b="0"/>
+      </a:effectRef>
+      <a:fontRef idx="minor"/>
+    </dgm:style>
+  </dgm:styleLbl>
+  <dgm:styleLbl name="sibTrans1D1">
+    <dgm:scene3d>
+      <a:camera prst="orthographicFront"/>
+      <a:lightRig rig="threePt" dir="t"/>
+    </dgm:scene3d>
+    <dgm:txPr/>
+    <dgm:style>
+      <a:lnRef idx="1">
+        <a:scrgbClr r="0" g="0" b="0"/>
+      </a:lnRef>
+      <a:fillRef idx="0">
+        <a:scrgbClr r="0" g="0" b="0"/>
+      </a:fillRef>
+      <a:effectRef idx="0">
+        <a:scrgbClr r="0" g="0" b="0"/>
+      </a:effectRef>
+      <a:fontRef idx="minor"/>
+    </dgm:style>
+  </dgm:styleLbl>
+  <dgm:styleLbl name="sibTrans2D1">
+    <dgm:scene3d>
+      <a:camera prst="orthographicFront"/>
+      <a:lightRig rig="threePt" dir="t"/>
+    </dgm:scene3d>
+    <dgm:txPr/>
+    <dgm:style>
+      <a:lnRef idx="0">
+        <a:scrgbClr r="0" g="0" b="0"/>
+      </a:lnRef>
+      <a:fillRef idx="1">
+        <a:scrgbClr r="0" g="0" b="0"/>
+      </a:fillRef>
+      <a:effectRef idx="0">
+        <a:scrgbClr r="0" g="0" b="0"/>
+      </a:effectRef>
+      <a:fontRef idx="minor">
+        <a:schemeClr val="lt1"/>
+      </a:fontRef>
+    </dgm:style>
+  </dgm:styleLbl>
+  <dgm:styleLbl name="solidAlignAcc1">
+    <dgm:scene3d>
+      <a:camera prst="orthographicFront"/>
+      <a:lightRig rig="threePt" dir="t"/>
+    </dgm:scene3d>
+    <dgm:txPr/>
+    <dgm:style>
+      <a:lnRef idx="2">
+        <a:scrgbClr r="0" g="0" b="0"/>
+      </a:lnRef>
+      <a:fillRef idx="1">
+        <a:scrgbClr r="0" g="0" b="0"/>
+      </a:fillRef>
+      <a:effectRef idx="0">
+        <a:scrgbClr r="0" g="0" b="0"/>
+      </a:effectRef>
+      <a:fontRef idx="minor"/>
+    </dgm:style>
+  </dgm:styleLbl>
+  <dgm:styleLbl name="solidBgAcc1">
+    <dgm:scene3d>
+      <a:camera prst="orthographicFront"/>
+      <a:lightRig rig="threePt" dir="t"/>
+    </dgm:scene3d>
+    <dgm:txPr/>
+    <dgm:style>
+      <a:lnRef idx="2">
+        <a:scrgbClr r="0" g="0" b="0"/>
+      </a:lnRef>
+      <a:fillRef idx="1">
+        <a:scrgbClr r="0" g="0" b="0"/>
+      </a:fillRef>
+      <a:effectRef idx="0">
+        <a:scrgbClr r="0" g="0" b="0"/>
+      </a:effectRef>
+      <a:fontRef idx="minor"/>
+    </dgm:style>
+  </dgm:styleLbl>
+  <dgm:styleLbl name="solidFgAcc1">
+    <dgm:scene3d>
+      <a:camera prst="orthographicFront"/>
+      <a:lightRig rig="threePt" dir="t"/>
+    </dgm:scene3d>
+    <dgm:txPr/>
+    <dgm:style>
+      <a:lnRef idx="2">
+        <a:scrgbClr r="0" g="0" b="0"/>
+      </a:lnRef>
+      <a:fillRef idx="1">
+        <a:scrgbClr r="0" g="0" b="0"/>
+      </a:fillRef>
+      <a:effectRef idx="0">
+        <a:scrgbClr r="0" g="0" b="0"/>
+      </a:effectRef>
+      <a:fontRef idx="minor"/>
+    </dgm:style>
+  </dgm:styleLbl>
+  <dgm:styleLbl name="trAlignAcc1">
+    <dgm:scene3d>
+      <a:camera prst="orthographicFront"/>
+      <a:lightRig rig="threePt" dir="t"/>
+    </dgm:scene3d>
+    <dgm:txPr/>
+    <dgm:style>
+      <a:lnRef idx="1">
+        <a:scrgbClr r="0" g="0" b="0"/>
+      </a:lnRef>
+      <a:fillRef idx="1">
+        <a:scrgbClr r="0" g="0" b="0"/>
+      </a:fillRef>
+      <a:effectRef idx="0">
+        <a:scrgbClr r="0" g="0" b="0"/>
+      </a:effectRef>
+      <a:fontRef idx="minor"/>
+    </dgm:style>
+  </dgm:styleLbl>
+  <dgm:styleLbl name="trBgShp">
+    <dgm:scene3d>
+      <a:camera prst="orthographicFront"/>
+      <a:lightRig rig="threePt" dir="t"/>
+    </dgm:scene3d>
+    <dgm:txPr/>
+    <dgm:style>
+      <a:lnRef idx="0">
+        <a:scrgbClr r="0" g="0" b="0"/>
+      </a:lnRef>
+      <a:fillRef idx="1">
+        <a:scrgbClr r="0" g="0" b="0"/>
+      </a:fillRef>
+      <a:effectRef idx="0">
+        <a:scrgbClr r="0" g="0" b="0"/>
+      </a:effectRef>
+      <a:fontRef idx="minor"/>
+    </dgm:style>
+  </dgm:styleLbl>
   <dgm:styleLbl name="vennNode1">
     <dgm:scene3d>
       <a:camera prst="orthographicFront"/>
       <a:lightRig rig="threePt" dir="t"/>
     </dgm:scene3d>
-    <dgm:sp3d/>
     <dgm:txPr/>
     <dgm:style>
       <a:lnRef idx="2">
@@ -1862,960 +2819,6 @@
       <a:fontRef idx="minor">
         <a:schemeClr val="tx1"/>
       </a:fontRef>
-    </dgm:style>
-  </dgm:styleLbl>
-  <dgm:styleLbl name="alignNode1">
-    <dgm:scene3d>
-      <a:camera prst="orthographicFront"/>
-      <a:lightRig rig="threePt" dir="t"/>
-    </dgm:scene3d>
-    <dgm:sp3d/>
-    <dgm:txPr/>
-    <dgm:style>
-      <a:lnRef idx="2">
-        <a:scrgbClr r="0" g="0" b="0"/>
-      </a:lnRef>
-      <a:fillRef idx="1">
-        <a:scrgbClr r="0" g="0" b="0"/>
-      </a:fillRef>
-      <a:effectRef idx="0">
-        <a:scrgbClr r="0" g="0" b="0"/>
-      </a:effectRef>
-      <a:fontRef idx="minor">
-        <a:schemeClr val="lt1"/>
-      </a:fontRef>
-    </dgm:style>
-  </dgm:styleLbl>
-  <dgm:styleLbl name="node1">
-    <dgm:scene3d>
-      <a:camera prst="orthographicFront"/>
-      <a:lightRig rig="threePt" dir="t"/>
-    </dgm:scene3d>
-    <dgm:sp3d/>
-    <dgm:txPr/>
-    <dgm:style>
-      <a:lnRef idx="2">
-        <a:scrgbClr r="0" g="0" b="0"/>
-      </a:lnRef>
-      <a:fillRef idx="1">
-        <a:scrgbClr r="0" g="0" b="0"/>
-      </a:fillRef>
-      <a:effectRef idx="0">
-        <a:scrgbClr r="0" g="0" b="0"/>
-      </a:effectRef>
-      <a:fontRef idx="minor">
-        <a:schemeClr val="lt1"/>
-      </a:fontRef>
-    </dgm:style>
-  </dgm:styleLbl>
-  <dgm:styleLbl name="node2">
-    <dgm:scene3d>
-      <a:camera prst="orthographicFront"/>
-      <a:lightRig rig="threePt" dir="t"/>
-    </dgm:scene3d>
-    <dgm:sp3d/>
-    <dgm:txPr/>
-    <dgm:style>
-      <a:lnRef idx="2">
-        <a:scrgbClr r="0" g="0" b="0"/>
-      </a:lnRef>
-      <a:fillRef idx="1">
-        <a:scrgbClr r="0" g="0" b="0"/>
-      </a:fillRef>
-      <a:effectRef idx="0">
-        <a:scrgbClr r="0" g="0" b="0"/>
-      </a:effectRef>
-      <a:fontRef idx="minor">
-        <a:schemeClr val="lt1"/>
-      </a:fontRef>
-    </dgm:style>
-  </dgm:styleLbl>
-  <dgm:styleLbl name="node3">
-    <dgm:scene3d>
-      <a:camera prst="orthographicFront"/>
-      <a:lightRig rig="threePt" dir="t"/>
-    </dgm:scene3d>
-    <dgm:sp3d/>
-    <dgm:txPr/>
-    <dgm:style>
-      <a:lnRef idx="2">
-        <a:scrgbClr r="0" g="0" b="0"/>
-      </a:lnRef>
-      <a:fillRef idx="1">
-        <a:scrgbClr r="0" g="0" b="0"/>
-      </a:fillRef>
-      <a:effectRef idx="0">
-        <a:scrgbClr r="0" g="0" b="0"/>
-      </a:effectRef>
-      <a:fontRef idx="minor">
-        <a:schemeClr val="lt1"/>
-      </a:fontRef>
-    </dgm:style>
-  </dgm:styleLbl>
-  <dgm:styleLbl name="node4">
-    <dgm:scene3d>
-      <a:camera prst="orthographicFront"/>
-      <a:lightRig rig="threePt" dir="t"/>
-    </dgm:scene3d>
-    <dgm:sp3d/>
-    <dgm:txPr/>
-    <dgm:style>
-      <a:lnRef idx="2">
-        <a:scrgbClr r="0" g="0" b="0"/>
-      </a:lnRef>
-      <a:fillRef idx="1">
-        <a:scrgbClr r="0" g="0" b="0"/>
-      </a:fillRef>
-      <a:effectRef idx="0">
-        <a:scrgbClr r="0" g="0" b="0"/>
-      </a:effectRef>
-      <a:fontRef idx="minor">
-        <a:schemeClr val="lt1"/>
-      </a:fontRef>
-    </dgm:style>
-  </dgm:styleLbl>
-  <dgm:styleLbl name="fgImgPlace1">
-    <dgm:scene3d>
-      <a:camera prst="orthographicFront"/>
-      <a:lightRig rig="threePt" dir="t"/>
-    </dgm:scene3d>
-    <dgm:sp3d/>
-    <dgm:txPr/>
-    <dgm:style>
-      <a:lnRef idx="2">
-        <a:scrgbClr r="0" g="0" b="0"/>
-      </a:lnRef>
-      <a:fillRef idx="1">
-        <a:scrgbClr r="0" g="0" b="0"/>
-      </a:fillRef>
-      <a:effectRef idx="0">
-        <a:scrgbClr r="0" g="0" b="0"/>
-      </a:effectRef>
-      <a:fontRef idx="minor"/>
-    </dgm:style>
-  </dgm:styleLbl>
-  <dgm:styleLbl name="alignImgPlace1">
-    <dgm:scene3d>
-      <a:camera prst="orthographicFront"/>
-      <a:lightRig rig="threePt" dir="t"/>
-    </dgm:scene3d>
-    <dgm:sp3d/>
-    <dgm:txPr/>
-    <dgm:style>
-      <a:lnRef idx="2">
-        <a:scrgbClr r="0" g="0" b="0"/>
-      </a:lnRef>
-      <a:fillRef idx="1">
-        <a:scrgbClr r="0" g="0" b="0"/>
-      </a:fillRef>
-      <a:effectRef idx="0">
-        <a:scrgbClr r="0" g="0" b="0"/>
-      </a:effectRef>
-      <a:fontRef idx="minor"/>
-    </dgm:style>
-  </dgm:styleLbl>
-  <dgm:styleLbl name="bgImgPlace1">
-    <dgm:scene3d>
-      <a:camera prst="orthographicFront"/>
-      <a:lightRig rig="threePt" dir="t"/>
-    </dgm:scene3d>
-    <dgm:sp3d/>
-    <dgm:txPr/>
-    <dgm:style>
-      <a:lnRef idx="2">
-        <a:scrgbClr r="0" g="0" b="0"/>
-      </a:lnRef>
-      <a:fillRef idx="1">
-        <a:scrgbClr r="0" g="0" b="0"/>
-      </a:fillRef>
-      <a:effectRef idx="0">
-        <a:scrgbClr r="0" g="0" b="0"/>
-      </a:effectRef>
-      <a:fontRef idx="minor"/>
-    </dgm:style>
-  </dgm:styleLbl>
-  <dgm:styleLbl name="sibTrans2D1">
-    <dgm:scene3d>
-      <a:camera prst="orthographicFront"/>
-      <a:lightRig rig="threePt" dir="t"/>
-    </dgm:scene3d>
-    <dgm:sp3d/>
-    <dgm:txPr/>
-    <dgm:style>
-      <a:lnRef idx="0">
-        <a:scrgbClr r="0" g="0" b="0"/>
-      </a:lnRef>
-      <a:fillRef idx="1">
-        <a:scrgbClr r="0" g="0" b="0"/>
-      </a:fillRef>
-      <a:effectRef idx="0">
-        <a:scrgbClr r="0" g="0" b="0"/>
-      </a:effectRef>
-      <a:fontRef idx="minor">
-        <a:schemeClr val="lt1"/>
-      </a:fontRef>
-    </dgm:style>
-  </dgm:styleLbl>
-  <dgm:styleLbl name="fgSibTrans2D1">
-    <dgm:scene3d>
-      <a:camera prst="orthographicFront"/>
-      <a:lightRig rig="threePt" dir="t"/>
-    </dgm:scene3d>
-    <dgm:sp3d/>
-    <dgm:txPr/>
-    <dgm:style>
-      <a:lnRef idx="0">
-        <a:scrgbClr r="0" g="0" b="0"/>
-      </a:lnRef>
-      <a:fillRef idx="1">
-        <a:scrgbClr r="0" g="0" b="0"/>
-      </a:fillRef>
-      <a:effectRef idx="0">
-        <a:scrgbClr r="0" g="0" b="0"/>
-      </a:effectRef>
-      <a:fontRef idx="minor">
-        <a:schemeClr val="lt1"/>
-      </a:fontRef>
-    </dgm:style>
-  </dgm:styleLbl>
-  <dgm:styleLbl name="bgSibTrans2D1">
-    <dgm:scene3d>
-      <a:camera prst="orthographicFront"/>
-      <a:lightRig rig="threePt" dir="t"/>
-    </dgm:scene3d>
-    <dgm:sp3d/>
-    <dgm:txPr/>
-    <dgm:style>
-      <a:lnRef idx="0">
-        <a:scrgbClr r="0" g="0" b="0"/>
-      </a:lnRef>
-      <a:fillRef idx="1">
-        <a:scrgbClr r="0" g="0" b="0"/>
-      </a:fillRef>
-      <a:effectRef idx="0">
-        <a:scrgbClr r="0" g="0" b="0"/>
-      </a:effectRef>
-      <a:fontRef idx="minor">
-        <a:schemeClr val="lt1"/>
-      </a:fontRef>
-    </dgm:style>
-  </dgm:styleLbl>
-  <dgm:styleLbl name="sibTrans1D1">
-    <dgm:scene3d>
-      <a:camera prst="orthographicFront"/>
-      <a:lightRig rig="threePt" dir="t"/>
-    </dgm:scene3d>
-    <dgm:sp3d/>
-    <dgm:txPr/>
-    <dgm:style>
-      <a:lnRef idx="1">
-        <a:scrgbClr r="0" g="0" b="0"/>
-      </a:lnRef>
-      <a:fillRef idx="0">
-        <a:scrgbClr r="0" g="0" b="0"/>
-      </a:fillRef>
-      <a:effectRef idx="0">
-        <a:scrgbClr r="0" g="0" b="0"/>
-      </a:effectRef>
-      <a:fontRef idx="minor"/>
-    </dgm:style>
-  </dgm:styleLbl>
-  <dgm:styleLbl name="callout">
-    <dgm:scene3d>
-      <a:camera prst="orthographicFront"/>
-      <a:lightRig rig="threePt" dir="t"/>
-    </dgm:scene3d>
-    <dgm:sp3d/>
-    <dgm:txPr/>
-    <dgm:style>
-      <a:lnRef idx="2">
-        <a:scrgbClr r="0" g="0" b="0"/>
-      </a:lnRef>
-      <a:fillRef idx="1">
-        <a:scrgbClr r="0" g="0" b="0"/>
-      </a:fillRef>
-      <a:effectRef idx="0">
-        <a:scrgbClr r="0" g="0" b="0"/>
-      </a:effectRef>
-      <a:fontRef idx="minor"/>
-    </dgm:style>
-  </dgm:styleLbl>
-  <dgm:styleLbl name="asst0">
-    <dgm:scene3d>
-      <a:camera prst="orthographicFront"/>
-      <a:lightRig rig="threePt" dir="t"/>
-    </dgm:scene3d>
-    <dgm:sp3d/>
-    <dgm:txPr/>
-    <dgm:style>
-      <a:lnRef idx="2">
-        <a:scrgbClr r="0" g="0" b="0"/>
-      </a:lnRef>
-      <a:fillRef idx="1">
-        <a:scrgbClr r="0" g="0" b="0"/>
-      </a:fillRef>
-      <a:effectRef idx="0">
-        <a:scrgbClr r="0" g="0" b="0"/>
-      </a:effectRef>
-      <a:fontRef idx="minor">
-        <a:schemeClr val="lt1"/>
-      </a:fontRef>
-    </dgm:style>
-  </dgm:styleLbl>
-  <dgm:styleLbl name="asst1">
-    <dgm:scene3d>
-      <a:camera prst="orthographicFront"/>
-      <a:lightRig rig="threePt" dir="t"/>
-    </dgm:scene3d>
-    <dgm:sp3d/>
-    <dgm:txPr/>
-    <dgm:style>
-      <a:lnRef idx="2">
-        <a:scrgbClr r="0" g="0" b="0"/>
-      </a:lnRef>
-      <a:fillRef idx="1">
-        <a:scrgbClr r="0" g="0" b="0"/>
-      </a:fillRef>
-      <a:effectRef idx="0">
-        <a:scrgbClr r="0" g="0" b="0"/>
-      </a:effectRef>
-      <a:fontRef idx="minor">
-        <a:schemeClr val="lt1"/>
-      </a:fontRef>
-    </dgm:style>
-  </dgm:styleLbl>
-  <dgm:styleLbl name="asst2">
-    <dgm:scene3d>
-      <a:camera prst="orthographicFront"/>
-      <a:lightRig rig="threePt" dir="t"/>
-    </dgm:scene3d>
-    <dgm:sp3d/>
-    <dgm:txPr/>
-    <dgm:style>
-      <a:lnRef idx="2">
-        <a:scrgbClr r="0" g="0" b="0"/>
-      </a:lnRef>
-      <a:fillRef idx="1">
-        <a:scrgbClr r="0" g="0" b="0"/>
-      </a:fillRef>
-      <a:effectRef idx="0">
-        <a:scrgbClr r="0" g="0" b="0"/>
-      </a:effectRef>
-      <a:fontRef idx="minor">
-        <a:schemeClr val="lt1"/>
-      </a:fontRef>
-    </dgm:style>
-  </dgm:styleLbl>
-  <dgm:styleLbl name="asst3">
-    <dgm:scene3d>
-      <a:camera prst="orthographicFront"/>
-      <a:lightRig rig="threePt" dir="t"/>
-    </dgm:scene3d>
-    <dgm:sp3d/>
-    <dgm:txPr/>
-    <dgm:style>
-      <a:lnRef idx="2">
-        <a:scrgbClr r="0" g="0" b="0"/>
-      </a:lnRef>
-      <a:fillRef idx="1">
-        <a:scrgbClr r="0" g="0" b="0"/>
-      </a:fillRef>
-      <a:effectRef idx="0">
-        <a:scrgbClr r="0" g="0" b="0"/>
-      </a:effectRef>
-      <a:fontRef idx="minor">
-        <a:schemeClr val="lt1"/>
-      </a:fontRef>
-    </dgm:style>
-  </dgm:styleLbl>
-  <dgm:styleLbl name="asst4">
-    <dgm:scene3d>
-      <a:camera prst="orthographicFront"/>
-      <a:lightRig rig="threePt" dir="t"/>
-    </dgm:scene3d>
-    <dgm:sp3d/>
-    <dgm:txPr/>
-    <dgm:style>
-      <a:lnRef idx="2">
-        <a:scrgbClr r="0" g="0" b="0"/>
-      </a:lnRef>
-      <a:fillRef idx="1">
-        <a:scrgbClr r="0" g="0" b="0"/>
-      </a:fillRef>
-      <a:effectRef idx="0">
-        <a:scrgbClr r="0" g="0" b="0"/>
-      </a:effectRef>
-      <a:fontRef idx="minor">
-        <a:schemeClr val="lt1"/>
-      </a:fontRef>
-    </dgm:style>
-  </dgm:styleLbl>
-  <dgm:styleLbl name="parChTrans2D1">
-    <dgm:scene3d>
-      <a:camera prst="orthographicFront"/>
-      <a:lightRig rig="threePt" dir="t"/>
-    </dgm:scene3d>
-    <dgm:sp3d/>
-    <dgm:txPr/>
-    <dgm:style>
-      <a:lnRef idx="2">
-        <a:scrgbClr r="0" g="0" b="0"/>
-      </a:lnRef>
-      <a:fillRef idx="1">
-        <a:scrgbClr r="0" g="0" b="0"/>
-      </a:fillRef>
-      <a:effectRef idx="0">
-        <a:scrgbClr r="0" g="0" b="0"/>
-      </a:effectRef>
-      <a:fontRef idx="minor">
-        <a:schemeClr val="lt1"/>
-      </a:fontRef>
-    </dgm:style>
-  </dgm:styleLbl>
-  <dgm:styleLbl name="parChTrans2D2">
-    <dgm:scene3d>
-      <a:camera prst="orthographicFront"/>
-      <a:lightRig rig="threePt" dir="t"/>
-    </dgm:scene3d>
-    <dgm:sp3d/>
-    <dgm:txPr/>
-    <dgm:style>
-      <a:lnRef idx="2">
-        <a:scrgbClr r="0" g="0" b="0"/>
-      </a:lnRef>
-      <a:fillRef idx="1">
-        <a:scrgbClr r="0" g="0" b="0"/>
-      </a:fillRef>
-      <a:effectRef idx="0">
-        <a:scrgbClr r="0" g="0" b="0"/>
-      </a:effectRef>
-      <a:fontRef idx="minor">
-        <a:schemeClr val="lt1"/>
-      </a:fontRef>
-    </dgm:style>
-  </dgm:styleLbl>
-  <dgm:styleLbl name="parChTrans2D3">
-    <dgm:scene3d>
-      <a:camera prst="orthographicFront"/>
-      <a:lightRig rig="threePt" dir="t"/>
-    </dgm:scene3d>
-    <dgm:sp3d/>
-    <dgm:txPr/>
-    <dgm:style>
-      <a:lnRef idx="2">
-        <a:scrgbClr r="0" g="0" b="0"/>
-      </a:lnRef>
-      <a:fillRef idx="1">
-        <a:scrgbClr r="0" g="0" b="0"/>
-      </a:fillRef>
-      <a:effectRef idx="0">
-        <a:scrgbClr r="0" g="0" b="0"/>
-      </a:effectRef>
-      <a:fontRef idx="minor">
-        <a:schemeClr val="lt1"/>
-      </a:fontRef>
-    </dgm:style>
-  </dgm:styleLbl>
-  <dgm:styleLbl name="parChTrans2D4">
-    <dgm:scene3d>
-      <a:camera prst="orthographicFront"/>
-      <a:lightRig rig="threePt" dir="t"/>
-    </dgm:scene3d>
-    <dgm:sp3d/>
-    <dgm:txPr/>
-    <dgm:style>
-      <a:lnRef idx="2">
-        <a:scrgbClr r="0" g="0" b="0"/>
-      </a:lnRef>
-      <a:fillRef idx="1">
-        <a:scrgbClr r="0" g="0" b="0"/>
-      </a:fillRef>
-      <a:effectRef idx="0">
-        <a:scrgbClr r="0" g="0" b="0"/>
-      </a:effectRef>
-      <a:fontRef idx="minor">
-        <a:schemeClr val="lt1"/>
-      </a:fontRef>
-    </dgm:style>
-  </dgm:styleLbl>
-  <dgm:styleLbl name="parChTrans1D1">
-    <dgm:scene3d>
-      <a:camera prst="orthographicFront"/>
-      <a:lightRig rig="threePt" dir="t"/>
-    </dgm:scene3d>
-    <dgm:sp3d/>
-    <dgm:txPr/>
-    <dgm:style>
-      <a:lnRef idx="2">
-        <a:scrgbClr r="0" g="0" b="0"/>
-      </a:lnRef>
-      <a:fillRef idx="0">
-        <a:scrgbClr r="0" g="0" b="0"/>
-      </a:fillRef>
-      <a:effectRef idx="0">
-        <a:scrgbClr r="0" g="0" b="0"/>
-      </a:effectRef>
-      <a:fontRef idx="minor"/>
-    </dgm:style>
-  </dgm:styleLbl>
-  <dgm:styleLbl name="parChTrans1D2">
-    <dgm:scene3d>
-      <a:camera prst="orthographicFront"/>
-      <a:lightRig rig="threePt" dir="t"/>
-    </dgm:scene3d>
-    <dgm:sp3d/>
-    <dgm:txPr/>
-    <dgm:style>
-      <a:lnRef idx="2">
-        <a:scrgbClr r="0" g="0" b="0"/>
-      </a:lnRef>
-      <a:fillRef idx="0">
-        <a:scrgbClr r="0" g="0" b="0"/>
-      </a:fillRef>
-      <a:effectRef idx="0">
-        <a:scrgbClr r="0" g="0" b="0"/>
-      </a:effectRef>
-      <a:fontRef idx="minor"/>
-    </dgm:style>
-  </dgm:styleLbl>
-  <dgm:styleLbl name="parChTrans1D3">
-    <dgm:scene3d>
-      <a:camera prst="orthographicFront"/>
-      <a:lightRig rig="threePt" dir="t"/>
-    </dgm:scene3d>
-    <dgm:sp3d/>
-    <dgm:txPr/>
-    <dgm:style>
-      <a:lnRef idx="2">
-        <a:scrgbClr r="0" g="0" b="0"/>
-      </a:lnRef>
-      <a:fillRef idx="0">
-        <a:scrgbClr r="0" g="0" b="0"/>
-      </a:fillRef>
-      <a:effectRef idx="0">
-        <a:scrgbClr r="0" g="0" b="0"/>
-      </a:effectRef>
-      <a:fontRef idx="minor"/>
-    </dgm:style>
-  </dgm:styleLbl>
-  <dgm:styleLbl name="parChTrans1D4">
-    <dgm:scene3d>
-      <a:camera prst="orthographicFront"/>
-      <a:lightRig rig="threePt" dir="t"/>
-    </dgm:scene3d>
-    <dgm:sp3d/>
-    <dgm:txPr/>
-    <dgm:style>
-      <a:lnRef idx="2">
-        <a:scrgbClr r="0" g="0" b="0"/>
-      </a:lnRef>
-      <a:fillRef idx="0">
-        <a:scrgbClr r="0" g="0" b="0"/>
-      </a:fillRef>
-      <a:effectRef idx="0">
-        <a:scrgbClr r="0" g="0" b="0"/>
-      </a:effectRef>
-      <a:fontRef idx="minor"/>
-    </dgm:style>
-  </dgm:styleLbl>
-  <dgm:styleLbl name="fgAcc1">
-    <dgm:scene3d>
-      <a:camera prst="orthographicFront"/>
-      <a:lightRig rig="threePt" dir="t"/>
-    </dgm:scene3d>
-    <dgm:sp3d/>
-    <dgm:txPr/>
-    <dgm:style>
-      <a:lnRef idx="2">
-        <a:scrgbClr r="0" g="0" b="0"/>
-      </a:lnRef>
-      <a:fillRef idx="1">
-        <a:scrgbClr r="0" g="0" b="0"/>
-      </a:fillRef>
-      <a:effectRef idx="0">
-        <a:scrgbClr r="0" g="0" b="0"/>
-      </a:effectRef>
-      <a:fontRef idx="minor"/>
-    </dgm:style>
-  </dgm:styleLbl>
-  <dgm:styleLbl name="conFgAcc1">
-    <dgm:scene3d>
-      <a:camera prst="orthographicFront"/>
-      <a:lightRig rig="threePt" dir="t"/>
-    </dgm:scene3d>
-    <dgm:sp3d/>
-    <dgm:txPr/>
-    <dgm:style>
-      <a:lnRef idx="2">
-        <a:scrgbClr r="0" g="0" b="0"/>
-      </a:lnRef>
-      <a:fillRef idx="1">
-        <a:scrgbClr r="0" g="0" b="0"/>
-      </a:fillRef>
-      <a:effectRef idx="0">
-        <a:scrgbClr r="0" g="0" b="0"/>
-      </a:effectRef>
-      <a:fontRef idx="minor"/>
-    </dgm:style>
-  </dgm:styleLbl>
-  <dgm:styleLbl name="alignAcc1">
-    <dgm:scene3d>
-      <a:camera prst="orthographicFront"/>
-      <a:lightRig rig="threePt" dir="t"/>
-    </dgm:scene3d>
-    <dgm:sp3d/>
-    <dgm:txPr/>
-    <dgm:style>
-      <a:lnRef idx="2">
-        <a:scrgbClr r="0" g="0" b="0"/>
-      </a:lnRef>
-      <a:fillRef idx="1">
-        <a:scrgbClr r="0" g="0" b="0"/>
-      </a:fillRef>
-      <a:effectRef idx="0">
-        <a:scrgbClr r="0" g="0" b="0"/>
-      </a:effectRef>
-      <a:fontRef idx="minor"/>
-    </dgm:style>
-  </dgm:styleLbl>
-  <dgm:styleLbl name="trAlignAcc1">
-    <dgm:scene3d>
-      <a:camera prst="orthographicFront"/>
-      <a:lightRig rig="threePt" dir="t"/>
-    </dgm:scene3d>
-    <dgm:sp3d/>
-    <dgm:txPr/>
-    <dgm:style>
-      <a:lnRef idx="1">
-        <a:scrgbClr r="0" g="0" b="0"/>
-      </a:lnRef>
-      <a:fillRef idx="1">
-        <a:scrgbClr r="0" g="0" b="0"/>
-      </a:fillRef>
-      <a:effectRef idx="0">
-        <a:scrgbClr r="0" g="0" b="0"/>
-      </a:effectRef>
-      <a:fontRef idx="minor"/>
-    </dgm:style>
-  </dgm:styleLbl>
-  <dgm:styleLbl name="bgAcc1">
-    <dgm:scene3d>
-      <a:camera prst="orthographicFront"/>
-      <a:lightRig rig="threePt" dir="t"/>
-    </dgm:scene3d>
-    <dgm:sp3d/>
-    <dgm:txPr/>
-    <dgm:style>
-      <a:lnRef idx="2">
-        <a:scrgbClr r="0" g="0" b="0"/>
-      </a:lnRef>
-      <a:fillRef idx="1">
-        <a:scrgbClr r="0" g="0" b="0"/>
-      </a:fillRef>
-      <a:effectRef idx="0">
-        <a:scrgbClr r="0" g="0" b="0"/>
-      </a:effectRef>
-      <a:fontRef idx="minor"/>
-    </dgm:style>
-  </dgm:styleLbl>
-  <dgm:styleLbl name="solidFgAcc1">
-    <dgm:scene3d>
-      <a:camera prst="orthographicFront"/>
-      <a:lightRig rig="threePt" dir="t"/>
-    </dgm:scene3d>
-    <dgm:sp3d/>
-    <dgm:txPr/>
-    <dgm:style>
-      <a:lnRef idx="2">
-        <a:scrgbClr r="0" g="0" b="0"/>
-      </a:lnRef>
-      <a:fillRef idx="1">
-        <a:scrgbClr r="0" g="0" b="0"/>
-      </a:fillRef>
-      <a:effectRef idx="0">
-        <a:scrgbClr r="0" g="0" b="0"/>
-      </a:effectRef>
-      <a:fontRef idx="minor"/>
-    </dgm:style>
-  </dgm:styleLbl>
-  <dgm:styleLbl name="solidAlignAcc1">
-    <dgm:scene3d>
-      <a:camera prst="orthographicFront"/>
-      <a:lightRig rig="threePt" dir="t"/>
-    </dgm:scene3d>
-    <dgm:sp3d/>
-    <dgm:txPr/>
-    <dgm:style>
-      <a:lnRef idx="2">
-        <a:scrgbClr r="0" g="0" b="0"/>
-      </a:lnRef>
-      <a:fillRef idx="1">
-        <a:scrgbClr r="0" g="0" b="0"/>
-      </a:fillRef>
-      <a:effectRef idx="0">
-        <a:scrgbClr r="0" g="0" b="0"/>
-      </a:effectRef>
-      <a:fontRef idx="minor"/>
-    </dgm:style>
-  </dgm:styleLbl>
-  <dgm:styleLbl name="solidBgAcc1">
-    <dgm:scene3d>
-      <a:camera prst="orthographicFront"/>
-      <a:lightRig rig="threePt" dir="t"/>
-    </dgm:scene3d>
-    <dgm:sp3d/>
-    <dgm:txPr/>
-    <dgm:style>
-      <a:lnRef idx="2">
-        <a:scrgbClr r="0" g="0" b="0"/>
-      </a:lnRef>
-      <a:fillRef idx="1">
-        <a:scrgbClr r="0" g="0" b="0"/>
-      </a:fillRef>
-      <a:effectRef idx="0">
-        <a:scrgbClr r="0" g="0" b="0"/>
-      </a:effectRef>
-      <a:fontRef idx="minor"/>
-    </dgm:style>
-  </dgm:styleLbl>
-  <dgm:styleLbl name="fgAccFollowNode1">
-    <dgm:scene3d>
-      <a:camera prst="orthographicFront"/>
-      <a:lightRig rig="threePt" dir="t"/>
-    </dgm:scene3d>
-    <dgm:sp3d/>
-    <dgm:txPr/>
-    <dgm:style>
-      <a:lnRef idx="2">
-        <a:scrgbClr r="0" g="0" b="0"/>
-      </a:lnRef>
-      <a:fillRef idx="1">
-        <a:scrgbClr r="0" g="0" b="0"/>
-      </a:fillRef>
-      <a:effectRef idx="0">
-        <a:scrgbClr r="0" g="0" b="0"/>
-      </a:effectRef>
-      <a:fontRef idx="minor"/>
-    </dgm:style>
-  </dgm:styleLbl>
-  <dgm:styleLbl name="alignAccFollowNode1">
-    <dgm:scene3d>
-      <a:camera prst="orthographicFront"/>
-      <a:lightRig rig="threePt" dir="t"/>
-    </dgm:scene3d>
-    <dgm:sp3d/>
-    <dgm:txPr/>
-    <dgm:style>
-      <a:lnRef idx="2">
-        <a:scrgbClr r="0" g="0" b="0"/>
-      </a:lnRef>
-      <a:fillRef idx="1">
-        <a:scrgbClr r="0" g="0" b="0"/>
-      </a:fillRef>
-      <a:effectRef idx="0">
-        <a:scrgbClr r="0" g="0" b="0"/>
-      </a:effectRef>
-      <a:fontRef idx="minor"/>
-    </dgm:style>
-  </dgm:styleLbl>
-  <dgm:styleLbl name="bgAccFollowNode1">
-    <dgm:scene3d>
-      <a:camera prst="orthographicFront"/>
-      <a:lightRig rig="threePt" dir="t"/>
-    </dgm:scene3d>
-    <dgm:sp3d/>
-    <dgm:txPr/>
-    <dgm:style>
-      <a:lnRef idx="2">
-        <a:scrgbClr r="0" g="0" b="0"/>
-      </a:lnRef>
-      <a:fillRef idx="1">
-        <a:scrgbClr r="0" g="0" b="0"/>
-      </a:fillRef>
-      <a:effectRef idx="0">
-        <a:scrgbClr r="0" g="0" b="0"/>
-      </a:effectRef>
-      <a:fontRef idx="minor"/>
-    </dgm:style>
-  </dgm:styleLbl>
-  <dgm:styleLbl name="fgAcc0">
-    <dgm:scene3d>
-      <a:camera prst="orthographicFront"/>
-      <a:lightRig rig="threePt" dir="t"/>
-    </dgm:scene3d>
-    <dgm:sp3d/>
-    <dgm:txPr/>
-    <dgm:style>
-      <a:lnRef idx="2">
-        <a:scrgbClr r="0" g="0" b="0"/>
-      </a:lnRef>
-      <a:fillRef idx="1">
-        <a:scrgbClr r="0" g="0" b="0"/>
-      </a:fillRef>
-      <a:effectRef idx="0">
-        <a:scrgbClr r="0" g="0" b="0"/>
-      </a:effectRef>
-      <a:fontRef idx="minor"/>
-    </dgm:style>
-  </dgm:styleLbl>
-  <dgm:styleLbl name="fgAcc2">
-    <dgm:scene3d>
-      <a:camera prst="orthographicFront"/>
-      <a:lightRig rig="threePt" dir="t"/>
-    </dgm:scene3d>
-    <dgm:sp3d/>
-    <dgm:txPr/>
-    <dgm:style>
-      <a:lnRef idx="2">
-        <a:scrgbClr r="0" g="0" b="0"/>
-      </a:lnRef>
-      <a:fillRef idx="1">
-        <a:scrgbClr r="0" g="0" b="0"/>
-      </a:fillRef>
-      <a:effectRef idx="0">
-        <a:scrgbClr r="0" g="0" b="0"/>
-      </a:effectRef>
-      <a:fontRef idx="minor"/>
-    </dgm:style>
-  </dgm:styleLbl>
-  <dgm:styleLbl name="fgAcc3">
-    <dgm:scene3d>
-      <a:camera prst="orthographicFront"/>
-      <a:lightRig rig="threePt" dir="t"/>
-    </dgm:scene3d>
-    <dgm:sp3d/>
-    <dgm:txPr/>
-    <dgm:style>
-      <a:lnRef idx="2">
-        <a:scrgbClr r="0" g="0" b="0"/>
-      </a:lnRef>
-      <a:fillRef idx="1">
-        <a:scrgbClr r="0" g="0" b="0"/>
-      </a:fillRef>
-      <a:effectRef idx="0">
-        <a:scrgbClr r="0" g="0" b="0"/>
-      </a:effectRef>
-      <a:fontRef idx="minor"/>
-    </dgm:style>
-  </dgm:styleLbl>
-  <dgm:styleLbl name="fgAcc4">
-    <dgm:scene3d>
-      <a:camera prst="orthographicFront"/>
-      <a:lightRig rig="threePt" dir="t"/>
-    </dgm:scene3d>
-    <dgm:sp3d/>
-    <dgm:txPr/>
-    <dgm:style>
-      <a:lnRef idx="2">
-        <a:scrgbClr r="0" g="0" b="0"/>
-      </a:lnRef>
-      <a:fillRef idx="1">
-        <a:scrgbClr r="0" g="0" b="0"/>
-      </a:fillRef>
-      <a:effectRef idx="0">
-        <a:scrgbClr r="0" g="0" b="0"/>
-      </a:effectRef>
-      <a:fontRef idx="minor"/>
-    </dgm:style>
-  </dgm:styleLbl>
-  <dgm:styleLbl name="bgShp">
-    <dgm:scene3d>
-      <a:camera prst="orthographicFront"/>
-      <a:lightRig rig="threePt" dir="t"/>
-    </dgm:scene3d>
-    <dgm:sp3d/>
-    <dgm:txPr/>
-    <dgm:style>
-      <a:lnRef idx="0">
-        <a:scrgbClr r="0" g="0" b="0"/>
-      </a:lnRef>
-      <a:fillRef idx="1">
-        <a:scrgbClr r="0" g="0" b="0"/>
-      </a:fillRef>
-      <a:effectRef idx="0">
-        <a:scrgbClr r="0" g="0" b="0"/>
-      </a:effectRef>
-      <a:fontRef idx="minor"/>
-    </dgm:style>
-  </dgm:styleLbl>
-  <dgm:styleLbl name="dkBgShp">
-    <dgm:scene3d>
-      <a:camera prst="orthographicFront"/>
-      <a:lightRig rig="threePt" dir="t"/>
-    </dgm:scene3d>
-    <dgm:sp3d/>
-    <dgm:txPr/>
-    <dgm:style>
-      <a:lnRef idx="0">
-        <a:scrgbClr r="0" g="0" b="0"/>
-      </a:lnRef>
-      <a:fillRef idx="1">
-        <a:scrgbClr r="0" g="0" b="0"/>
-      </a:fillRef>
-      <a:effectRef idx="0">
-        <a:scrgbClr r="0" g="0" b="0"/>
-      </a:effectRef>
-      <a:fontRef idx="minor"/>
-    </dgm:style>
-  </dgm:styleLbl>
-  <dgm:styleLbl name="trBgShp">
-    <dgm:scene3d>
-      <a:camera prst="orthographicFront"/>
-      <a:lightRig rig="threePt" dir="t"/>
-    </dgm:scene3d>
-    <dgm:sp3d/>
-    <dgm:txPr/>
-    <dgm:style>
-      <a:lnRef idx="0">
-        <a:scrgbClr r="0" g="0" b="0"/>
-      </a:lnRef>
-      <a:fillRef idx="1">
-        <a:scrgbClr r="0" g="0" b="0"/>
-      </a:fillRef>
-      <a:effectRef idx="0">
-        <a:scrgbClr r="0" g="0" b="0"/>
-      </a:effectRef>
-      <a:fontRef idx="minor"/>
-    </dgm:style>
-  </dgm:styleLbl>
-  <dgm:styleLbl name="fgShp">
-    <dgm:scene3d>
-      <a:camera prst="orthographicFront"/>
-      <a:lightRig rig="threePt" dir="t"/>
-    </dgm:scene3d>
-    <dgm:sp3d/>
-    <dgm:txPr/>
-    <dgm:style>
-      <a:lnRef idx="2">
-        <a:scrgbClr r="0" g="0" b="0"/>
-      </a:lnRef>
-      <a:fillRef idx="1">
-        <a:scrgbClr r="0" g="0" b="0"/>
-      </a:fillRef>
-      <a:effectRef idx="0">
-        <a:scrgbClr r="0" g="0" b="0"/>
-      </a:effectRef>
-      <a:fontRef idx="minor"/>
-    </dgm:style>
-  </dgm:styleLbl>
-  <dgm:styleLbl name="revTx">
-    <dgm:scene3d>
-      <a:camera prst="orthographicFront"/>
-      <a:lightRig rig="threePt" dir="t"/>
-    </dgm:scene3d>
-    <dgm:sp3d/>
-    <dgm:txPr/>
-    <dgm:style>
-      <a:lnRef idx="0">
-        <a:scrgbClr r="0" g="0" b="0"/>
-      </a:lnRef>
-      <a:fillRef idx="0">
-        <a:scrgbClr r="0" g="0" b="0"/>
-      </a:fillRef>
-      <a:effectRef idx="0">
-        <a:scrgbClr r="0" g="0" b="0"/>
-      </a:effectRef>
-      <a:fontRef idx="minor"/>
     </dgm:style>
   </dgm:styleLbl>
 </dgm:styleDef>
@@ -2903,7 +2906,6 @@
           <a:p>
             <a:fld id="{8416A3B2-2210-426D-AC6B-98C3D5FB0053}" type="datetimeFigureOut">
               <a:rPr lang="es-CO" smtClean="0"/>
-              <a:t>13/02/2025</a:t>
             </a:fld>
             <a:endParaRPr lang="es-CO"/>
           </a:p>
@@ -2970,6 +2972,7 @@
               <a:rPr lang="es-ES"/>
               <a:t>Haga clic para modificar los estilos de texto del patrón</a:t>
             </a:r>
+            <a:endParaRPr lang="es-ES"/>
           </a:p>
           <a:p>
             <a:pPr lvl="1"/>
@@ -2977,6 +2980,7 @@
               <a:rPr lang="es-ES"/>
               <a:t>Segundo nivel</a:t>
             </a:r>
+            <a:endParaRPr lang="es-ES"/>
           </a:p>
           <a:p>
             <a:pPr lvl="2"/>
@@ -2984,6 +2988,7 @@
               <a:rPr lang="es-ES"/>
               <a:t>Tercer nivel</a:t>
             </a:r>
+            <a:endParaRPr lang="es-ES"/>
           </a:p>
           <a:p>
             <a:pPr lvl="3"/>
@@ -2991,6 +2996,7 @@
               <a:rPr lang="es-ES"/>
               <a:t>Cuarto nivel</a:t>
             </a:r>
+            <a:endParaRPr lang="es-ES"/>
           </a:p>
           <a:p>
             <a:pPr lvl="4"/>
@@ -3062,18 +3068,12 @@
           <a:p>
             <a:fld id="{DFD3DDA3-0708-45DB-B3CF-055CDDAE7E5B}" type="slidenum">
               <a:rPr lang="es-CO" smtClean="0"/>
-              <a:t>‹Nº›</a:t>
             </a:fld>
             <a:endParaRPr lang="es-CO"/>
           </a:p>
         </p:txBody>
       </p:sp>
     </p:spTree>
-    <p:extLst>
-      <p:ext uri="{BB962C8B-B14F-4D97-AF65-F5344CB8AC3E}">
-        <p14:creationId xmlns:p14="http://schemas.microsoft.com/office/powerpoint/2010/main" val="3425715343"/>
-      </p:ext>
-    </p:extLst>
   </p:cSld>
   <p:clrMap bg1="lt1" tx1="dk1" bg2="lt2" tx2="dk2" accent1="accent1" accent2="accent2" accent3="accent3" accent4="accent4" accent5="accent5" accent6="accent6" hlink="hlink" folHlink="folHlink"/>
   <p:notesStyle>
@@ -3172,7 +3172,7 @@
 </file>
 
 <file path=ppt/slideLayouts/slideLayout1.xml><?xml version="1.0" encoding="utf-8"?>
-<p:sldLayout xmlns:a="http://schemas.openxmlformats.org/drawingml/2006/main" xmlns:r="http://schemas.openxmlformats.org/officeDocument/2006/relationships" xmlns:p="http://schemas.openxmlformats.org/presentationml/2006/main" showMasterSp="0" type="title" preserve="1">
+<p:sldLayout xmlns:a="http://schemas.openxmlformats.org/drawingml/2006/main" xmlns:r="http://schemas.openxmlformats.org/officeDocument/2006/relationships" xmlns:p="http://schemas.openxmlformats.org/presentationml/2006/main" type="title" preserve="1" showMasterSp="0">
   <p:cSld name="Diapositiva de título">
     <p:bg>
       <p:bgPr>
@@ -3241,7 +3241,7 @@
             <a:spLocks noGrp="1"/>
           </p:cNvSpPr>
           <p:nvPr>
-            <p:ph type="subTitle" idx="1"/>
+            <p:ph type="subTitle" idx="1" hasCustomPrompt="1"/>
           </p:nvPr>
         </p:nvSpPr>
         <p:spPr>
@@ -3340,8 +3340,6 @@
           <a:p>
             <a:fld id="{87DE6118-2437-4B30-8E3C-4D2BE6020583}" type="datetimeFigureOut">
               <a:rPr lang="en-US" dirty="0"/>
-              <a:pPr/>
-              <a:t>2/13/2025</a:t>
             </a:fld>
             <a:endParaRPr lang="en-US" dirty="0"/>
           </a:p>
@@ -3409,8 +3407,6 @@
           <a:p>
             <a:fld id="{69E57DC2-970A-4B3E-BB1C-7A09969E49DF}" type="slidenum">
               <a:rPr lang="en-US" dirty="0"/>
-              <a:pPr/>
-              <a:t>‹Nº›</a:t>
             </a:fld>
             <a:endParaRPr lang="en-US" dirty="0"/>
           </a:p>
@@ -3481,8 +3477,6 @@
               <a:noFill/>
               <a:prstDash val="solid"/>
               <a:round/>
-              <a:headEnd/>
-              <a:tailEnd/>
             </a:ln>
           </p:spPr>
         </p:sp>
@@ -3539,8 +3533,6 @@
               <a:noFill/>
               <a:prstDash val="solid"/>
               <a:round/>
-              <a:headEnd/>
-              <a:tailEnd/>
             </a:ln>
           </p:spPr>
         </p:sp>
@@ -3600,7 +3592,7 @@
             <a:spLocks noGrp="1"/>
           </p:cNvSpPr>
           <p:nvPr>
-            <p:ph type="body" orient="vert" idx="1"/>
+            <p:ph type="body" orient="vert" idx="1" hasCustomPrompt="1"/>
           </p:nvPr>
         </p:nvSpPr>
         <p:spPr>
@@ -3618,6 +3610,7 @@
               <a:rPr lang="es-ES"/>
               <a:t>Haga clic para modificar los estilos de texto del patrón</a:t>
             </a:r>
+            <a:endParaRPr lang="es-ES"/>
           </a:p>
           <a:p>
             <a:pPr lvl="1"/>
@@ -3625,6 +3618,7 @@
               <a:rPr lang="es-ES"/>
               <a:t>Segundo nivel</a:t>
             </a:r>
+            <a:endParaRPr lang="es-ES"/>
           </a:p>
           <a:p>
             <a:pPr lvl="2"/>
@@ -3632,6 +3626,7 @@
               <a:rPr lang="es-ES"/>
               <a:t>Tercer nivel</a:t>
             </a:r>
+            <a:endParaRPr lang="es-ES"/>
           </a:p>
           <a:p>
             <a:pPr lvl="3"/>
@@ -3639,6 +3634,7 @@
               <a:rPr lang="es-ES"/>
               <a:t>Cuarto nivel</a:t>
             </a:r>
+            <a:endParaRPr lang="es-ES"/>
           </a:p>
           <a:p>
             <a:pPr lvl="4"/>
@@ -3667,7 +3663,6 @@
           <a:p>
             <a:fld id="{87DE6118-2437-4B30-8E3C-4D2BE6020583}" type="datetimeFigureOut">
               <a:rPr lang="en-US" dirty="0"/>
-              <a:t>2/13/2025</a:t>
             </a:fld>
             <a:endParaRPr lang="en-US" dirty="0"/>
           </a:p>
@@ -3709,7 +3704,6 @@
           <a:p>
             <a:fld id="{69E57DC2-970A-4B3E-BB1C-7A09969E49DF}" type="slidenum">
               <a:rPr lang="en-US" dirty="0"/>
-              <a:t>‹Nº›</a:t>
             </a:fld>
             <a:endParaRPr lang="en-US" dirty="0"/>
           </a:p>
@@ -3775,7 +3769,7 @@
             <a:spLocks noGrp="1"/>
           </p:cNvSpPr>
           <p:nvPr>
-            <p:ph type="body" orient="vert" idx="1"/>
+            <p:ph type="body" orient="vert" idx="1" hasCustomPrompt="1"/>
           </p:nvPr>
         </p:nvSpPr>
         <p:spPr>
@@ -3793,6 +3787,7 @@
               <a:rPr lang="es-ES"/>
               <a:t>Haga clic para modificar los estilos de texto del patrón</a:t>
             </a:r>
+            <a:endParaRPr lang="es-ES"/>
           </a:p>
           <a:p>
             <a:pPr lvl="1"/>
@@ -3800,6 +3795,7 @@
               <a:rPr lang="es-ES"/>
               <a:t>Segundo nivel</a:t>
             </a:r>
+            <a:endParaRPr lang="es-ES"/>
           </a:p>
           <a:p>
             <a:pPr lvl="2"/>
@@ -3807,6 +3803,7 @@
               <a:rPr lang="es-ES"/>
               <a:t>Tercer nivel</a:t>
             </a:r>
+            <a:endParaRPr lang="es-ES"/>
           </a:p>
           <a:p>
             <a:pPr lvl="3"/>
@@ -3814,6 +3811,7 @@
               <a:rPr lang="es-ES"/>
               <a:t>Cuarto nivel</a:t>
             </a:r>
+            <a:endParaRPr lang="es-ES"/>
           </a:p>
           <a:p>
             <a:pPr lvl="4"/>
@@ -3842,7 +3840,6 @@
           <a:p>
             <a:fld id="{87DE6118-2437-4B30-8E3C-4D2BE6020583}" type="datetimeFigureOut">
               <a:rPr lang="en-US" dirty="0"/>
-              <a:t>2/13/2025</a:t>
             </a:fld>
             <a:endParaRPr lang="en-US" dirty="0"/>
           </a:p>
@@ -3884,7 +3881,6 @@
           <a:p>
             <a:fld id="{69E57DC2-970A-4B3E-BB1C-7A09969E49DF}" type="slidenum">
               <a:rPr lang="en-US" dirty="0"/>
-              <a:t>‹Nº›</a:t>
             </a:fld>
             <a:endParaRPr lang="en-US" dirty="0"/>
           </a:p>
@@ -3945,7 +3941,7 @@
             <a:spLocks noGrp="1"/>
           </p:cNvSpPr>
           <p:nvPr>
-            <p:ph idx="1"/>
+            <p:ph idx="1" hasCustomPrompt="1"/>
           </p:nvPr>
         </p:nvSpPr>
         <p:spPr/>
@@ -3958,6 +3954,7 @@
               <a:rPr lang="es-ES"/>
               <a:t>Haga clic para modificar los estilos de texto del patrón</a:t>
             </a:r>
+            <a:endParaRPr lang="es-ES"/>
           </a:p>
           <a:p>
             <a:pPr lvl="1"/>
@@ -3965,6 +3962,7 @@
               <a:rPr lang="es-ES"/>
               <a:t>Segundo nivel</a:t>
             </a:r>
+            <a:endParaRPr lang="es-ES"/>
           </a:p>
           <a:p>
             <a:pPr lvl="2"/>
@@ -3972,6 +3970,7 @@
               <a:rPr lang="es-ES"/>
               <a:t>Tercer nivel</a:t>
             </a:r>
+            <a:endParaRPr lang="es-ES"/>
           </a:p>
           <a:p>
             <a:pPr lvl="3"/>
@@ -3979,6 +3978,7 @@
               <a:rPr lang="es-ES"/>
               <a:t>Cuarto nivel</a:t>
             </a:r>
+            <a:endParaRPr lang="es-ES"/>
           </a:p>
           <a:p>
             <a:pPr lvl="4"/>
@@ -4007,7 +4007,6 @@
           <a:p>
             <a:fld id="{87DE6118-2437-4B30-8E3C-4D2BE6020583}" type="datetimeFigureOut">
               <a:rPr lang="en-US" dirty="0"/>
-              <a:t>2/13/2025</a:t>
             </a:fld>
             <a:endParaRPr lang="en-US" dirty="0"/>
           </a:p>
@@ -4049,7 +4048,6 @@
           <a:p>
             <a:fld id="{69E57DC2-970A-4B3E-BB1C-7A09969E49DF}" type="slidenum">
               <a:rPr lang="en-US" dirty="0"/>
-              <a:t>‹Nº›</a:t>
             </a:fld>
             <a:endParaRPr lang="en-US" dirty="0"/>
           </a:p>
@@ -4064,7 +4062,7 @@
 </file>
 
 <file path=ppt/slideLayouts/slideLayout3.xml><?xml version="1.0" encoding="utf-8"?>
-<p:sldLayout xmlns:a="http://schemas.openxmlformats.org/drawingml/2006/main" xmlns:r="http://schemas.openxmlformats.org/officeDocument/2006/relationships" xmlns:p="http://schemas.openxmlformats.org/presentationml/2006/main" showMasterSp="0" type="secHead" preserve="1">
+<p:sldLayout xmlns:a="http://schemas.openxmlformats.org/drawingml/2006/main" xmlns:r="http://schemas.openxmlformats.org/officeDocument/2006/relationships" xmlns:p="http://schemas.openxmlformats.org/presentationml/2006/main" type="secHead" preserve="1" showMasterSp="0">
   <p:cSld name="Encabezado de sección">
     <p:bg>
       <p:bgRef idx="1001">
@@ -4130,7 +4128,7 @@
             <a:spLocks noGrp="1"/>
           </p:cNvSpPr>
           <p:nvPr>
-            <p:ph type="body" idx="1"/>
+            <p:ph type="body" idx="1" hasCustomPrompt="1"/>
           </p:nvPr>
         </p:nvSpPr>
         <p:spPr>
@@ -4246,6 +4244,7 @@
               <a:rPr lang="es-ES"/>
               <a:t>Haga clic para modificar los estilos de texto del patrón</a:t>
             </a:r>
+            <a:endParaRPr lang="es-ES"/>
           </a:p>
         </p:txBody>
       </p:sp>
@@ -4279,8 +4278,6 @@
           <a:p>
             <a:fld id="{87DE6118-2437-4B30-8E3C-4D2BE6020583}" type="datetimeFigureOut">
               <a:rPr lang="en-US" dirty="0"/>
-              <a:pPr/>
-              <a:t>2/13/2025</a:t>
             </a:fld>
             <a:endParaRPr lang="en-US" dirty="0"/>
           </a:p>
@@ -4348,8 +4345,6 @@
           <a:p>
             <a:fld id="{69E57DC2-970A-4B3E-BB1C-7A09969E49DF}" type="slidenum">
               <a:rPr lang="en-US" dirty="0"/>
-              <a:pPr/>
-              <a:t>‹Nº›</a:t>
             </a:fld>
             <a:endParaRPr lang="en-US" dirty="0"/>
           </a:p>
@@ -4406,8 +4401,6 @@
             <a:noFill/>
             <a:prstDash val="solid"/>
             <a:round/>
-            <a:headEnd/>
-            <a:tailEnd/>
           </a:ln>
         </p:spPr>
       </p:sp>
@@ -4474,7 +4467,7 @@
             <a:spLocks noGrp="1"/>
           </p:cNvSpPr>
           <p:nvPr>
-            <p:ph sz="half" idx="1"/>
+            <p:ph sz="half" idx="1" hasCustomPrompt="1"/>
           </p:nvPr>
         </p:nvSpPr>
         <p:spPr>
@@ -4528,6 +4521,7 @@
               <a:rPr lang="es-ES"/>
               <a:t>Haga clic para modificar los estilos de texto del patrón</a:t>
             </a:r>
+            <a:endParaRPr lang="es-ES"/>
           </a:p>
           <a:p>
             <a:pPr lvl="1"/>
@@ -4535,6 +4529,7 @@
               <a:rPr lang="es-ES"/>
               <a:t>Segundo nivel</a:t>
             </a:r>
+            <a:endParaRPr lang="es-ES"/>
           </a:p>
           <a:p>
             <a:pPr lvl="2"/>
@@ -4542,6 +4537,7 @@
               <a:rPr lang="es-ES"/>
               <a:t>Tercer nivel</a:t>
             </a:r>
+            <a:endParaRPr lang="es-ES"/>
           </a:p>
           <a:p>
             <a:pPr lvl="3"/>
@@ -4549,6 +4545,7 @@
               <a:rPr lang="es-ES"/>
               <a:t>Cuarto nivel</a:t>
             </a:r>
+            <a:endParaRPr lang="es-ES"/>
           </a:p>
           <a:p>
             <a:pPr lvl="4"/>
@@ -4567,7 +4564,7 @@
             <a:spLocks noGrp="1"/>
           </p:cNvSpPr>
           <p:nvPr>
-            <p:ph sz="half" idx="2"/>
+            <p:ph sz="half" idx="2" hasCustomPrompt="1"/>
           </p:nvPr>
         </p:nvSpPr>
         <p:spPr>
@@ -4621,6 +4618,7 @@
               <a:rPr lang="es-ES"/>
               <a:t>Haga clic para modificar los estilos de texto del patrón</a:t>
             </a:r>
+            <a:endParaRPr lang="es-ES"/>
           </a:p>
           <a:p>
             <a:pPr lvl="1"/>
@@ -4628,6 +4626,7 @@
               <a:rPr lang="es-ES"/>
               <a:t>Segundo nivel</a:t>
             </a:r>
+            <a:endParaRPr lang="es-ES"/>
           </a:p>
           <a:p>
             <a:pPr lvl="2"/>
@@ -4635,6 +4634,7 @@
               <a:rPr lang="es-ES"/>
               <a:t>Tercer nivel</a:t>
             </a:r>
+            <a:endParaRPr lang="es-ES"/>
           </a:p>
           <a:p>
             <a:pPr lvl="3"/>
@@ -4642,6 +4642,7 @@
               <a:rPr lang="es-ES"/>
               <a:t>Cuarto nivel</a:t>
             </a:r>
+            <a:endParaRPr lang="es-ES"/>
           </a:p>
           <a:p>
             <a:pPr lvl="4"/>
@@ -4670,7 +4671,6 @@
           <a:p>
             <a:fld id="{87DE6118-2437-4B30-8E3C-4D2BE6020583}" type="datetimeFigureOut">
               <a:rPr lang="en-US" dirty="0"/>
-              <a:t>2/13/2025</a:t>
             </a:fld>
             <a:endParaRPr lang="en-US" dirty="0"/>
           </a:p>
@@ -4712,7 +4712,6 @@
           <a:p>
             <a:fld id="{69E57DC2-970A-4B3E-BB1C-7A09969E49DF}" type="slidenum">
               <a:rPr lang="en-US" dirty="0"/>
-              <a:t>‹Nº›</a:t>
             </a:fld>
             <a:endParaRPr lang="en-US" dirty="0"/>
           </a:p>
@@ -4786,7 +4785,7 @@
             <a:spLocks noGrp="1"/>
           </p:cNvSpPr>
           <p:nvPr>
-            <p:ph type="body" idx="1"/>
+            <p:ph type="body" idx="1" hasCustomPrompt="1"/>
           </p:nvPr>
         </p:nvSpPr>
         <p:spPr>
@@ -4856,6 +4855,7 @@
               <a:rPr lang="es-ES"/>
               <a:t>Haga clic para modificar los estilos de texto del patrón</a:t>
             </a:r>
+            <a:endParaRPr lang="es-ES"/>
           </a:p>
         </p:txBody>
       </p:sp>
@@ -4866,7 +4866,7 @@
             <a:spLocks noGrp="1"/>
           </p:cNvSpPr>
           <p:nvPr>
-            <p:ph sz="half" idx="2"/>
+            <p:ph sz="half" idx="2" hasCustomPrompt="1"/>
           </p:nvPr>
         </p:nvSpPr>
         <p:spPr>
@@ -4920,6 +4920,7 @@
               <a:rPr lang="es-ES"/>
               <a:t>Haga clic para modificar los estilos de texto del patrón</a:t>
             </a:r>
+            <a:endParaRPr lang="es-ES"/>
           </a:p>
           <a:p>
             <a:pPr lvl="1"/>
@@ -4927,6 +4928,7 @@
               <a:rPr lang="es-ES"/>
               <a:t>Segundo nivel</a:t>
             </a:r>
+            <a:endParaRPr lang="es-ES"/>
           </a:p>
           <a:p>
             <a:pPr lvl="2"/>
@@ -4934,6 +4936,7 @@
               <a:rPr lang="es-ES"/>
               <a:t>Tercer nivel</a:t>
             </a:r>
+            <a:endParaRPr lang="es-ES"/>
           </a:p>
           <a:p>
             <a:pPr lvl="3"/>
@@ -4941,6 +4944,7 @@
               <a:rPr lang="es-ES"/>
               <a:t>Cuarto nivel</a:t>
             </a:r>
+            <a:endParaRPr lang="es-ES"/>
           </a:p>
           <a:p>
             <a:pPr lvl="4"/>
@@ -4959,7 +4963,7 @@
             <a:spLocks noGrp="1"/>
           </p:cNvSpPr>
           <p:nvPr>
-            <p:ph type="body" sz="quarter" idx="3"/>
+            <p:ph type="body" sz="quarter" idx="3" hasCustomPrompt="1"/>
           </p:nvPr>
         </p:nvSpPr>
         <p:spPr>
@@ -5029,6 +5033,7 @@
               <a:rPr lang="es-ES"/>
               <a:t>Haga clic para modificar los estilos de texto del patrón</a:t>
             </a:r>
+            <a:endParaRPr lang="es-ES"/>
           </a:p>
         </p:txBody>
       </p:sp>
@@ -5039,7 +5044,7 @@
             <a:spLocks noGrp="1"/>
           </p:cNvSpPr>
           <p:nvPr>
-            <p:ph sz="quarter" idx="4"/>
+            <p:ph sz="quarter" idx="4" hasCustomPrompt="1"/>
           </p:nvPr>
         </p:nvSpPr>
         <p:spPr>
@@ -5093,6 +5098,7 @@
               <a:rPr lang="es-ES"/>
               <a:t>Haga clic para modificar los estilos de texto del patrón</a:t>
             </a:r>
+            <a:endParaRPr lang="es-ES"/>
           </a:p>
           <a:p>
             <a:pPr lvl="1"/>
@@ -5100,6 +5106,7 @@
               <a:rPr lang="es-ES"/>
               <a:t>Segundo nivel</a:t>
             </a:r>
+            <a:endParaRPr lang="es-ES"/>
           </a:p>
           <a:p>
             <a:pPr lvl="2"/>
@@ -5107,6 +5114,7 @@
               <a:rPr lang="es-ES"/>
               <a:t>Tercer nivel</a:t>
             </a:r>
+            <a:endParaRPr lang="es-ES"/>
           </a:p>
           <a:p>
             <a:pPr lvl="3"/>
@@ -5114,6 +5122,7 @@
               <a:rPr lang="es-ES"/>
               <a:t>Cuarto nivel</a:t>
             </a:r>
+            <a:endParaRPr lang="es-ES"/>
           </a:p>
           <a:p>
             <a:pPr lvl="4"/>
@@ -5142,7 +5151,6 @@
           <a:p>
             <a:fld id="{87DE6118-2437-4B30-8E3C-4D2BE6020583}" type="datetimeFigureOut">
               <a:rPr lang="en-US" dirty="0"/>
-              <a:t>2/13/2025</a:t>
             </a:fld>
             <a:endParaRPr lang="en-US" dirty="0"/>
           </a:p>
@@ -5184,7 +5192,6 @@
           <a:p>
             <a:fld id="{69E57DC2-970A-4B3E-BB1C-7A09969E49DF}" type="slidenum">
               <a:rPr lang="en-US" dirty="0"/>
-              <a:t>‹Nº›</a:t>
             </a:fld>
             <a:endParaRPr lang="en-US" dirty="0"/>
           </a:p>
@@ -5255,7 +5262,6 @@
           <a:p>
             <a:fld id="{87DE6118-2437-4B30-8E3C-4D2BE6020583}" type="datetimeFigureOut">
               <a:rPr lang="en-US" dirty="0"/>
-              <a:t>2/13/2025</a:t>
             </a:fld>
             <a:endParaRPr lang="en-US" dirty="0"/>
           </a:p>
@@ -5297,7 +5303,6 @@
           <a:p>
             <a:fld id="{69E57DC2-970A-4B3E-BB1C-7A09969E49DF}" type="slidenum">
               <a:rPr lang="en-US" dirty="0"/>
-              <a:t>‹Nº›</a:t>
             </a:fld>
             <a:endParaRPr lang="en-US" dirty="0"/>
           </a:p>
@@ -5345,7 +5350,6 @@
           <a:p>
             <a:fld id="{87DE6118-2437-4B30-8E3C-4D2BE6020583}" type="datetimeFigureOut">
               <a:rPr lang="en-US" dirty="0"/>
-              <a:t>2/13/2025</a:t>
             </a:fld>
             <a:endParaRPr lang="en-US" dirty="0"/>
           </a:p>
@@ -5387,7 +5391,6 @@
           <a:p>
             <a:fld id="{69E57DC2-970A-4B3E-BB1C-7A09969E49DF}" type="slidenum">
               <a:rPr lang="en-US" dirty="0"/>
-              <a:t>‹Nº›</a:t>
             </a:fld>
             <a:endParaRPr lang="en-US" dirty="0"/>
           </a:p>
@@ -5402,7 +5405,7 @@
 </file>
 
 <file path=ppt/slideLayouts/slideLayout8.xml><?xml version="1.0" encoding="utf-8"?>
-<p:sldLayout xmlns:a="http://schemas.openxmlformats.org/drawingml/2006/main" xmlns:r="http://schemas.openxmlformats.org/officeDocument/2006/relationships" xmlns:p="http://schemas.openxmlformats.org/presentationml/2006/main" showMasterSp="0" type="objTx" preserve="1">
+<p:sldLayout xmlns:a="http://schemas.openxmlformats.org/drawingml/2006/main" xmlns:r="http://schemas.openxmlformats.org/officeDocument/2006/relationships" xmlns:p="http://schemas.openxmlformats.org/presentationml/2006/main" type="objTx" preserve="1" showMasterSp="0">
   <p:cSld name="Contenido con título">
     <p:spTree>
       <p:nvGrpSpPr>
@@ -5504,7 +5507,7 @@
             <a:spLocks noGrp="1"/>
           </p:cNvSpPr>
           <p:nvPr>
-            <p:ph idx="1"/>
+            <p:ph idx="1" hasCustomPrompt="1"/>
           </p:nvPr>
         </p:nvSpPr>
         <p:spPr>
@@ -5550,6 +5553,7 @@
               <a:rPr lang="es-ES"/>
               <a:t>Haga clic para modificar los estilos de texto del patrón</a:t>
             </a:r>
+            <a:endParaRPr lang="es-ES"/>
           </a:p>
           <a:p>
             <a:pPr lvl="1"/>
@@ -5557,6 +5561,7 @@
               <a:rPr lang="es-ES"/>
               <a:t>Segundo nivel</a:t>
             </a:r>
+            <a:endParaRPr lang="es-ES"/>
           </a:p>
           <a:p>
             <a:pPr lvl="2"/>
@@ -5564,6 +5569,7 @@
               <a:rPr lang="es-ES"/>
               <a:t>Tercer nivel</a:t>
             </a:r>
+            <a:endParaRPr lang="es-ES"/>
           </a:p>
           <a:p>
             <a:pPr lvl="3"/>
@@ -5571,6 +5577,7 @@
               <a:rPr lang="es-ES"/>
               <a:t>Cuarto nivel</a:t>
             </a:r>
+            <a:endParaRPr lang="es-ES"/>
           </a:p>
           <a:p>
             <a:pPr lvl="4"/>
@@ -5589,7 +5596,7 @@
             <a:spLocks noGrp="1"/>
           </p:cNvSpPr>
           <p:nvPr>
-            <p:ph type="body" sz="half" idx="2"/>
+            <p:ph type="body" sz="half" idx="2" hasCustomPrompt="1"/>
           </p:nvPr>
         </p:nvSpPr>
         <p:spPr>
@@ -5653,6 +5660,7 @@
               <a:rPr lang="es-ES"/>
               <a:t>Haga clic para modificar los estilos de texto del patrón</a:t>
             </a:r>
+            <a:endParaRPr lang="es-ES"/>
           </a:p>
         </p:txBody>
       </p:sp>
@@ -5686,8 +5694,6 @@
           <a:p>
             <a:fld id="{87DE6118-2437-4B30-8E3C-4D2BE6020583}" type="datetimeFigureOut">
               <a:rPr lang="en-US" dirty="0"/>
-              <a:pPr/>
-              <a:t>2/13/2025</a:t>
             </a:fld>
             <a:endParaRPr lang="en-US" dirty="0"/>
           </a:p>
@@ -5755,8 +5761,6 @@
           <a:p>
             <a:fld id="{69E57DC2-970A-4B3E-BB1C-7A09969E49DF}" type="slidenum">
               <a:rPr lang="en-US" dirty="0"/>
-              <a:pPr/>
-              <a:t>‹Nº›</a:t>
             </a:fld>
             <a:endParaRPr lang="en-US" dirty="0"/>
           </a:p>
@@ -5809,7 +5813,7 @@
 </file>
 
 <file path=ppt/slideLayouts/slideLayout9.xml><?xml version="1.0" encoding="utf-8"?>
-<p:sldLayout xmlns:a="http://schemas.openxmlformats.org/drawingml/2006/main" xmlns:r="http://schemas.openxmlformats.org/officeDocument/2006/relationships" xmlns:p="http://schemas.openxmlformats.org/presentationml/2006/main" showMasterSp="0" type="picTx" preserve="1">
+<p:sldLayout xmlns:a="http://schemas.openxmlformats.org/drawingml/2006/main" xmlns:r="http://schemas.openxmlformats.org/officeDocument/2006/relationships" xmlns:p="http://schemas.openxmlformats.org/presentationml/2006/main" type="picTx" preserve="1" showMasterSp="0">
   <p:cSld name="Imagen con título">
     <p:spTree>
       <p:nvGrpSpPr>
@@ -5974,7 +5978,7 @@
             <a:spLocks noGrp="1"/>
           </p:cNvSpPr>
           <p:nvPr>
-            <p:ph type="body" sz="half" idx="2"/>
+            <p:ph type="body" sz="half" idx="2" hasCustomPrompt="1"/>
           </p:nvPr>
         </p:nvSpPr>
         <p:spPr>
@@ -6038,6 +6042,7 @@
               <a:rPr lang="es-ES"/>
               <a:t>Haga clic para modificar los estilos de texto del patrón</a:t>
             </a:r>
+            <a:endParaRPr lang="es-ES"/>
           </a:p>
         </p:txBody>
       </p:sp>
@@ -6071,8 +6076,6 @@
           <a:p>
             <a:fld id="{87DE6118-2437-4B30-8E3C-4D2BE6020583}" type="datetimeFigureOut">
               <a:rPr lang="en-US" dirty="0"/>
-              <a:pPr/>
-              <a:t>2/13/2025</a:t>
             </a:fld>
             <a:endParaRPr lang="en-US" dirty="0"/>
           </a:p>
@@ -6140,8 +6143,6 @@
           <a:p>
             <a:fld id="{69E57DC2-970A-4B3E-BB1C-7A09969E49DF}" type="slidenum">
               <a:rPr lang="en-US" dirty="0"/>
-              <a:pPr/>
-              <a:t>‹Nº›</a:t>
             </a:fld>
             <a:endParaRPr lang="en-US" dirty="0"/>
           </a:p>
@@ -6281,6 +6282,7 @@
               <a:rPr lang="es-ES"/>
               <a:t>Haga clic para modificar los estilos de texto del patrón</a:t>
             </a:r>
+            <a:endParaRPr lang="es-ES"/>
           </a:p>
           <a:p>
             <a:pPr lvl="1"/>
@@ -6288,6 +6290,7 @@
               <a:rPr lang="es-ES"/>
               <a:t>Segundo nivel</a:t>
             </a:r>
+            <a:endParaRPr lang="es-ES"/>
           </a:p>
           <a:p>
             <a:pPr lvl="2"/>
@@ -6295,6 +6298,7 @@
               <a:rPr lang="es-ES"/>
               <a:t>Tercer nivel</a:t>
             </a:r>
+            <a:endParaRPr lang="es-ES"/>
           </a:p>
           <a:p>
             <a:pPr lvl="3"/>
@@ -6302,6 +6306,7 @@
               <a:rPr lang="es-ES"/>
               <a:t>Cuarto nivel</a:t>
             </a:r>
+            <a:endParaRPr lang="es-ES"/>
           </a:p>
           <a:p>
             <a:pPr lvl="4"/>
@@ -6346,8 +6351,6 @@
           <a:p>
             <a:fld id="{87DE6118-2437-4B30-8E3C-4D2BE6020583}" type="datetimeFigureOut">
               <a:rPr lang="en-US" dirty="0"/>
-              <a:pPr/>
-              <a:t>2/13/2025</a:t>
             </a:fld>
             <a:endParaRPr lang="en-US" dirty="0"/>
           </a:p>
@@ -6421,8 +6424,6 @@
           <a:p>
             <a:fld id="{69E57DC2-970A-4B3E-BB1C-7A09969E49DF}" type="slidenum">
               <a:rPr lang="en-US" dirty="0"/>
-              <a:pPr/>
-              <a:t>‹Nº›</a:t>
             </a:fld>
             <a:endParaRPr lang="en-US" dirty="0"/>
           </a:p>
@@ -6503,7 +6504,7 @@
       </a:lvl1pPr>
     </p:titleStyle>
     <p:bodyStyle>
-      <a:lvl1pPr marL="384048" indent="-384048" algn="l" defTabSz="914400" rtl="0" eaLnBrk="1" latinLnBrk="0" hangingPunct="1">
+      <a:lvl1pPr marL="384175" indent="-384175" algn="l" defTabSz="914400" rtl="0" eaLnBrk="1" latinLnBrk="0" hangingPunct="1">
         <a:lnSpc>
           <a:spcPct val="94000"/>
         </a:lnSpc>
@@ -6524,7 +6525,7 @@
           <a:cs typeface="+mn-cs"/>
         </a:defRPr>
       </a:lvl1pPr>
-      <a:lvl2pPr marL="914400" indent="-384048" algn="l" defTabSz="914400" rtl="0" eaLnBrk="1" latinLnBrk="0" hangingPunct="1">
+      <a:lvl2pPr marL="914400" indent="-384175" algn="l" defTabSz="914400" rtl="0" eaLnBrk="1" latinLnBrk="0" hangingPunct="1">
         <a:lnSpc>
           <a:spcPct val="94000"/>
         </a:lnSpc>
@@ -6545,7 +6546,7 @@
           <a:cs typeface="+mn-cs"/>
         </a:defRPr>
       </a:lvl2pPr>
-      <a:lvl3pPr marL="1371600" indent="-384048" algn="l" defTabSz="914400" rtl="0" eaLnBrk="1" latinLnBrk="0" hangingPunct="1">
+      <a:lvl3pPr marL="1371600" indent="-384175" algn="l" defTabSz="914400" rtl="0" eaLnBrk="1" latinLnBrk="0" hangingPunct="1">
         <a:lnSpc>
           <a:spcPct val="94000"/>
         </a:lnSpc>
@@ -6566,7 +6567,7 @@
           <a:cs typeface="+mn-cs"/>
         </a:defRPr>
       </a:lvl3pPr>
-      <a:lvl4pPr marL="1828800" indent="-384048" algn="l" defTabSz="914400" rtl="0" eaLnBrk="1" latinLnBrk="0" hangingPunct="1">
+      <a:lvl4pPr marL="1828800" indent="-384175" algn="l" defTabSz="914400" rtl="0" eaLnBrk="1" latinLnBrk="0" hangingPunct="1">
         <a:lnSpc>
           <a:spcPct val="94000"/>
         </a:lnSpc>
@@ -6587,7 +6588,7 @@
           <a:cs typeface="+mn-cs"/>
         </a:defRPr>
       </a:lvl4pPr>
-      <a:lvl5pPr marL="2286000" indent="-384048" algn="l" defTabSz="914400" rtl="0" eaLnBrk="1" latinLnBrk="0" hangingPunct="1">
+      <a:lvl5pPr marL="2286000" indent="-384175" algn="l" defTabSz="914400" rtl="0" eaLnBrk="1" latinLnBrk="0" hangingPunct="1">
         <a:lnSpc>
           <a:spcPct val="94000"/>
         </a:lnSpc>
@@ -6608,7 +6609,7 @@
           <a:cs typeface="+mn-cs"/>
         </a:defRPr>
       </a:lvl5pPr>
-      <a:lvl6pPr marL="2743200" indent="-384048" algn="l" defTabSz="914400" rtl="0" eaLnBrk="1" latinLnBrk="0" hangingPunct="1">
+      <a:lvl6pPr marL="2743200" indent="-384175" algn="l" defTabSz="914400" rtl="0" eaLnBrk="1" latinLnBrk="0" hangingPunct="1">
         <a:lnSpc>
           <a:spcPct val="94000"/>
         </a:lnSpc>
@@ -6629,7 +6630,7 @@
           <a:cs typeface="+mn-cs"/>
         </a:defRPr>
       </a:lvl6pPr>
-      <a:lvl7pPr marL="3200400" indent="-384048" algn="l" defTabSz="914400" rtl="0" eaLnBrk="1" latinLnBrk="0" hangingPunct="1">
+      <a:lvl7pPr marL="3200400" indent="-384175" algn="l" defTabSz="914400" rtl="0" eaLnBrk="1" latinLnBrk="0" hangingPunct="1">
         <a:lnSpc>
           <a:spcPct val="94000"/>
         </a:lnSpc>
@@ -6650,7 +6651,7 @@
           <a:cs typeface="+mn-cs"/>
         </a:defRPr>
       </a:lvl7pPr>
-      <a:lvl8pPr marL="3657600" indent="-384048" algn="l" defTabSz="914400" rtl="0" eaLnBrk="1" latinLnBrk="0" hangingPunct="1">
+      <a:lvl8pPr marL="3657600" indent="-384175" algn="l" defTabSz="914400" rtl="0" eaLnBrk="1" latinLnBrk="0" hangingPunct="1">
         <a:lnSpc>
           <a:spcPct val="94000"/>
         </a:lnSpc>
@@ -6671,7 +6672,7 @@
           <a:cs typeface="+mn-cs"/>
         </a:defRPr>
       </a:lvl8pPr>
-      <a:lvl9pPr marL="4114800" indent="-384048" algn="l" defTabSz="914400" rtl="0" eaLnBrk="1" latinLnBrk="0" hangingPunct="1">
+      <a:lvl9pPr marL="4114800" indent="-384175" algn="l" defTabSz="914400" rtl="0" eaLnBrk="1" latinLnBrk="0" hangingPunct="1">
         <a:lnSpc>
           <a:spcPct val="94000"/>
         </a:lnSpc>
@@ -6789,52 +6790,6 @@
       </a:lvl9pPr>
     </p:otherStyle>
   </p:txStyles>
-  <p:extLst>
-    <p:ext uri="{27BBF7A9-308A-43DC-89C8-2F10F3537804}">
-      <p15:sldGuideLst xmlns:p15="http://schemas.microsoft.com/office/powerpoint/2012/main">
-        <p15:guide id="3" orient="horz" pos="1368">
-          <p15:clr>
-            <a:srgbClr val="F26B43"/>
-          </p15:clr>
-        </p15:guide>
-        <p15:guide id="4" orient="horz" pos="1440">
-          <p15:clr>
-            <a:srgbClr val="F26B43"/>
-          </p15:clr>
-        </p15:guide>
-        <p15:guide id="6" orient="horz" pos="3696">
-          <p15:clr>
-            <a:srgbClr val="F26B43"/>
-          </p15:clr>
-        </p15:guide>
-        <p15:guide id="7" orient="horz" pos="432">
-          <p15:clr>
-            <a:srgbClr val="F26B43"/>
-          </p15:clr>
-        </p15:guide>
-        <p15:guide id="8" orient="horz" pos="1512">
-          <p15:clr>
-            <a:srgbClr val="F26B43"/>
-          </p15:clr>
-        </p15:guide>
-        <p15:guide id="9" pos="6912">
-          <p15:clr>
-            <a:srgbClr val="F26B43"/>
-          </p15:clr>
-        </p15:guide>
-        <p15:guide id="10" pos="936">
-          <p15:clr>
-            <a:srgbClr val="F26B43"/>
-          </p15:clr>
-        </p15:guide>
-        <p15:guide id="11" pos="864">
-          <p15:clr>
-            <a:srgbClr val="F26B43"/>
-          </p15:clr>
-        </p15:guide>
-      </p15:sldGuideLst>
-    </p:ext>
-  </p:extLst>
 </p:sldMaster>
 </file>
 
@@ -6857,13 +6812,7 @@
       </p:grpSpPr>
       <p:sp>
         <p:nvSpPr>
-          <p:cNvPr id="2" name="Título 1">
-            <a:extLst>
-              <a:ext uri="{FF2B5EF4-FFF2-40B4-BE49-F238E27FC236}">
-                <a16:creationId xmlns:a16="http://schemas.microsoft.com/office/drawing/2014/main" id="{B5D9EA21-8FB8-3E3B-D1CF-A2FAB3C96A69}"/>
-              </a:ext>
-            </a:extLst>
-          </p:cNvPr>
+          <p:cNvPr id="2" name="Título 1"/>
           <p:cNvSpPr>
             <a:spLocks noGrp="1"/>
           </p:cNvSpPr>
@@ -6886,13 +6835,7 @@
       </p:sp>
       <p:sp>
         <p:nvSpPr>
-          <p:cNvPr id="3" name="Subtítulo 2">
-            <a:extLst>
-              <a:ext uri="{FF2B5EF4-FFF2-40B4-BE49-F238E27FC236}">
-                <a16:creationId xmlns:a16="http://schemas.microsoft.com/office/drawing/2014/main" id="{EE2A603B-0C0C-F68D-A055-DD25D3AB098B}"/>
-              </a:ext>
-            </a:extLst>
-          </p:cNvPr>
+          <p:cNvPr id="3" name="Subtítulo 2"/>
           <p:cNvSpPr>
             <a:spLocks noGrp="1"/>
           </p:cNvSpPr>
@@ -6911,33 +6854,32 @@
               <a:rPr lang="es-CO" dirty="0"/>
               <a:t>Kevin Aroca</a:t>
             </a:r>
+            <a:endParaRPr lang="es-CO" dirty="0"/>
           </a:p>
           <a:p>
             <a:r>
               <a:rPr lang="es-CO" dirty="0"/>
               <a:t>Sebastián Rodríguez</a:t>
             </a:r>
+            <a:endParaRPr lang="es-CO" dirty="0"/>
           </a:p>
           <a:p>
             <a:r>
               <a:rPr lang="es-CO" dirty="0"/>
               <a:t>Gerson Corredor</a:t>
             </a:r>
+            <a:endParaRPr lang="es-CO" dirty="0"/>
           </a:p>
           <a:p>
             <a:r>
               <a:rPr lang="es-CO" dirty="0"/>
               <a:t>Samuel Prieto</a:t>
             </a:r>
+            <a:endParaRPr lang="es-CO" dirty="0"/>
           </a:p>
         </p:txBody>
       </p:sp>
     </p:spTree>
-    <p:extLst>
-      <p:ext uri="{BB962C8B-B14F-4D97-AF65-F5344CB8AC3E}">
-        <p14:creationId xmlns:p14="http://schemas.microsoft.com/office/powerpoint/2010/main" val="266526994"/>
-      </p:ext>
-    </p:extLst>
   </p:cSld>
   <p:clrMapOvr>
     <a:masterClrMapping/>
@@ -6972,13 +6914,7 @@
       </p:grpSpPr>
       <p:sp>
         <p:nvSpPr>
-          <p:cNvPr id="2" name="Título 1">
-            <a:extLst>
-              <a:ext uri="{FF2B5EF4-FFF2-40B4-BE49-F238E27FC236}">
-                <a16:creationId xmlns:a16="http://schemas.microsoft.com/office/drawing/2014/main" id="{888DD4DC-0D67-745F-CFEC-2593D32C3DFF}"/>
-              </a:ext>
-            </a:extLst>
-          </p:cNvPr>
+          <p:cNvPr id="2" name="Título 1"/>
           <p:cNvSpPr>
             <a:spLocks noGrp="1"/>
           </p:cNvSpPr>
@@ -7002,21 +6938,14 @@
               <a:rPr lang="es-CO" dirty="0"/>
               <a:t>Tabla de contenido</a:t>
             </a:r>
+            <a:endParaRPr lang="es-CO" dirty="0"/>
           </a:p>
         </p:txBody>
       </p:sp>
       <p:sp>
         <p:nvSpPr>
-          <p:cNvPr id="5" name="Marcador de contenido 2">
-            <a:extLst>
-              <a:ext uri="{FF2B5EF4-FFF2-40B4-BE49-F238E27FC236}">
-                <a16:creationId xmlns:a16="http://schemas.microsoft.com/office/drawing/2014/main" id="{0E9BFAA2-C636-E331-8837-45A718F4C8AA}"/>
-              </a:ext>
-            </a:extLst>
-          </p:cNvPr>
-          <p:cNvSpPr txBox="1">
-            <a:spLocks/>
-          </p:cNvSpPr>
+          <p:cNvPr id="5" name="Marcador de contenido 2"/>
+          <p:cNvSpPr txBox="1"/>
           <p:nvPr/>
         </p:nvSpPr>
         <p:spPr>
@@ -7033,7 +6962,7 @@
             <a:normAutofit/>
           </a:bodyPr>
           <a:lstStyle>
-            <a:lvl1pPr marL="384048" indent="-384048" algn="l" defTabSz="914400" rtl="0" eaLnBrk="1" latinLnBrk="0" hangingPunct="1">
+            <a:lvl1pPr marL="384175" indent="-384175" algn="l" defTabSz="914400" rtl="0" eaLnBrk="1" latinLnBrk="0" hangingPunct="1">
               <a:lnSpc>
                 <a:spcPct val="94000"/>
               </a:lnSpc>
@@ -7054,7 +6983,7 @@
                 <a:cs typeface="+mn-cs"/>
               </a:defRPr>
             </a:lvl1pPr>
-            <a:lvl2pPr marL="914400" indent="-384048" algn="l" defTabSz="914400" rtl="0" eaLnBrk="1" latinLnBrk="0" hangingPunct="1">
+            <a:lvl2pPr marL="914400" indent="-384175" algn="l" defTabSz="914400" rtl="0" eaLnBrk="1" latinLnBrk="0" hangingPunct="1">
               <a:lnSpc>
                 <a:spcPct val="94000"/>
               </a:lnSpc>
@@ -7075,7 +7004,7 @@
                 <a:cs typeface="+mn-cs"/>
               </a:defRPr>
             </a:lvl2pPr>
-            <a:lvl3pPr marL="1371600" indent="-384048" algn="l" defTabSz="914400" rtl="0" eaLnBrk="1" latinLnBrk="0" hangingPunct="1">
+            <a:lvl3pPr marL="1371600" indent="-384175" algn="l" defTabSz="914400" rtl="0" eaLnBrk="1" latinLnBrk="0" hangingPunct="1">
               <a:lnSpc>
                 <a:spcPct val="94000"/>
               </a:lnSpc>
@@ -7096,7 +7025,7 @@
                 <a:cs typeface="+mn-cs"/>
               </a:defRPr>
             </a:lvl3pPr>
-            <a:lvl4pPr marL="1828800" indent="-384048" algn="l" defTabSz="914400" rtl="0" eaLnBrk="1" latinLnBrk="0" hangingPunct="1">
+            <a:lvl4pPr marL="1828800" indent="-384175" algn="l" defTabSz="914400" rtl="0" eaLnBrk="1" latinLnBrk="0" hangingPunct="1">
               <a:lnSpc>
                 <a:spcPct val="94000"/>
               </a:lnSpc>
@@ -7117,7 +7046,7 @@
                 <a:cs typeface="+mn-cs"/>
               </a:defRPr>
             </a:lvl4pPr>
-            <a:lvl5pPr marL="2286000" indent="-384048" algn="l" defTabSz="914400" rtl="0" eaLnBrk="1" latinLnBrk="0" hangingPunct="1">
+            <a:lvl5pPr marL="2286000" indent="-384175" algn="l" defTabSz="914400" rtl="0" eaLnBrk="1" latinLnBrk="0" hangingPunct="1">
               <a:lnSpc>
                 <a:spcPct val="94000"/>
               </a:lnSpc>
@@ -7138,7 +7067,7 @@
                 <a:cs typeface="+mn-cs"/>
               </a:defRPr>
             </a:lvl5pPr>
-            <a:lvl6pPr marL="2743200" indent="-384048" algn="l" defTabSz="914400" rtl="0" eaLnBrk="1" latinLnBrk="0" hangingPunct="1">
+            <a:lvl6pPr marL="2743200" indent="-384175" algn="l" defTabSz="914400" rtl="0" eaLnBrk="1" latinLnBrk="0" hangingPunct="1">
               <a:lnSpc>
                 <a:spcPct val="94000"/>
               </a:lnSpc>
@@ -7159,7 +7088,7 @@
                 <a:cs typeface="+mn-cs"/>
               </a:defRPr>
             </a:lvl6pPr>
-            <a:lvl7pPr marL="3200400" indent="-384048" algn="l" defTabSz="914400" rtl="0" eaLnBrk="1" latinLnBrk="0" hangingPunct="1">
+            <a:lvl7pPr marL="3200400" indent="-384175" algn="l" defTabSz="914400" rtl="0" eaLnBrk="1" latinLnBrk="0" hangingPunct="1">
               <a:lnSpc>
                 <a:spcPct val="94000"/>
               </a:lnSpc>
@@ -7180,7 +7109,7 @@
                 <a:cs typeface="+mn-cs"/>
               </a:defRPr>
             </a:lvl7pPr>
-            <a:lvl8pPr marL="3657600" indent="-384048" algn="l" defTabSz="914400" rtl="0" eaLnBrk="1" latinLnBrk="0" hangingPunct="1">
+            <a:lvl8pPr marL="3657600" indent="-384175" algn="l" defTabSz="914400" rtl="0" eaLnBrk="1" latinLnBrk="0" hangingPunct="1">
               <a:lnSpc>
                 <a:spcPct val="94000"/>
               </a:lnSpc>
@@ -7201,7 +7130,7 @@
                 <a:cs typeface="+mn-cs"/>
               </a:defRPr>
             </a:lvl8pPr>
-            <a:lvl9pPr marL="4114800" indent="-384048" algn="l" defTabSz="914400" rtl="0" eaLnBrk="1" latinLnBrk="0" hangingPunct="1">
+            <a:lvl9pPr marL="4114800" indent="-384175" algn="l" defTabSz="914400" rtl="0" eaLnBrk="1" latinLnBrk="0" hangingPunct="1">
               <a:lnSpc>
                 <a:spcPct val="94000"/>
               </a:lnSpc>
@@ -7234,23 +7163,12 @@
       </p:sp>
       <p:graphicFrame>
         <p:nvGraphicFramePr>
-          <p:cNvPr id="14" name="Marcador de contenido 2">
-            <a:extLst>
-              <a:ext uri="{FF2B5EF4-FFF2-40B4-BE49-F238E27FC236}">
-                <a16:creationId xmlns:a16="http://schemas.microsoft.com/office/drawing/2014/main" id="{CA39F64C-3963-A617-12C9-76499DCC6610}"/>
-              </a:ext>
-            </a:extLst>
-          </p:cNvPr>
+          <p:cNvPr id="14" name="Marcador de contenido 2"/>
           <p:cNvGraphicFramePr>
             <a:graphicFrameLocks noGrp="1"/>
           </p:cNvGraphicFramePr>
           <p:nvPr>
             <p:ph idx="1"/>
-            <p:extLst>
-              <p:ext uri="{D42A27DB-BD31-4B8C-83A1-F6EECF244321}">
-                <p14:modId xmlns:p14="http://schemas.microsoft.com/office/powerpoint/2010/main" val="92595026"/>
-              </p:ext>
-            </p:extLst>
           </p:nvPr>
         </p:nvGraphicFramePr>
         <p:xfrm>
@@ -7259,16 +7177,11 @@
         </p:xfrm>
         <a:graphic>
           <a:graphicData uri="http://schemas.openxmlformats.org/drawingml/2006/diagram">
-            <dgm:relIds xmlns:dgm="http://schemas.openxmlformats.org/drawingml/2006/diagram" xmlns:r="http://schemas.openxmlformats.org/officeDocument/2006/relationships" r:dm="rId2" r:lo="rId3" r:qs="rId4" r:cs="rId5"/>
+            <dgm:relIds xmlns:dgm="http://schemas.openxmlformats.org/drawingml/2006/diagram" xmlns:r="http://schemas.openxmlformats.org/officeDocument/2006/relationships" r:dm="rId1" r:lo="rId2" r:qs="rId3" r:cs="rId4"/>
           </a:graphicData>
         </a:graphic>
       </p:graphicFrame>
     </p:spTree>
-    <p:extLst>
-      <p:ext uri="{BB962C8B-B14F-4D97-AF65-F5344CB8AC3E}">
-        <p14:creationId xmlns:p14="http://schemas.microsoft.com/office/powerpoint/2010/main" val="2872568464"/>
-      </p:ext>
-    </p:extLst>
   </p:cSld>
   <p:clrMapOvr>
     <a:masterClrMapping/>
@@ -7295,13 +7208,7 @@
       </p:grpSpPr>
       <p:sp>
         <p:nvSpPr>
-          <p:cNvPr id="2" name="Título 1">
-            <a:extLst>
-              <a:ext uri="{FF2B5EF4-FFF2-40B4-BE49-F238E27FC236}">
-                <a16:creationId xmlns:a16="http://schemas.microsoft.com/office/drawing/2014/main" id="{CA9E3135-5DA3-4D4E-7630-6360BB16130B}"/>
-              </a:ext>
-            </a:extLst>
-          </p:cNvPr>
+          <p:cNvPr id="2" name="Título 1"/>
           <p:cNvSpPr>
             <a:spLocks noGrp="1"/>
           </p:cNvSpPr>
@@ -7332,13 +7239,7 @@
       </p:sp>
       <p:sp>
         <p:nvSpPr>
-          <p:cNvPr id="3" name="Subtítulo 2">
-            <a:extLst>
-              <a:ext uri="{FF2B5EF4-FFF2-40B4-BE49-F238E27FC236}">
-                <a16:creationId xmlns:a16="http://schemas.microsoft.com/office/drawing/2014/main" id="{374DF342-C286-411D-8BFB-09A0818741A2}"/>
-              </a:ext>
-            </a:extLst>
-          </p:cNvPr>
+          <p:cNvPr id="3" name="Subtítulo 2"/>
           <p:cNvSpPr>
             <a:spLocks noGrp="1"/>
           </p:cNvSpPr>
@@ -7378,11 +7279,6 @@
         </p:txBody>
       </p:sp>
     </p:spTree>
-    <p:extLst>
-      <p:ext uri="{BB962C8B-B14F-4D97-AF65-F5344CB8AC3E}">
-        <p14:creationId xmlns:p14="http://schemas.microsoft.com/office/powerpoint/2010/main" val="2295969736"/>
-      </p:ext>
-    </p:extLst>
   </p:cSld>
   <p:clrMapOvr>
     <a:masterClrMapping/>
@@ -7409,13 +7305,7 @@
       </p:grpSpPr>
       <p:sp>
         <p:nvSpPr>
-          <p:cNvPr id="2" name="Título 1">
-            <a:extLst>
-              <a:ext uri="{FF2B5EF4-FFF2-40B4-BE49-F238E27FC236}">
-                <a16:creationId xmlns:a16="http://schemas.microsoft.com/office/drawing/2014/main" id="{61364E2A-2665-CFEF-0139-7E579400011F}"/>
-              </a:ext>
-            </a:extLst>
-          </p:cNvPr>
+          <p:cNvPr id="2" name="Título 1"/>
           <p:cNvSpPr>
             <a:spLocks noGrp="1"/>
           </p:cNvSpPr>
@@ -7437,18 +7327,13 @@
               <a:rPr lang="es-CO" dirty="0"/>
               <a:t>Objetivo general</a:t>
             </a:r>
+            <a:endParaRPr lang="es-CO" dirty="0"/>
           </a:p>
         </p:txBody>
       </p:sp>
       <p:sp>
         <p:nvSpPr>
-          <p:cNvPr id="3" name="Subtítulo 2">
-            <a:extLst>
-              <a:ext uri="{FF2B5EF4-FFF2-40B4-BE49-F238E27FC236}">
-                <a16:creationId xmlns:a16="http://schemas.microsoft.com/office/drawing/2014/main" id="{FF25465E-638D-408F-1B60-53417210DA9B}"/>
-              </a:ext>
-            </a:extLst>
-          </p:cNvPr>
+          <p:cNvPr id="3" name="Subtítulo 2"/>
           <p:cNvSpPr>
             <a:spLocks noGrp="1"/>
           </p:cNvSpPr>
@@ -7494,11 +7379,6 @@
         </p:txBody>
       </p:sp>
     </p:spTree>
-    <p:extLst>
-      <p:ext uri="{BB962C8B-B14F-4D97-AF65-F5344CB8AC3E}">
-        <p14:creationId xmlns:p14="http://schemas.microsoft.com/office/powerpoint/2010/main" val="836445348"/>
-      </p:ext>
-    </p:extLst>
   </p:cSld>
   <p:clrMapOvr>
     <a:masterClrMapping/>
@@ -7511,13 +7391,7 @@
   <p:cSld>
     <p:spTree>
       <p:nvGrpSpPr>
-        <p:cNvPr id="1" name="">
-          <a:extLst>
-            <a:ext uri="{FF2B5EF4-FFF2-40B4-BE49-F238E27FC236}">
-              <a16:creationId xmlns:a16="http://schemas.microsoft.com/office/drawing/2014/main" id="{DF3E9467-026B-9600-DC7A-AB91C1AAC956}"/>
-            </a:ext>
-          </a:extLst>
-        </p:cNvPr>
+        <p:cNvPr id="1" name=""/>
         <p:cNvGrpSpPr/>
         <p:nvPr/>
       </p:nvGrpSpPr>
@@ -7531,13 +7405,7 @@
       </p:grpSpPr>
       <p:sp>
         <p:nvSpPr>
-          <p:cNvPr id="2" name="Título 1">
-            <a:extLst>
-              <a:ext uri="{FF2B5EF4-FFF2-40B4-BE49-F238E27FC236}">
-                <a16:creationId xmlns:a16="http://schemas.microsoft.com/office/drawing/2014/main" id="{D053C45D-292D-4F63-1CFC-BF6E558AA207}"/>
-              </a:ext>
-            </a:extLst>
-          </p:cNvPr>
+          <p:cNvPr id="2" name="Título 1"/>
           <p:cNvSpPr>
             <a:spLocks noGrp="1"/>
           </p:cNvSpPr>
@@ -7559,25 +7427,20 @@
               <a:rPr lang="es-CO" sz="5400" dirty="0"/>
               <a:t>Objetivos Específicos</a:t>
             </a:r>
+            <a:endParaRPr lang="es-CO" sz="5400" dirty="0"/>
           </a:p>
         </p:txBody>
       </p:sp>
       <p:sp>
         <p:nvSpPr>
-          <p:cNvPr id="4" name="Google Shape;193;g1f39dcf72fa_0_12">
-            <a:extLst>
-              <a:ext uri="{FF2B5EF4-FFF2-40B4-BE49-F238E27FC236}">
-                <a16:creationId xmlns:a16="http://schemas.microsoft.com/office/drawing/2014/main" id="{3510E8AE-87EF-BDF3-8F2D-7C6BB476D072}"/>
-              </a:ext>
-            </a:extLst>
-          </p:cNvPr>
+          <p:cNvPr id="4" name="Google Shape;193;g1f39dcf72fa_0_12"/>
           <p:cNvSpPr txBox="1"/>
           <p:nvPr/>
         </p:nvSpPr>
         <p:spPr>
           <a:xfrm>
             <a:off x="1527858" y="1305362"/>
-            <a:ext cx="7523544" cy="4247276"/>
+            <a:ext cx="7523544" cy="4244975"/>
           </a:xfrm>
           <a:prstGeom prst="rect">
             <a:avLst/>
@@ -7607,17 +7470,17 @@
                 <a:srgbClr val="000000"/>
               </a:buClr>
               <a:buSzPts val="2400"/>
-              <a:buFont typeface="Arial"/>
+              <a:buFont typeface="Arial" panose="020B0604020202020204"/>
               <a:buNone/>
             </a:pPr>
             <a:endParaRPr b="0" i="0" u="none" strike="noStrike" cap="none" dirty="0">
               <a:solidFill>
                 <a:schemeClr val="dk1"/>
               </a:solidFill>
-              <a:latin typeface="Arial"/>
-              <a:ea typeface="Arial"/>
-              <a:cs typeface="Arial"/>
-              <a:sym typeface="Arial"/>
+              <a:latin typeface="Arial" panose="020B0604020202020204"/>
+              <a:ea typeface="Arial" panose="020B0604020202020204"/>
+              <a:cs typeface="Arial" panose="020B0604020202020204"/>
+              <a:sym typeface="Arial" panose="020B0604020202020204"/>
             </a:endParaRPr>
           </a:p>
           <a:p>
@@ -7635,7 +7498,7 @@
                 <a:schemeClr val="dk1"/>
               </a:buClr>
               <a:buSzPts val="2400"/>
-              <a:buFont typeface="Arial"/>
+              <a:buFont typeface="Arial" panose="020B0604020202020204"/>
               <a:buChar char="-"/>
             </a:pPr>
             <a:r>
@@ -7643,13 +7506,22 @@
                 <a:solidFill>
                   <a:schemeClr val="dk1"/>
                 </a:solidFill>
-                <a:latin typeface="Arial"/>
-                <a:ea typeface="Arial"/>
-                <a:cs typeface="Arial"/>
-                <a:sym typeface="Arial"/>
+                <a:latin typeface="Arial" panose="020B0604020202020204"/>
+                <a:ea typeface="Arial" panose="020B0604020202020204"/>
+                <a:cs typeface="Arial" panose="020B0604020202020204"/>
+                <a:sym typeface="Arial" panose="020B0604020202020204"/>
               </a:rPr>
               <a:t>Desarrollar un apartado de citas para registrar encuentros y permitir su consulta, modificación en su estado y datos pertinentes.</a:t>
             </a:r>
+            <a:endParaRPr lang="es-CO" b="0" i="0" u="none" strike="noStrike" cap="none" dirty="0">
+              <a:solidFill>
+                <a:schemeClr val="dk1"/>
+              </a:solidFill>
+              <a:latin typeface="Arial" panose="020B0604020202020204"/>
+              <a:ea typeface="Arial" panose="020B0604020202020204"/>
+              <a:cs typeface="Arial" panose="020B0604020202020204"/>
+              <a:sym typeface="Arial" panose="020B0604020202020204"/>
+            </a:endParaRPr>
           </a:p>
           <a:p>
             <a:pPr marL="457200" marR="0" lvl="0" indent="-381000" algn="just" rtl="0">
@@ -7666,17 +7538,17 @@
                 <a:schemeClr val="dk1"/>
               </a:buClr>
               <a:buSzPts val="2400"/>
-              <a:buFont typeface="Arial"/>
+              <a:buFont typeface="Arial" panose="020B0604020202020204"/>
               <a:buChar char="-"/>
             </a:pPr>
             <a:endParaRPr lang="es-CO" b="0" i="0" u="none" strike="noStrike" cap="none" dirty="0">
               <a:solidFill>
                 <a:schemeClr val="dk1"/>
               </a:solidFill>
-              <a:latin typeface="Arial"/>
-              <a:ea typeface="Arial"/>
-              <a:cs typeface="Arial"/>
-              <a:sym typeface="Arial"/>
+              <a:latin typeface="Arial" panose="020B0604020202020204"/>
+              <a:ea typeface="Arial" panose="020B0604020202020204"/>
+              <a:cs typeface="Arial" panose="020B0604020202020204"/>
+              <a:sym typeface="Arial" panose="020B0604020202020204"/>
             </a:endParaRPr>
           </a:p>
           <a:p>
@@ -7694,7 +7566,7 @@
                 <a:schemeClr val="dk1"/>
               </a:buClr>
               <a:buSzPts val="2400"/>
-              <a:buFont typeface="Arial"/>
+              <a:buFont typeface="Arial" panose="020B0604020202020204"/>
               <a:buChar char="-"/>
             </a:pPr>
             <a:r>
@@ -7702,13 +7574,22 @@
                 <a:solidFill>
                   <a:schemeClr val="dk1"/>
                 </a:solidFill>
-                <a:latin typeface="Arial"/>
-                <a:ea typeface="Arial"/>
-                <a:cs typeface="Arial"/>
-                <a:sym typeface="Arial"/>
+                <a:latin typeface="Arial" panose="020B0604020202020204"/>
+                <a:ea typeface="Arial" panose="020B0604020202020204"/>
+                <a:cs typeface="Arial" panose="020B0604020202020204"/>
+                <a:sym typeface="Arial" panose="020B0604020202020204"/>
               </a:rPr>
-              <a:t>Implementar un calendario dinámico para el agendamiento encuentros, permitiendo la visualización de horarios disponibles y su actualización en tiempo real.</a:t>
-            </a:r>
+              <a:t>Implementar un calendario dinámico para el agendamiento de encuentros, permitiendo la visualización de horarios disponibles y su actualización en tiempo real.</a:t>
+            </a:r>
+            <a:endParaRPr lang="es-CO" dirty="0">
+              <a:solidFill>
+                <a:schemeClr val="dk1"/>
+              </a:solidFill>
+              <a:latin typeface="Arial" panose="020B0604020202020204"/>
+              <a:ea typeface="Arial" panose="020B0604020202020204"/>
+              <a:cs typeface="Arial" panose="020B0604020202020204"/>
+              <a:sym typeface="Arial" panose="020B0604020202020204"/>
+            </a:endParaRPr>
           </a:p>
           <a:p>
             <a:pPr marL="457200" marR="0" lvl="0" indent="-381000" algn="just" rtl="0">
@@ -7725,17 +7606,17 @@
                 <a:schemeClr val="dk1"/>
               </a:buClr>
               <a:buSzPts val="2400"/>
-              <a:buFont typeface="Arial"/>
+              <a:buFont typeface="Arial" panose="020B0604020202020204"/>
               <a:buChar char="-"/>
             </a:pPr>
             <a:endParaRPr lang="es-CO" b="0" i="0" u="none" strike="noStrike" cap="none" dirty="0">
               <a:solidFill>
                 <a:schemeClr val="dk1"/>
               </a:solidFill>
-              <a:latin typeface="Arial"/>
-              <a:ea typeface="Arial"/>
-              <a:cs typeface="Arial"/>
-              <a:sym typeface="Arial"/>
+              <a:latin typeface="Arial" panose="020B0604020202020204"/>
+              <a:ea typeface="Arial" panose="020B0604020202020204"/>
+              <a:cs typeface="Arial" panose="020B0604020202020204"/>
+              <a:sym typeface="Arial" panose="020B0604020202020204"/>
             </a:endParaRPr>
           </a:p>
           <a:p>
@@ -7753,7 +7634,7 @@
                 <a:schemeClr val="dk1"/>
               </a:buClr>
               <a:buSzPts val="2400"/>
-              <a:buFont typeface="Arial"/>
+              <a:buFont typeface="Arial" panose="020B0604020202020204"/>
               <a:buChar char="-"/>
             </a:pPr>
             <a:r>
@@ -7761,13 +7642,22 @@
                 <a:solidFill>
                   <a:schemeClr val="dk1"/>
                 </a:solidFill>
-                <a:latin typeface="Arial"/>
-                <a:ea typeface="Arial"/>
-                <a:cs typeface="Arial"/>
-                <a:sym typeface="Arial"/>
+                <a:latin typeface="Arial" panose="020B0604020202020204"/>
+                <a:ea typeface="Arial" panose="020B0604020202020204"/>
+                <a:cs typeface="Arial" panose="020B0604020202020204"/>
+                <a:sym typeface="Arial" panose="020B0604020202020204"/>
               </a:rPr>
               <a:t>Desarrollar un módulo de gestión de los clientes permitiendo el registro de usuarios, modificación, consulta y acceso al historial clínico de los clientes.</a:t>
             </a:r>
+            <a:endParaRPr lang="es-CO" dirty="0">
+              <a:solidFill>
+                <a:schemeClr val="dk1"/>
+              </a:solidFill>
+              <a:latin typeface="Arial" panose="020B0604020202020204"/>
+              <a:ea typeface="Arial" panose="020B0604020202020204"/>
+              <a:cs typeface="Arial" panose="020B0604020202020204"/>
+              <a:sym typeface="Arial" panose="020B0604020202020204"/>
+            </a:endParaRPr>
           </a:p>
           <a:p>
             <a:pPr marL="457200" marR="0" lvl="0" indent="-381000" algn="just" rtl="0">
@@ -7784,17 +7674,113 @@
                 <a:schemeClr val="dk1"/>
               </a:buClr>
               <a:buSzPts val="2400"/>
-              <a:buFont typeface="Arial"/>
+              <a:buFont typeface="Arial" panose="020B0604020202020204"/>
               <a:buChar char="-"/>
             </a:pPr>
-            <a:endParaRPr lang="es-CO" b="0" i="0" u="none" strike="noStrike" cap="none" dirty="0">
+            <a:r>
+              <a:rPr lang="en-US" altLang="es-ES" dirty="0">
+                <a:solidFill>
+                  <a:schemeClr val="dk1"/>
+                </a:solidFill>
+                <a:latin typeface="Arial" panose="020B0604020202020204"/>
+                <a:ea typeface="Arial" panose="020B0604020202020204"/>
+                <a:cs typeface="Arial" panose="020B0604020202020204"/>
+                <a:sym typeface="Arial" panose="020B0604020202020204"/>
+              </a:rPr>
+              <a:t>Implementar un m</a:t>
+            </a:r>
+            <a:r>
+              <a:rPr lang="en-US" altLang="en-US" dirty="0">
+                <a:solidFill>
+                  <a:schemeClr val="dk1"/>
+                </a:solidFill>
+                <a:latin typeface="Arial" panose="020B0604020202020204"/>
+                <a:ea typeface="Arial" panose="020B0604020202020204"/>
+                <a:cs typeface="Arial" panose="020B0604020202020204"/>
+                <a:sym typeface="Arial" panose="020B0604020202020204"/>
+              </a:rPr>
+              <a:t>ó</a:t>
+            </a:r>
+            <a:r>
+              <a:rPr lang="en-US" altLang="es-ES" dirty="0">
+                <a:solidFill>
+                  <a:schemeClr val="dk1"/>
+                </a:solidFill>
+                <a:latin typeface="Arial" panose="020B0604020202020204"/>
+                <a:ea typeface="Arial" panose="020B0604020202020204"/>
+                <a:cs typeface="Arial" panose="020B0604020202020204"/>
+                <a:sym typeface="Arial" panose="020B0604020202020204"/>
+              </a:rPr>
+              <a:t>dulo que permita gestionar los datos del personal, habilitando operaciones de registro, consulta y edici</a:t>
+            </a:r>
+            <a:r>
+              <a:rPr lang="en-US" altLang="en-US" dirty="0">
+                <a:solidFill>
+                  <a:schemeClr val="dk1"/>
+                </a:solidFill>
+                <a:latin typeface="Arial" panose="020B0604020202020204"/>
+                <a:ea typeface="Arial" panose="020B0604020202020204"/>
+                <a:cs typeface="Arial" panose="020B0604020202020204"/>
+                <a:sym typeface="Arial" panose="020B0604020202020204"/>
+              </a:rPr>
+              <a:t>ó</a:t>
+            </a:r>
+            <a:r>
+              <a:rPr lang="en-US" altLang="es-ES" dirty="0">
+                <a:solidFill>
+                  <a:schemeClr val="dk1"/>
+                </a:solidFill>
+                <a:latin typeface="Arial" panose="020B0604020202020204"/>
+                <a:ea typeface="Arial" panose="020B0604020202020204"/>
+                <a:cs typeface="Arial" panose="020B0604020202020204"/>
+                <a:sym typeface="Arial" panose="020B0604020202020204"/>
+              </a:rPr>
+              <a:t>n, asociando a cada empleado un </a:t>
+            </a:r>
+            <a:r>
+              <a:rPr lang="en-US" altLang="en-US" dirty="0">
+                <a:solidFill>
+                  <a:schemeClr val="dk1"/>
+                </a:solidFill>
+                <a:latin typeface="Arial" panose="020B0604020202020204"/>
+                <a:ea typeface="Arial" panose="020B0604020202020204"/>
+                <a:cs typeface="Arial" panose="020B0604020202020204"/>
+                <a:sym typeface="Arial" panose="020B0604020202020204"/>
+              </a:rPr>
+              <a:t>ú</a:t>
+            </a:r>
+            <a:r>
+              <a:rPr lang="en-US" altLang="es-ES" dirty="0">
+                <a:solidFill>
+                  <a:schemeClr val="dk1"/>
+                </a:solidFill>
+                <a:latin typeface="Arial" panose="020B0604020202020204"/>
+                <a:ea typeface="Arial" panose="020B0604020202020204"/>
+                <a:cs typeface="Arial" panose="020B0604020202020204"/>
+                <a:sym typeface="Arial" panose="020B0604020202020204"/>
+              </a:rPr>
+              <a:t>nico rol</a:t>
+            </a:r>
+            <a:r>
+              <a:rPr lang="es-CO" dirty="0">
+                <a:solidFill>
+                  <a:schemeClr val="dk1"/>
+                </a:solidFill>
+                <a:latin typeface="Arial" panose="020B0604020202020204"/>
+                <a:ea typeface="Arial" panose="020B0604020202020204"/>
+                <a:cs typeface="Arial" panose="020B0604020202020204"/>
+                <a:sym typeface="Arial" panose="020B0604020202020204"/>
+              </a:rPr>
+              <a:t>   </a:t>
+            </a:r>
+            <a:endParaRPr lang="es-CO" dirty="0">
               <a:solidFill>
                 <a:schemeClr val="dk1"/>
               </a:solidFill>
-              <a:latin typeface="Arial"/>
-              <a:ea typeface="Arial"/>
-              <a:cs typeface="Arial"/>
-              <a:sym typeface="Arial"/>
+              <a:latin typeface="Arial" panose="020B0604020202020204"/>
+              <a:ea typeface="Arial" panose="020B0604020202020204"/>
+              <a:cs typeface="Arial" panose="020B0604020202020204"/>
+              <a:sym typeface="Arial" panose="020B0604020202020204"/>
             </a:endParaRPr>
           </a:p>
           <a:p>
@@ -7812,34 +7798,22 @@
                 <a:schemeClr val="dk1"/>
               </a:buClr>
               <a:buSzPts val="2400"/>
-              <a:buFont typeface="Arial"/>
+              <a:buFont typeface="Arial" panose="020B0604020202020204"/>
               <a:buChar char="-"/>
             </a:pPr>
-            <a:r>
-              <a:rPr lang="es-CO" dirty="0">
-                <a:latin typeface="Arial" panose="020B0604020202020204" pitchFamily="34" charset="0"/>
-                <a:cs typeface="Arial" panose="020B0604020202020204" pitchFamily="34" charset="0"/>
-              </a:rPr>
-              <a:t>Crear un sección de gestión de horarios que permita la modificación y la consulta de los horarios, administrando las disponibilidades de cada cita en el sistema.</a:t>
-            </a:r>
             <a:endParaRPr lang="es-CO" b="0" i="0" u="none" strike="noStrike" cap="none" dirty="0">
               <a:solidFill>
                 <a:schemeClr val="dk1"/>
               </a:solidFill>
               <a:latin typeface="Arial" panose="020B0604020202020204" pitchFamily="34" charset="0"/>
-              <a:ea typeface="Arial"/>
+              <a:ea typeface="Arial" panose="020B0604020202020204"/>
               <a:cs typeface="Arial" panose="020B0604020202020204" pitchFamily="34" charset="0"/>
-              <a:sym typeface="Arial"/>
+              <a:sym typeface="Arial" panose="020B0604020202020204"/>
             </a:endParaRPr>
           </a:p>
         </p:txBody>
       </p:sp>
     </p:spTree>
-    <p:extLst>
-      <p:ext uri="{BB962C8B-B14F-4D97-AF65-F5344CB8AC3E}">
-        <p14:creationId xmlns:p14="http://schemas.microsoft.com/office/powerpoint/2010/main" val="1569414920"/>
-      </p:ext>
-    </p:extLst>
   </p:cSld>
   <p:clrMapOvr>
     <a:masterClrMapping/>
@@ -7874,26 +7848,11 @@
       </p:grpSpPr>
       <p:sp>
         <p:nvSpPr>
-          <p:cNvPr id="10" name="Rectangle 9">
-            <a:extLst>
-              <a:ext uri="{FF2B5EF4-FFF2-40B4-BE49-F238E27FC236}">
-                <a16:creationId xmlns:a16="http://schemas.microsoft.com/office/drawing/2014/main" id="{9A204626-2220-4678-A939-FD94EA7B5362}"/>
-              </a:ext>
-              <a:ext uri="{C183D7F6-B498-43B3-948B-1728B52AA6E4}">
-                <adec:decorative xmlns:adec="http://schemas.microsoft.com/office/drawing/2017/decorative" val="1"/>
-              </a:ext>
-            </a:extLst>
-          </p:cNvPr>
+          <p:cNvPr id="10" name="Rectangle 9"/>
           <p:cNvSpPr>
             <a:spLocks noGrp="1" noRot="1" noChangeAspect="1" noMove="1" noResize="1" noEditPoints="1" noAdjustHandles="1" noChangeArrowheads="1" noChangeShapeType="1" noTextEdit="1"/>
           </p:cNvSpPr>
-          <p:nvPr>
-            <p:extLst>
-              <p:ext uri="{386F3935-93C4-4BCD-93E2-E3B085C9AB24}">
-                <p16:designElem xmlns:p16="http://schemas.microsoft.com/office/powerpoint/2015/main" val="1"/>
-              </p:ext>
-            </p:extLst>
-          </p:nvPr>
+          <p:nvPr/>
         </p:nvSpPr>
         <p:spPr>
           <a:xfrm>
@@ -7937,13 +7896,7 @@
       </p:sp>
       <p:sp>
         <p:nvSpPr>
-          <p:cNvPr id="2" name="Título 1">
-            <a:extLst>
-              <a:ext uri="{FF2B5EF4-FFF2-40B4-BE49-F238E27FC236}">
-                <a16:creationId xmlns:a16="http://schemas.microsoft.com/office/drawing/2014/main" id="{B10A1B07-636F-DCD4-6CFE-7A212CEF9660}"/>
-              </a:ext>
-            </a:extLst>
-          </p:cNvPr>
+          <p:cNvPr id="2" name="Título 1"/>
           <p:cNvSpPr>
             <a:spLocks noGrp="1"/>
           </p:cNvSpPr>
@@ -7967,18 +7920,13 @@
               <a:rPr lang="es-CO" dirty="0"/>
               <a:t>Alcance y Delimitación</a:t>
             </a:r>
+            <a:endParaRPr lang="es-CO" dirty="0"/>
           </a:p>
         </p:txBody>
       </p:sp>
       <p:sp>
         <p:nvSpPr>
-          <p:cNvPr id="3" name="Marcador de contenido 2">
-            <a:extLst>
-              <a:ext uri="{FF2B5EF4-FFF2-40B4-BE49-F238E27FC236}">
-                <a16:creationId xmlns:a16="http://schemas.microsoft.com/office/drawing/2014/main" id="{22089D0F-BD56-2EB4-6255-3ABDC08E2B3D}"/>
-              </a:ext>
-            </a:extLst>
-          </p:cNvPr>
+          <p:cNvPr id="3" name="Marcador de contenido 2"/>
           <p:cNvSpPr>
             <a:spLocks noGrp="1"/>
           </p:cNvSpPr>
@@ -8012,26 +7960,11 @@
       </p:sp>
       <p:sp>
         <p:nvSpPr>
-          <p:cNvPr id="12" name="Rectangle 11">
-            <a:extLst>
-              <a:ext uri="{FF2B5EF4-FFF2-40B4-BE49-F238E27FC236}">
-                <a16:creationId xmlns:a16="http://schemas.microsoft.com/office/drawing/2014/main" id="{EB97D8A6-1C5A-42B6-AE78-F3D0F9BDF024}"/>
-              </a:ext>
-              <a:ext uri="{C183D7F6-B498-43B3-948B-1728B52AA6E4}">
-                <adec:decorative xmlns:adec="http://schemas.microsoft.com/office/drawing/2017/decorative" val="1"/>
-              </a:ext>
-            </a:extLst>
-          </p:cNvPr>
+          <p:cNvPr id="12" name="Rectangle 11"/>
           <p:cNvSpPr>
             <a:spLocks noGrp="1" noRot="1" noChangeAspect="1" noMove="1" noResize="1" noEditPoints="1" noAdjustHandles="1" noChangeArrowheads="1" noChangeShapeType="1" noTextEdit="1"/>
           </p:cNvSpPr>
-          <p:nvPr>
-            <p:extLst>
-              <p:ext uri="{386F3935-93C4-4BCD-93E2-E3B085C9AB24}">
-                <p16:designElem xmlns:p16="http://schemas.microsoft.com/office/powerpoint/2015/main" val="1"/>
-              </p:ext>
-            </p:extLst>
-          </p:nvPr>
+          <p:nvPr/>
         </p:nvSpPr>
         <p:spPr>
           <a:xfrm>
@@ -8074,26 +8007,20 @@
       </p:sp>
       <p:pic>
         <p:nvPicPr>
-          <p:cNvPr id="7" name="Graphic 6" descr="Daily Calendar">
-            <a:extLst>
-              <a:ext uri="{FF2B5EF4-FFF2-40B4-BE49-F238E27FC236}">
-                <a16:creationId xmlns:a16="http://schemas.microsoft.com/office/drawing/2014/main" id="{243CDA13-017A-5831-69B0-98AB59E96B5A}"/>
-              </a:ext>
-            </a:extLst>
-          </p:cNvPr>
+          <p:cNvPr id="7" name="Graphic 6" descr="Daily Calendar"/>
           <p:cNvPicPr>
             <a:picLocks noChangeAspect="1"/>
           </p:cNvPicPr>
           <p:nvPr/>
         </p:nvPicPr>
         <p:blipFill>
-          <a:blip r:embed="rId2">
+          <a:blip r:embed="rId1">
             <a:extLst>
               <a:ext uri="{28A0092B-C50C-407E-A947-70E740481C1C}">
                 <a14:useLocalDpi xmlns:a14="http://schemas.microsoft.com/office/drawing/2010/main" val="0"/>
               </a:ext>
               <a:ext uri="{96DAC541-7B7A-43D3-8B79-37D633B846F1}">
-                <asvg:svgBlip xmlns:asvg="http://schemas.microsoft.com/office/drawing/2016/SVG/main" r:embed="rId3"/>
+                <asvg:svgBlip xmlns:asvg="http://schemas.microsoft.com/office/drawing/2016/SVG/main" r:embed="rId2"/>
               </a:ext>
             </a:extLst>
           </a:blip>
@@ -8112,11 +8039,6 @@
         </p:spPr>
       </p:pic>
     </p:spTree>
-    <p:extLst>
-      <p:ext uri="{BB962C8B-B14F-4D97-AF65-F5344CB8AC3E}">
-        <p14:creationId xmlns:p14="http://schemas.microsoft.com/office/powerpoint/2010/main" val="3105105068"/>
-      </p:ext>
-    </p:extLst>
   </p:cSld>
   <p:clrMapOvr>
     <a:masterClrMapping/>
@@ -8151,26 +8073,11 @@
       </p:grpSpPr>
       <p:sp>
         <p:nvSpPr>
-          <p:cNvPr id="10" name="Rectangle 9">
-            <a:extLst>
-              <a:ext uri="{FF2B5EF4-FFF2-40B4-BE49-F238E27FC236}">
-                <a16:creationId xmlns:a16="http://schemas.microsoft.com/office/drawing/2014/main" id="{A93D97C6-63EF-4CA6-B01D-25E2772DC9EF}"/>
-              </a:ext>
-              <a:ext uri="{C183D7F6-B498-43B3-948B-1728B52AA6E4}">
-                <adec:decorative xmlns:adec="http://schemas.microsoft.com/office/drawing/2017/decorative" val="1"/>
-              </a:ext>
-            </a:extLst>
-          </p:cNvPr>
+          <p:cNvPr id="10" name="Rectangle 9"/>
           <p:cNvSpPr>
             <a:spLocks noGrp="1" noRot="1" noChangeAspect="1" noMove="1" noResize="1" noEditPoints="1" noAdjustHandles="1" noChangeArrowheads="1" noChangeShapeType="1" noTextEdit="1"/>
           </p:cNvSpPr>
-          <p:nvPr>
-            <p:extLst>
-              <p:ext uri="{386F3935-93C4-4BCD-93E2-E3B085C9AB24}">
-                <p16:designElem xmlns:p16="http://schemas.microsoft.com/office/powerpoint/2015/main" val="1"/>
-              </p:ext>
-            </p:extLst>
-          </p:nvPr>
+          <p:nvPr/>
         </p:nvSpPr>
         <p:spPr>
           <a:xfrm>
@@ -8214,13 +8121,7 @@
       </p:sp>
       <p:sp>
         <p:nvSpPr>
-          <p:cNvPr id="2" name="Título 1">
-            <a:extLst>
-              <a:ext uri="{FF2B5EF4-FFF2-40B4-BE49-F238E27FC236}">
-                <a16:creationId xmlns:a16="http://schemas.microsoft.com/office/drawing/2014/main" id="{9AF7CD6D-42A1-6794-A707-4C1B8DA74C5B}"/>
-              </a:ext>
-            </a:extLst>
-          </p:cNvPr>
+          <p:cNvPr id="2" name="Título 1"/>
           <p:cNvSpPr>
             <a:spLocks noGrp="1"/>
           </p:cNvSpPr>
@@ -8244,31 +8145,26 @@
               <a:rPr lang="es-CO" dirty="0"/>
               <a:t>Justificación</a:t>
             </a:r>
+            <a:endParaRPr lang="es-CO" dirty="0"/>
           </a:p>
         </p:txBody>
       </p:sp>
       <p:pic>
         <p:nvPicPr>
-          <p:cNvPr id="7" name="Graphic 6" descr="Sobre">
-            <a:extLst>
-              <a:ext uri="{FF2B5EF4-FFF2-40B4-BE49-F238E27FC236}">
-                <a16:creationId xmlns:a16="http://schemas.microsoft.com/office/drawing/2014/main" id="{85582584-C93E-F7A9-FB81-13B365F175BC}"/>
-              </a:ext>
-            </a:extLst>
-          </p:cNvPr>
+          <p:cNvPr id="7" name="Graphic 6" descr="Sobre"/>
           <p:cNvPicPr>
             <a:picLocks noChangeAspect="1"/>
           </p:cNvPicPr>
           <p:nvPr/>
         </p:nvPicPr>
         <p:blipFill>
-          <a:blip r:embed="rId2">
+          <a:blip r:embed="rId1">
             <a:extLst>
               <a:ext uri="{28A0092B-C50C-407E-A947-70E740481C1C}">
                 <a14:useLocalDpi xmlns:a14="http://schemas.microsoft.com/office/drawing/2010/main" val="0"/>
               </a:ext>
               <a:ext uri="{96DAC541-7B7A-43D3-8B79-37D633B846F1}">
-                <asvg:svgBlip xmlns:asvg="http://schemas.microsoft.com/office/drawing/2016/SVG/main" r:embed="rId3"/>
+                <asvg:svgBlip xmlns:asvg="http://schemas.microsoft.com/office/drawing/2016/SVG/main" r:embed="rId2"/>
               </a:ext>
             </a:extLst>
           </a:blip>
@@ -8288,26 +8184,11 @@
       </p:pic>
       <p:sp>
         <p:nvSpPr>
-          <p:cNvPr id="12" name="Rectangle 11">
-            <a:extLst>
-              <a:ext uri="{FF2B5EF4-FFF2-40B4-BE49-F238E27FC236}">
-                <a16:creationId xmlns:a16="http://schemas.microsoft.com/office/drawing/2014/main" id="{5DA4A40B-EDCE-42FC-B189-AEFB4F82E818}"/>
-              </a:ext>
-              <a:ext uri="{C183D7F6-B498-43B3-948B-1728B52AA6E4}">
-                <adec:decorative xmlns:adec="http://schemas.microsoft.com/office/drawing/2017/decorative" val="1"/>
-              </a:ext>
-            </a:extLst>
-          </p:cNvPr>
+          <p:cNvPr id="12" name="Rectangle 11"/>
           <p:cNvSpPr>
             <a:spLocks noGrp="1" noRot="1" noChangeAspect="1" noMove="1" noResize="1" noEditPoints="1" noAdjustHandles="1" noChangeArrowheads="1" noChangeShapeType="1" noTextEdit="1"/>
           </p:cNvSpPr>
-          <p:nvPr>
-            <p:extLst>
-              <p:ext uri="{386F3935-93C4-4BCD-93E2-E3B085C9AB24}">
-                <p16:designElem xmlns:p16="http://schemas.microsoft.com/office/powerpoint/2015/main" val="1"/>
-              </p:ext>
-            </p:extLst>
-          </p:nvPr>
+          <p:nvPr/>
         </p:nvSpPr>
         <p:spPr>
           <a:xfrm>
@@ -8350,13 +8231,7 @@
       </p:sp>
       <p:sp>
         <p:nvSpPr>
-          <p:cNvPr id="3" name="Marcador de contenido 2">
-            <a:extLst>
-              <a:ext uri="{FF2B5EF4-FFF2-40B4-BE49-F238E27FC236}">
-                <a16:creationId xmlns:a16="http://schemas.microsoft.com/office/drawing/2014/main" id="{67691EA7-4387-DAC8-A088-B8A31B8FE49E}"/>
-              </a:ext>
-            </a:extLst>
-          </p:cNvPr>
+          <p:cNvPr id="3" name="Marcador de contenido 2"/>
           <p:cNvSpPr>
             <a:spLocks noGrp="1"/>
           </p:cNvSpPr>
@@ -8403,11 +8278,6 @@
         </p:txBody>
       </p:sp>
     </p:spTree>
-    <p:extLst>
-      <p:ext uri="{BB962C8B-B14F-4D97-AF65-F5344CB8AC3E}">
-        <p14:creationId xmlns:p14="http://schemas.microsoft.com/office/powerpoint/2010/main" val="1874031150"/>
-      </p:ext>
-    </p:extLst>
   </p:cSld>
   <p:clrMapOvr>
     <a:masterClrMapping/>
@@ -8458,7 +8328,7 @@
     </a:clrScheme>
     <a:fontScheme name="Crop">
       <a:majorFont>
-        <a:latin typeface="Franklin Gothic Book" panose="020B0503020102020204"/>
+        <a:latin typeface="Franklin Gothic Book"/>
         <a:ea typeface=""/>
         <a:cs typeface=""/>
         <a:font script="Jpan" typeface="メイリオ"/>
@@ -8493,7 +8363,7 @@
         <a:font script="Geor" typeface="Sylfaen"/>
       </a:majorFont>
       <a:minorFont>
-        <a:latin typeface="Franklin Gothic Book" panose="020B0503020102020204"/>
+        <a:latin typeface="Franklin Gothic Book"/>
         <a:ea typeface=""/>
         <a:cs typeface=""/>
         <a:font script="Jpan" typeface="メイリオ"/>
@@ -8663,11 +8533,9 @@
       </a:bgFillStyleLst>
     </a:fmtScheme>
   </a:themeElements>
-  <a:objectDefaults/>
-  <a:extraClrSchemeLst/>
   <a:extLst>
     <a:ext uri="{05A4C25C-085E-4340-85A3-A5531E510DB2}">
-      <thm15:themeFamily xmlns:thm15="http://schemas.microsoft.com/office/thememl/2012/main" name="Crop" id="{EC9488ED-E761-4D60-9AC4-764D1FE2C171}" vid="{CE19780C-D67D-4C13-9DE9-A52BC3BA51B4}"/>
+      <thm15:themeFamily xmlns:thm15="http://schemas.microsoft.com/office/thememl/2012/main" name="Office Theme" id="{62F939B6-93AF-4DB8-9C6B-D6C7DFDC589F}" vid="{4A3C46E8-61CC-4603-A589-7422A47A8E4A}"/>
     </a:ext>
   </a:extLst>
 </a:theme>
@@ -8716,7 +8584,7 @@
     </a:clrScheme>
     <a:fontScheme name="Office">
       <a:majorFont>
-        <a:latin typeface="Aptos Display" panose="02110004020202020204"/>
+        <a:latin typeface="Aptos Display"/>
         <a:ea typeface=""/>
         <a:cs typeface=""/>
         <a:font script="Jpan" typeface="游ゴシック Light"/>
@@ -8749,26 +8617,9 @@
         <a:font script="Viet" typeface="Times New Roman"/>
         <a:font script="Uigh" typeface="Microsoft Uighur"/>
         <a:font script="Geor" typeface="Sylfaen"/>
-        <a:font script="Armn" typeface="Arial"/>
-        <a:font script="Bugi" typeface="Leelawadee UI"/>
-        <a:font script="Bopo" typeface="Microsoft JhengHei"/>
-        <a:font script="Java" typeface="Javanese Text"/>
-        <a:font script="Lisu" typeface="Segoe UI"/>
-        <a:font script="Mymr" typeface="Myanmar Text"/>
-        <a:font script="Nkoo" typeface="Ebrima"/>
-        <a:font script="Olck" typeface="Nirmala UI"/>
-        <a:font script="Osma" typeface="Ebrima"/>
-        <a:font script="Phag" typeface="Phagspa"/>
-        <a:font script="Syrn" typeface="Estrangelo Edessa"/>
-        <a:font script="Syrj" typeface="Estrangelo Edessa"/>
-        <a:font script="Syre" typeface="Estrangelo Edessa"/>
-        <a:font script="Sora" typeface="Nirmala UI"/>
-        <a:font script="Tale" typeface="Microsoft Tai Le"/>
-        <a:font script="Talu" typeface="Microsoft New Tai Lue"/>
-        <a:font script="Tfng" typeface="Ebrima"/>
       </a:majorFont>
       <a:minorFont>
-        <a:latin typeface="Aptos" panose="02110004020202020204"/>
+        <a:latin typeface="Aptos"/>
         <a:ea typeface=""/>
         <a:cs typeface=""/>
         <a:font script="Jpan" typeface="游ゴシック"/>
@@ -8801,23 +8652,6 @@
         <a:font script="Viet" typeface="Arial"/>
         <a:font script="Uigh" typeface="Microsoft Uighur"/>
         <a:font script="Geor" typeface="Sylfaen"/>
-        <a:font script="Armn" typeface="Arial"/>
-        <a:font script="Bugi" typeface="Leelawadee UI"/>
-        <a:font script="Bopo" typeface="Microsoft JhengHei"/>
-        <a:font script="Java" typeface="Javanese Text"/>
-        <a:font script="Lisu" typeface="Segoe UI"/>
-        <a:font script="Mymr" typeface="Myanmar Text"/>
-        <a:font script="Nkoo" typeface="Ebrima"/>
-        <a:font script="Olck" typeface="Nirmala UI"/>
-        <a:font script="Osma" typeface="Ebrima"/>
-        <a:font script="Phag" typeface="Phagspa"/>
-        <a:font script="Syrn" typeface="Estrangelo Edessa"/>
-        <a:font script="Syrj" typeface="Estrangelo Edessa"/>
-        <a:font script="Syre" typeface="Estrangelo Edessa"/>
-        <a:font script="Sora" typeface="Nirmala UI"/>
-        <a:font script="Tale" typeface="Microsoft Tai Le"/>
-        <a:font script="Talu" typeface="Microsoft New Tai Lue"/>
-        <a:font script="Tfng" typeface="Ebrima"/>
       </a:minorFont>
     </a:fontScheme>
     <a:fmtScheme name="Office">
@@ -8979,10 +8813,9 @@
       </a:style>
     </a:lnDef>
   </a:objectDefaults>
-  <a:extraClrSchemeLst/>
   <a:extLst>
     <a:ext uri="{05A4C25C-085E-4340-85A3-A5531E510DB2}">
-      <thm15:themeFamily xmlns:thm15="http://schemas.microsoft.com/office/thememl/2012/main" name="Office Theme" id="{2E142A2C-CD16-42D6-873A-C26D2A0506FA}" vid="{1BDDFF52-6CD6-40A5-AB3C-68EB2F1E4D0A}"/>
+      <thm15:themeFamily xmlns:thm15="http://schemas.microsoft.com/office/thememl/2012/main" name="Office Theme" id="{62F939B6-93AF-4DB8-9C6B-D6C7DFDC589F}" vid="{4A3C46E8-61CC-4603-A589-7422A47A8E4A}"/>
     </a:ext>
   </a:extLst>
 </a:theme>
